--- a/Expose6_Hive_Groupe6.pptx
+++ b/Expose6_Hive_Groupe6.pptx
@@ -8,19 +8,23 @@
     <p:sldId id="256" r:id="rId2"/>
     <p:sldId id="257" r:id="rId3"/>
     <p:sldId id="258" r:id="rId4"/>
+    <p:sldId id="276" r:id="rId27"/>
     <p:sldId id="259" r:id="rId5"/>
     <p:sldId id="260" r:id="rId6"/>
     <p:sldId id="261" r:id="rId7"/>
     <p:sldId id="262" r:id="rId8"/>
+    <p:sldId id="277" r:id="rId28"/>
     <p:sldId id="263" r:id="rId9"/>
     <p:sldId id="264" r:id="rId10"/>
     <p:sldId id="265" r:id="rId11"/>
     <p:sldId id="266" r:id="rId12"/>
     <p:sldId id="267" r:id="rId13"/>
+    <p:sldId id="275" r:id="rId26"/>
     <p:sldId id="268" r:id="rId14"/>
     <p:sldId id="269" r:id="rId15"/>
     <p:sldId id="270" r:id="rId16"/>
     <p:sldId id="271" r:id="rId17"/>
+    <p:sldId id="278" r:id="rId29"/>
     <p:sldId id="272" r:id="rId18"/>
     <p:sldId id="273" r:id="rId19"/>
     <p:sldId id="274" r:id="rId20"/>
@@ -1272,7 +1276,7 @@
           <a:p>
             <a:r>
               <a:rPr lang="en-US" dirty="0"/>
-              <a:t>Trois chemins indépendants vers les mêmes nombres. S'ils concordent, le résultat est solide. Préciser que l'écart est nul, pas seulement sous la tolérance de 0,01 FCFA.</a:t>
+              <a:t>Quatre chemins indépendants vers les mêmes nombres : Hive, DuckDB, notre référence MapReduce, et la chaîne du Groupe 5 réellement exécutée sous YARN. Les trois premiers sont internes, le quatrième est externe : c'est lui qui a le plus de valeur. Préciser que l'écart est nul, pas seulement sous la tolérance de 0,01 FCFA.</a:t>
             </a:r>
             <a:endParaRPr lang="en-US" dirty="0"/>
           </a:p>
@@ -1448,7 +1452,7 @@
           <a:p>
             <a:r>
               <a:rPr lang="en-US" dirty="0"/>
-              <a:t>Terminer sur les trois enseignements, puis énoncer les limites sans attendre qu'on nous les oppose. C'est ce qui donne du crédit au reste. Finir par les prolongements si on nous les demande : ajouter des DataNodes, essayer le bucketing, reprendre la comparaison avec les vraies sorties du Groupe 4.</a:t>
+              <a:t>Terminer sur les trois enseignements, puis énoncer les limites sans attendre qu'on nous les oppose. La troisième limite a changé : ce n'est plus l'absence de livraison amont, c'est que le travail du Groupe 5 n'a pas encore été validé par le jury. Prolongements si on les demande : ajouter des DataNodes, essayer le bucketing, rejouer la comparaison après la soutenance du Groupe 5.</a:t>
             </a:r>
             <a:endParaRPr lang="en-US" dirty="0"/>
           </a:p>
@@ -1624,7 +1628,7 @@
           <a:p>
             <a:r>
               <a:rPr lang="en-US" dirty="0"/>
-              <a:t>Diapositive à présenter de façon factuelle, sans reproche envers les autres groupes. Le point important : nous avons reconstruit ET documenté. L'énoncé interdit la reconstruction silencieuse, pas la reconstruction.</a:t>
+              <a:t>Diapositive à présenter de façon factuelle. Le Groupe 5 a livré : nous avons vérifié son livrable au lieu de le reprendre, comme l'énoncé l'exige. Dire que leur travail n'a pas encore été présenté au jury : nous parlons de concordance, pas de validation. Et préciser que les empreintes MD5 prouvent que les deux chaînes ont travaillé sur des fichiers identiques — sinon la concordance des totaux ne voudrait rien dire.</a:t>
             </a:r>
             <a:endParaRPr lang="en-US" dirty="0"/>
           </a:p>
@@ -2406,7 +2410,7 @@
     <p:bg>
       <p:bgPr>
         <a:solidFill>
-          <a:srgbClr val="FFFFFF"/>
+          <a:srgbClr val="EFF2F7"/>
         </a:solidFill>
       </p:bgPr>
     </p:bg>
@@ -3005,14 +3009,14 @@
               <a:buNone/>
             </a:pPr>
             <a:r>
-              <a:rPr lang="en-US" sz="1500" b="1" spc="200" kern="0" dirty="0">
+              <a:rPr lang="en-US" sz="1600" b="1" spc="200" kern="0" dirty="0">
                 <a:solidFill>
                   <a:srgbClr val="CADCFC"/>
                 </a:solidFill>
               </a:rPr>
               <a:t>Exposé 6</a:t>
             </a:r>
-            <a:endParaRPr lang="en-US" sz="1500" dirty="0"/>
+            <a:endParaRPr lang="en-US" sz="1600" dirty="0"/>
           </a:p>
         </p:txBody>
       </p:sp>
@@ -3091,55 +3095,55 @@
               </a:rPr>
               <a:t>Construction d'une couche analytique SQL au-dessus d'un Data Lake HDFS</a:t>
             </a:r>
-            <a:endParaRPr lang="en-US" sz="1500" dirty="0"/>
+            <a:endParaRPr lang="en-US" sz="1600" dirty="0"/>
           </a:p>
           <a:p>
             <a:pPr indent="0" marL="0">
               <a:buNone/>
             </a:pPr>
-            <a:endParaRPr lang="en-US" sz="1500" dirty="0"/>
+            <a:endParaRPr lang="en-US" sz="1600" dirty="0"/>
           </a:p>
           <a:p>
             <a:pPr indent="0" marL="0">
               <a:buNone/>
             </a:pPr>
             <a:r>
-              <a:rPr lang="en-US" sz="1500" dirty="0">
+              <a:rPr lang="en-US" sz="1600" dirty="0">
                 <a:solidFill>
                   <a:srgbClr val="CADCFC"/>
                 </a:solidFill>
               </a:rPr>
               <a:t>AMAH-TCHOUTCHOUI Ékué Donald · FIOKLOU Donia · MINGANE Gracia · MOUN-RE Maxime</a:t>
             </a:r>
-            <a:endParaRPr lang="en-US" sz="1500" dirty="0"/>
+            <a:endParaRPr lang="en-US" sz="1600" dirty="0"/>
           </a:p>
           <a:p>
             <a:pPr indent="0" marL="0">
               <a:buNone/>
             </a:pPr>
             <a:r>
-              <a:rPr lang="en-US" sz="1500" dirty="0">
+              <a:rPr lang="en-US" sz="1600" dirty="0">
                 <a:solidFill>
                   <a:srgbClr val="CADCFC"/>
                 </a:solidFill>
               </a:rPr>
               <a:t>Sous la direction du Dr. Sena APEKE</a:t>
             </a:r>
-            <a:endParaRPr lang="en-US" sz="1500" dirty="0"/>
+            <a:endParaRPr lang="en-US" sz="1600" dirty="0"/>
           </a:p>
           <a:p>
             <a:pPr indent="0" marL="0">
               <a:buNone/>
             </a:pPr>
             <a:r>
-              <a:rPr lang="en-US" sz="1500" dirty="0">
+              <a:rPr lang="en-US" sz="1600" dirty="0">
                 <a:solidFill>
                   <a:srgbClr val="CADCFC"/>
                 </a:solidFill>
               </a:rPr>
               <a:t>M1 Big Data · UCAO-UUT · 2025-2026</a:t>
             </a:r>
-            <a:endParaRPr lang="en-US" sz="1500" dirty="0"/>
+            <a:endParaRPr lang="en-US" sz="1600" dirty="0"/>
           </a:p>
         </p:txBody>
       </p:sp>
@@ -3148,6 +3152,9 @@
   <p:clrMapOvr>
     <a:masterClrMapping/>
   </p:clrMapOvr>
+  <p:transition spd="med" advClick="1">
+    <p:fade/>
+  </p:transition>
 </p:sld>
 </file>
 
@@ -3261,7 +3268,7 @@
               <a:buNone/>
             </a:pPr>
             <a:r>
-              <a:rPr lang="en-US" sz="1200" dirty="0">
+              <a:rPr lang="en-US" sz="1350" dirty="0">
                 <a:solidFill>
                   <a:srgbClr val="1A1A1A"/>
                 </a:solidFill>
@@ -3271,14 +3278,14 @@
               </a:rPr>
               <a:t>CREATE EXTERNAL TABLE transactions_part ( ... )</a:t>
             </a:r>
-            <a:endParaRPr lang="en-US" sz="1200" dirty="0"/>
+            <a:endParaRPr lang="en-US" sz="1350" dirty="0"/>
           </a:p>
           <a:p>
             <a:pPr algn="l" indent="0" marL="0">
               <a:buNone/>
             </a:pPr>
             <a:r>
-              <a:rPr lang="en-US" sz="1200" dirty="0">
+              <a:rPr lang="en-US" sz="1350" dirty="0">
                 <a:solidFill>
                   <a:srgbClr val="1A1A1A"/>
                 </a:solidFill>
@@ -3288,14 +3295,14 @@
               </a:rPr>
               <a:t>PARTITIONED BY (annee INT, mois INT)</a:t>
             </a:r>
-            <a:endParaRPr lang="en-US" sz="1200" dirty="0"/>
+            <a:endParaRPr lang="en-US" sz="1350" dirty="0"/>
           </a:p>
           <a:p>
             <a:pPr algn="l" indent="0" marL="0">
               <a:buNone/>
             </a:pPr>
             <a:r>
-              <a:rPr lang="en-US" sz="1200" dirty="0">
+              <a:rPr lang="en-US" sz="1350" dirty="0">
                 <a:solidFill>
                   <a:srgbClr val="1A1A1A"/>
                 </a:solidFill>
@@ -3305,14 +3312,14 @@
               </a:rPr>
               <a:t>STORED AS ORC</a:t>
             </a:r>
-            <a:endParaRPr lang="en-US" sz="1200" dirty="0"/>
+            <a:endParaRPr lang="en-US" sz="1350" dirty="0"/>
           </a:p>
           <a:p>
             <a:pPr algn="l" indent="0" marL="0">
               <a:buNone/>
             </a:pPr>
             <a:r>
-              <a:rPr lang="en-US" sz="1200" dirty="0">
+              <a:rPr lang="en-US" sz="1350" dirty="0">
                 <a:solidFill>
                   <a:srgbClr val="1A1A1A"/>
                 </a:solidFill>
@@ -3322,7 +3329,7 @@
               </a:rPr>
               <a:t>LOCATION '/datalake/processed/transactions_part';</a:t>
             </a:r>
-            <a:endParaRPr lang="en-US" sz="1200" dirty="0"/>
+            <a:endParaRPr lang="en-US" sz="1350" dirty="0"/>
           </a:p>
         </p:txBody>
       </p:sp>
@@ -3378,7 +3385,7 @@
               <a:buNone/>
             </a:pPr>
             <a:r>
-              <a:rPr lang="en-US" sz="1200" dirty="0">
+              <a:rPr lang="en-US" sz="1350" dirty="0">
                 <a:solidFill>
                   <a:srgbClr val="1A1A1A"/>
                 </a:solidFill>
@@ -3388,14 +3395,14 @@
               </a:rPr>
               <a:t>INSERT OVERWRITE TABLE transactions_part</a:t>
             </a:r>
-            <a:endParaRPr lang="en-US" sz="1200" dirty="0"/>
+            <a:endParaRPr lang="en-US" sz="1350" dirty="0"/>
           </a:p>
           <a:p>
             <a:pPr algn="l" indent="0" marL="0">
               <a:buNone/>
             </a:pPr>
             <a:r>
-              <a:rPr lang="en-US" sz="1200" dirty="0">
+              <a:rPr lang="en-US" sz="1350" dirty="0">
                 <a:solidFill>
                   <a:srgbClr val="1A1A1A"/>
                 </a:solidFill>
@@ -3405,14 +3412,14 @@
               </a:rPr>
               <a:t>       PARTITION (annee, mois)</a:t>
             </a:r>
-            <a:endParaRPr lang="en-US" sz="1200" dirty="0"/>
+            <a:endParaRPr lang="en-US" sz="1350" dirty="0"/>
           </a:p>
           <a:p>
             <a:pPr algn="l" indent="0" marL="0">
               <a:buNone/>
             </a:pPr>
             <a:r>
-              <a:rPr lang="en-US" sz="1200" dirty="0">
+              <a:rPr lang="en-US" sz="1350" dirty="0">
                 <a:solidFill>
                   <a:srgbClr val="1A1A1A"/>
                 </a:solidFill>
@@ -3422,14 +3429,14 @@
               </a:rPr>
               <a:t>SELECT transaction_id, ..., montant,</a:t>
             </a:r>
-            <a:endParaRPr lang="en-US" sz="1200" dirty="0"/>
+            <a:endParaRPr lang="en-US" sz="1350" dirty="0"/>
           </a:p>
           <a:p>
             <a:pPr algn="l" indent="0" marL="0">
               <a:buNone/>
             </a:pPr>
             <a:r>
-              <a:rPr lang="en-US" sz="1200" dirty="0">
+              <a:rPr lang="en-US" sz="1350" dirty="0">
                 <a:solidFill>
                   <a:srgbClr val="1A1A1A"/>
                 </a:solidFill>
@@ -3439,14 +3446,14 @@
               </a:rPr>
               <a:t>       CAST(SUBSTR(datetime, 1, 4) AS INT) AS annee,</a:t>
             </a:r>
-            <a:endParaRPr lang="en-US" sz="1200" dirty="0"/>
+            <a:endParaRPr lang="en-US" sz="1350" dirty="0"/>
           </a:p>
           <a:p>
             <a:pPr algn="l" indent="0" marL="0">
               <a:buNone/>
             </a:pPr>
             <a:r>
-              <a:rPr lang="en-US" sz="1200" dirty="0">
+              <a:rPr lang="en-US" sz="1350" dirty="0">
                 <a:solidFill>
                   <a:srgbClr val="1A1A1A"/>
                 </a:solidFill>
@@ -3456,14 +3463,14 @@
               </a:rPr>
               <a:t>       CAST(SUBSTR(datetime, 6, 2) AS INT) AS mois</a:t>
             </a:r>
-            <a:endParaRPr lang="en-US" sz="1200" dirty="0"/>
+            <a:endParaRPr lang="en-US" sz="1350" dirty="0"/>
           </a:p>
           <a:p>
             <a:pPr algn="l" indent="0" marL="0">
               <a:buNone/>
             </a:pPr>
             <a:r>
-              <a:rPr lang="en-US" sz="1200" dirty="0">
+              <a:rPr lang="en-US" sz="1350" dirty="0">
                 <a:solidFill>
                   <a:srgbClr val="1A1A1A"/>
                 </a:solidFill>
@@ -3473,7 +3480,7 @@
               </a:rPr>
               <a:t>FROM transactions;</a:t>
             </a:r>
-            <a:endParaRPr lang="en-US" sz="1200" dirty="0"/>
+            <a:endParaRPr lang="en-US" sz="1350" dirty="0"/>
           </a:p>
         </p:txBody>
       </p:sp>
@@ -3494,11 +3501,11 @@
             </a:avLst>
           </a:prstGeom>
           <a:solidFill>
-            <a:srgbClr val="F2F5FC"/>
+            <a:srgbClr val="FFFFFF"/>
           </a:solidFill>
           <a:ln w="12700">
             <a:solidFill>
-              <a:srgbClr val="F2F5FC"/>
+              <a:srgbClr val="FFFFFF"/>
             </a:solidFill>
             <a:prstDash val="solid"/>
           </a:ln>
@@ -3529,14 +3536,14 @@
               <a:buNone/>
             </a:pPr>
             <a:r>
-              <a:rPr lang="en-US" sz="1400" b="1" dirty="0">
+              <a:rPr lang="en-US" sz="1500" b="1" dirty="0">
                 <a:solidFill>
                   <a:srgbClr val="1E2761"/>
                 </a:solidFill>
               </a:rPr>
               <a:t>Ce que HDFS reçoit</a:t>
             </a:r>
-            <a:endParaRPr lang="en-US" sz="1400" dirty="0"/>
+            <a:endParaRPr lang="en-US" sz="1500" dirty="0"/>
           </a:p>
         </p:txBody>
       </p:sp>
@@ -3568,7 +3575,7 @@
               <a:buNone/>
             </a:pPr>
             <a:r>
-              <a:rPr lang="en-US" sz="1200" dirty="0">
+              <a:rPr lang="en-US" sz="1350" dirty="0">
                 <a:solidFill>
                   <a:srgbClr val="1A1A1A"/>
                 </a:solidFill>
@@ -3578,7 +3585,7 @@
               </a:rPr>
               <a:t>annee=2024/mois=1/</a:t>
             </a:r>
-            <a:endParaRPr lang="en-US" sz="1200" dirty="0"/>
+            <a:endParaRPr lang="en-US" sz="1350" dirty="0"/>
           </a:p>
           <a:p>
             <a:pPr indent="0" marL="0">
@@ -3588,7 +3595,7 @@
               <a:buNone/>
             </a:pPr>
             <a:r>
-              <a:rPr lang="en-US" sz="1200" dirty="0">
+              <a:rPr lang="en-US" sz="1350" dirty="0">
                 <a:solidFill>
                   <a:srgbClr val="1A1A1A"/>
                 </a:solidFill>
@@ -3598,7 +3605,7 @@
               </a:rPr>
               <a:t>annee=2024/mois=2/</a:t>
             </a:r>
-            <a:endParaRPr lang="en-US" sz="1200" dirty="0"/>
+            <a:endParaRPr lang="en-US" sz="1350" dirty="0"/>
           </a:p>
           <a:p>
             <a:pPr indent="0" marL="0">
@@ -3608,7 +3615,7 @@
               <a:buNone/>
             </a:pPr>
             <a:r>
-              <a:rPr lang="en-US" sz="1200" dirty="0">
+              <a:rPr lang="en-US" sz="1350" dirty="0">
                 <a:solidFill>
                   <a:srgbClr val="1A1A1A"/>
                 </a:solidFill>
@@ -3618,7 +3625,7 @@
               </a:rPr>
               <a:t>...</a:t>
             </a:r>
-            <a:endParaRPr lang="en-US" sz="1200" dirty="0"/>
+            <a:endParaRPr lang="en-US" sz="1350" dirty="0"/>
           </a:p>
           <a:p>
             <a:pPr indent="0" marL="0">
@@ -3628,7 +3635,7 @@
               <a:buNone/>
             </a:pPr>
             <a:r>
-              <a:rPr lang="en-US" sz="1200" dirty="0">
+              <a:rPr lang="en-US" sz="1350" dirty="0">
                 <a:solidFill>
                   <a:srgbClr val="1A1A1A"/>
                 </a:solidFill>
@@ -3638,7 +3645,7 @@
               </a:rPr>
               <a:t>annee=2025/mois=12/</a:t>
             </a:r>
-            <a:endParaRPr lang="en-US" sz="1200" dirty="0"/>
+            <a:endParaRPr lang="en-US" sz="1350" dirty="0"/>
           </a:p>
         </p:txBody>
       </p:sp>
@@ -3703,14 +3710,14 @@
               <a:buNone/>
             </a:pPr>
             <a:r>
-              <a:rPr lang="en-US" sz="1200" dirty="0">
-                <a:solidFill>
-                  <a:srgbClr val="52514E"/>
+              <a:rPr lang="en-US" sz="1350" dirty="0">
+                <a:solidFill>
+                  <a:srgbClr val="353430"/>
                 </a:solidFill>
               </a:rPr>
               <a:t>partitions créées</a:t>
             </a:r>
-            <a:endParaRPr lang="en-US" sz="1200" dirty="0"/>
+            <a:endParaRPr lang="en-US" sz="1350" dirty="0"/>
           </a:p>
         </p:txBody>
       </p:sp>
@@ -3775,14 +3782,14 @@
               <a:buNone/>
             </a:pPr>
             <a:r>
-              <a:rPr lang="en-US" sz="1200" dirty="0">
-                <a:solidFill>
-                  <a:srgbClr val="52514E"/>
+              <a:rPr lang="en-US" sz="1350" dirty="0">
+                <a:solidFill>
+                  <a:srgbClr val="353430"/>
                 </a:solidFill>
               </a:rPr>
               <a:t>lignes par partition</a:t>
             </a:r>
-            <a:endParaRPr lang="en-US" sz="1200" dirty="0"/>
+            <a:endParaRPr lang="en-US" sz="1350" dirty="0"/>
           </a:p>
         </p:txBody>
       </p:sp>
@@ -3838,7 +3845,7 @@
               <a:buNone/>
             </a:pPr>
             <a:r>
-              <a:rPr lang="en-US" sz="1350" b="1" dirty="0">
+              <a:rPr lang="en-US" sz="1450" b="1" dirty="0">
                 <a:solidFill>
                   <a:srgbClr val="CADCFC"/>
                 </a:solidFill>
@@ -3849,14 +3856,14 @@
               <a:buNone/>
             </a:pPr>
             <a:r>
-              <a:rPr lang="en-US" sz="1350" dirty="0">
+              <a:rPr lang="en-US" sz="1450" dirty="0">
                 <a:solidFill>
                   <a:srgbClr val="FFFFFF"/>
                 </a:solidFill>
               </a:rPr>
               <a:t>les colonnes de partition doivent être les dernières du SELECT. Hive les repère par leur position, pas par leur nom.</a:t>
             </a:r>
-            <a:endParaRPr lang="en-US" sz="1350" dirty="0"/>
+            <a:endParaRPr lang="en-US" sz="1450" dirty="0"/>
           </a:p>
         </p:txBody>
       </p:sp>
@@ -3888,9 +3895,9 @@
           <a:bodyPr/>
           <a:lstStyle>
             <a:lvl1pPr>
-              <a:defRPr sz="1000">
-                <a:solidFill>
-                  <a:srgbClr val="52514E"/>
+              <a:defRPr sz="1200">
+                <a:solidFill>
+                  <a:srgbClr val="353430"/>
                 </a:solidFill>
               </a:defRPr>
             </a:lvl1pPr>
@@ -3910,6 +3917,9 @@
   <p:clrMapOvr>
     <a:masterClrMapping/>
   </p:clrMapOvr>
+  <p:transition spd="med" advClick="1">
+    <p:fade/>
+  </p:transition>
 </p:sld>
 </file>
 
@@ -3996,14 +4006,14 @@
               <a:buNone/>
             </a:pPr>
             <a:r>
-              <a:rPr lang="en-US" sz="1400" dirty="0">
-                <a:solidFill>
-                  <a:srgbClr val="52514E"/>
+              <a:rPr lang="en-US" sz="1500" dirty="0">
+                <a:solidFill>
+                  <a:srgbClr val="353430"/>
                 </a:solidFill>
               </a:rPr>
               <a:t>Trois critères ont guidé ce choix. C'est la question que l'on nous posera.</a:t>
             </a:r>
-            <a:endParaRPr lang="en-US" sz="1400" dirty="0"/>
+            <a:endParaRPr lang="en-US" sz="1500" dirty="0"/>
           </a:p>
         </p:txBody>
       </p:sp>
@@ -4084,14 +4094,14 @@
               <a:buNone/>
             </a:pPr>
             <a:r>
-              <a:rPr lang="en-US" sz="1300" b="1" dirty="0">
+              <a:rPr lang="en-US" sz="1400" b="1" dirty="0">
                 <a:solidFill>
                   <a:srgbClr val="FFFFFF"/>
                 </a:solidFill>
               </a:rPr>
               <a:t>1</a:t>
             </a:r>
-            <a:endParaRPr lang="en-US" sz="1300" dirty="0"/>
+            <a:endParaRPr lang="en-US" sz="1400" dirty="0"/>
           </a:p>
         </p:txBody>
       </p:sp>
@@ -4120,14 +4130,14 @@
               <a:buNone/>
             </a:pPr>
             <a:r>
-              <a:rPr lang="en-US" sz="1500" b="1" dirty="0">
+              <a:rPr lang="en-US" sz="1600" b="1" dirty="0">
                 <a:solidFill>
                   <a:srgbClr val="1E2761"/>
                 </a:solidFill>
               </a:rPr>
               <a:t>L'usage</a:t>
             </a:r>
-            <a:endParaRPr lang="en-US" sz="1500" dirty="0"/>
+            <a:endParaRPr lang="en-US" sz="1600" dirty="0"/>
           </a:p>
         </p:txBody>
       </p:sp>
@@ -4159,14 +4169,14 @@
               <a:buNone/>
             </a:pPr>
             <a:r>
-              <a:rPr lang="en-US" sz="1250" dirty="0">
+              <a:rPr lang="en-US" sz="1400" dirty="0">
                 <a:solidFill>
                   <a:srgbClr val="1A1A1A"/>
                 </a:solidFill>
               </a:rPr>
               <a:t>Une clé de partition ne sert que si les requêtes filtrent dessus. Les analyses demandées sont temporelles : chiffre d'affaires mensuel, chiffre d'affaires annuel.</a:t>
             </a:r>
-            <a:endParaRPr lang="en-US" sz="1250" dirty="0"/>
+            <a:endParaRPr lang="en-US" sz="1400" dirty="0"/>
           </a:p>
         </p:txBody>
       </p:sp>
@@ -4247,14 +4257,14 @@
               <a:buNone/>
             </a:pPr>
             <a:r>
-              <a:rPr lang="en-US" sz="1300" b="1" dirty="0">
+              <a:rPr lang="en-US" sz="1400" b="1" dirty="0">
                 <a:solidFill>
                   <a:srgbClr val="FFFFFF"/>
                 </a:solidFill>
               </a:rPr>
               <a:t>2</a:t>
             </a:r>
-            <a:endParaRPr lang="en-US" sz="1300" dirty="0"/>
+            <a:endParaRPr lang="en-US" sz="1400" dirty="0"/>
           </a:p>
         </p:txBody>
       </p:sp>
@@ -4283,14 +4293,14 @@
               <a:buNone/>
             </a:pPr>
             <a:r>
-              <a:rPr lang="en-US" sz="1500" b="1" dirty="0">
+              <a:rPr lang="en-US" sz="1600" b="1" dirty="0">
                 <a:solidFill>
                   <a:srgbClr val="1E2761"/>
                 </a:solidFill>
               </a:rPr>
               <a:t>L'équilibre</a:t>
             </a:r>
-            <a:endParaRPr lang="en-US" sz="1500" dirty="0"/>
+            <a:endParaRPr lang="en-US" sz="1600" dirty="0"/>
           </a:p>
         </p:txBody>
       </p:sp>
@@ -4322,14 +4332,14 @@
               <a:buNone/>
             </a:pPr>
             <a:r>
-              <a:rPr lang="en-US" sz="1250" dirty="0">
+              <a:rPr lang="en-US" sz="1400" dirty="0">
                 <a:solidFill>
                   <a:srgbClr val="1A1A1A"/>
                 </a:solidFill>
               </a:rPr>
               <a:t>Nos 24 partitions comptent environ 20 800 lignes chacune. Par ville, Lomé en concentrerait 40 % et Aného 5 % : un rapport de huit, et un travail mal réparti entre les machines.</a:t>
             </a:r>
-            <a:endParaRPr lang="en-US" sz="1250" dirty="0"/>
+            <a:endParaRPr lang="en-US" sz="1400" dirty="0"/>
           </a:p>
         </p:txBody>
       </p:sp>
@@ -4410,14 +4420,14 @@
               <a:buNone/>
             </a:pPr>
             <a:r>
-              <a:rPr lang="en-US" sz="1300" b="1" dirty="0">
+              <a:rPr lang="en-US" sz="1400" b="1" dirty="0">
                 <a:solidFill>
                   <a:srgbClr val="FFFFFF"/>
                 </a:solidFill>
               </a:rPr>
               <a:t>3</a:t>
             </a:r>
-            <a:endParaRPr lang="en-US" sz="1300" dirty="0"/>
+            <a:endParaRPr lang="en-US" sz="1400" dirty="0"/>
           </a:p>
         </p:txBody>
       </p:sp>
@@ -4446,14 +4456,14 @@
               <a:buNone/>
             </a:pPr>
             <a:r>
-              <a:rPr lang="en-US" sz="1500" b="1" dirty="0">
+              <a:rPr lang="en-US" sz="1600" b="1" dirty="0">
                 <a:solidFill>
                   <a:srgbClr val="1E2761"/>
                 </a:solidFill>
               </a:rPr>
               <a:t>Le nombre</a:t>
             </a:r>
-            <a:endParaRPr lang="en-US" sz="1500" dirty="0"/>
+            <a:endParaRPr lang="en-US" sz="1600" dirty="0"/>
           </a:p>
         </p:txBody>
       </p:sp>
@@ -4485,14 +4495,14 @@
               <a:buNone/>
             </a:pPr>
             <a:r>
-              <a:rPr lang="en-US" sz="1250" dirty="0">
+              <a:rPr lang="en-US" sz="1400" dirty="0">
                 <a:solidFill>
                   <a:srgbClr val="1A1A1A"/>
                 </a:solidFill>
               </a:rPr>
               <a:t>Par jour : 730 partitions de 685 lignes. Par transaction : 500 000 partitions d'une ligne. On tomberait en plein dans le problème des petits fichiers de HDFS.</a:t>
             </a:r>
-            <a:endParaRPr lang="en-US" sz="1250" dirty="0"/>
+            <a:endParaRPr lang="en-US" sz="1400" dirty="0"/>
           </a:p>
         </p:txBody>
       </p:sp>
@@ -4524,9 +4534,9 @@
           <a:bodyPr/>
           <a:lstStyle>
             <a:lvl1pPr>
-              <a:defRPr sz="1000">
-                <a:solidFill>
-                  <a:srgbClr val="52514E"/>
+              <a:defRPr sz="1200">
+                <a:solidFill>
+                  <a:srgbClr val="353430"/>
                 </a:solidFill>
               </a:defRPr>
             </a:lvl1pPr>
@@ -4546,6 +4556,9 @@
   <p:clrMapOvr>
     <a:masterClrMapping/>
   </p:clrMapOvr>
+  <p:transition spd="med" advClick="1">
+    <p:fade/>
+  </p:transition>
 </p:sld>
 </file>
 
@@ -4659,14 +4672,14 @@
               <a:buNone/>
             </a:pPr>
             <a:r>
-              <a:rPr lang="en-US" sz="1300" b="1" dirty="0">
-                <a:solidFill>
-                  <a:srgbClr val="52514E"/>
+              <a:rPr lang="en-US" sz="1400" b="1" dirty="0">
+                <a:solidFill>
+                  <a:srgbClr val="353430"/>
                 </a:solidFill>
               </a:rPr>
               <a:t>CSV — par ligne</a:t>
             </a:r>
-            <a:endParaRPr lang="en-US" sz="1300" dirty="0"/>
+            <a:endParaRPr lang="en-US" sz="1400" dirty="0"/>
           </a:p>
         </p:txBody>
       </p:sp>
@@ -4695,7 +4708,7 @@
               <a:buNone/>
             </a:pPr>
             <a:r>
-              <a:rPr lang="en-US" sz="1150" dirty="0">
+              <a:rPr lang="en-US" sz="1250" dirty="0">
                 <a:solidFill>
                   <a:srgbClr val="1A1A1A"/>
                 </a:solidFill>
@@ -4705,7 +4718,7 @@
               </a:rPr>
               <a:t>T001,Lome,3900 | T002,Kara,2100 | T003,Lome,5400</a:t>
             </a:r>
-            <a:endParaRPr lang="en-US" sz="1150" dirty="0"/>
+            <a:endParaRPr lang="en-US" sz="1250" dirty="0"/>
           </a:p>
         </p:txBody>
       </p:sp>
@@ -4726,7 +4739,7 @@
             </a:avLst>
           </a:prstGeom>
           <a:solidFill>
-            <a:srgbClr val="F2F5FC"/>
+            <a:srgbClr val="FFFFFF"/>
           </a:solidFill>
           <a:ln w="12700">
             <a:solidFill>
@@ -4761,14 +4774,14 @@
               <a:buNone/>
             </a:pPr>
             <a:r>
-              <a:rPr lang="en-US" sz="1300" b="1" dirty="0">
+              <a:rPr lang="en-US" sz="1400" b="1" dirty="0">
                 <a:solidFill>
                   <a:srgbClr val="2A78D6"/>
                 </a:solidFill>
               </a:rPr>
               <a:t>ORC — par colonne</a:t>
             </a:r>
-            <a:endParaRPr lang="en-US" sz="1300" dirty="0"/>
+            <a:endParaRPr lang="en-US" sz="1400" dirty="0"/>
           </a:p>
         </p:txBody>
       </p:sp>
@@ -4797,7 +4810,7 @@
               <a:buNone/>
             </a:pPr>
             <a:r>
-              <a:rPr lang="en-US" sz="1150" dirty="0">
+              <a:rPr lang="en-US" sz="1250" dirty="0">
                 <a:solidFill>
                   <a:srgbClr val="1A1A1A"/>
                 </a:solidFill>
@@ -4807,7 +4820,7 @@
               </a:rPr>
               <a:t>T001,T002,T003 | Lome,Kara,Lome | 3900,2100,5400</a:t>
             </a:r>
-            <a:endParaRPr lang="en-US" sz="1150" dirty="0"/>
+            <a:endParaRPr lang="en-US" sz="1250" dirty="0"/>
           </a:p>
         </p:txBody>
       </p:sp>
@@ -4836,14 +4849,14 @@
               <a:buNone/>
             </a:pPr>
             <a:r>
-              <a:rPr lang="en-US" sz="1400" b="1" dirty="0">
+              <a:rPr lang="en-US" sz="1500" b="1" dirty="0">
                 <a:solidFill>
                   <a:srgbClr val="1E2761"/>
                 </a:solidFill>
               </a:rPr>
               <a:t>Compression</a:t>
             </a:r>
-            <a:endParaRPr lang="en-US" sz="1400" dirty="0"/>
+            <a:endParaRPr lang="en-US" sz="1500" dirty="0"/>
           </a:p>
         </p:txBody>
       </p:sp>
@@ -4875,14 +4888,14 @@
               <a:buNone/>
             </a:pPr>
             <a:r>
-              <a:rPr lang="en-US" sz="1250" dirty="0">
+              <a:rPr lang="en-US" sz="1400" dirty="0">
                 <a:solidFill>
                   <a:srgbClr val="1A1A1A"/>
                 </a:solidFill>
               </a:rPr>
               <a:t>Une colonne ne contient que des valeurs de même nature, souvent répétées : huit villes sur 500 000 lignes.</a:t>
             </a:r>
-            <a:endParaRPr lang="en-US" sz="1250" dirty="0"/>
+            <a:endParaRPr lang="en-US" sz="1400" dirty="0"/>
           </a:p>
         </p:txBody>
       </p:sp>
@@ -4911,14 +4924,14 @@
               <a:buNone/>
             </a:pPr>
             <a:r>
-              <a:rPr lang="en-US" sz="1400" b="1" dirty="0">
+              <a:rPr lang="en-US" sz="1500" b="1" dirty="0">
                 <a:solidFill>
                   <a:srgbClr val="1E2761"/>
                 </a:solidFill>
               </a:rPr>
               <a:t>Lecture sélective</a:t>
             </a:r>
-            <a:endParaRPr lang="en-US" sz="1400" dirty="0"/>
+            <a:endParaRPr lang="en-US" sz="1500" dirty="0"/>
           </a:p>
         </p:txBody>
       </p:sp>
@@ -4950,14 +4963,14 @@
               <a:buNone/>
             </a:pPr>
             <a:r>
-              <a:rPr lang="en-US" sz="1250" dirty="0">
+              <a:rPr lang="en-US" sz="1400" dirty="0">
                 <a:solidFill>
                   <a:srgbClr val="1A1A1A"/>
                 </a:solidFill>
               </a:rPr>
               <a:t>Une requête qui veut ville et montant ne décompresse pas les 17 autres colonnes.</a:t>
             </a:r>
-            <a:endParaRPr lang="en-US" sz="1250" dirty="0"/>
+            <a:endParaRPr lang="en-US" sz="1400" dirty="0"/>
           </a:p>
         </p:txBody>
       </p:sp>
@@ -4986,14 +4999,14 @@
               <a:buNone/>
             </a:pPr>
             <a:r>
-              <a:rPr lang="en-US" sz="1400" b="1" dirty="0">
+              <a:rPr lang="en-US" sz="1500" b="1" dirty="0">
                 <a:solidFill>
                   <a:srgbClr val="1E2761"/>
                 </a:solidFill>
               </a:rPr>
               <a:t>Splittable</a:t>
             </a:r>
-            <a:endParaRPr lang="en-US" sz="1400" dirty="0"/>
+            <a:endParaRPr lang="en-US" sz="1500" dirty="0"/>
           </a:p>
         </p:txBody>
       </p:sp>
@@ -5025,14 +5038,14 @@
               <a:buNone/>
             </a:pPr>
             <a:r>
-              <a:rPr lang="en-US" sz="1250" dirty="0">
+              <a:rPr lang="en-US" sz="1400" dirty="0">
                 <a:solidFill>
                   <a:srgbClr val="1A1A1A"/>
                 </a:solidFill>
               </a:rPr>
               <a:t>Plusieurs mappers peuvent se partager un même fichier — contrairement au gzip.</a:t>
             </a:r>
-            <a:endParaRPr lang="en-US" sz="1250" dirty="0"/>
+            <a:endParaRPr lang="en-US" sz="1400" dirty="0"/>
           </a:p>
         </p:txBody>
       </p:sp>
@@ -5196,14 +5209,14 @@
               <a:buNone/>
             </a:pPr>
             <a:r>
-              <a:rPr lang="en-US" sz="1400" dirty="0">
+              <a:rPr lang="en-US" sz="1500" dirty="0">
                 <a:solidFill>
                   <a:srgbClr val="FFFFFF"/>
                 </a:solidFill>
               </a:rPr>
               <a:t>Même contenu, 500 000 transactions : l'occupation est divisée par 5,7.</a:t>
             </a:r>
-            <a:endParaRPr lang="en-US" sz="1400" dirty="0"/>
+            <a:endParaRPr lang="en-US" sz="1500" dirty="0"/>
           </a:p>
         </p:txBody>
       </p:sp>
@@ -5235,9 +5248,9 @@
           <a:bodyPr/>
           <a:lstStyle>
             <a:lvl1pPr>
-              <a:defRPr sz="1000">
-                <a:solidFill>
-                  <a:srgbClr val="52514E"/>
+              <a:defRPr sz="1200">
+                <a:solidFill>
+                  <a:srgbClr val="353430"/>
                 </a:solidFill>
               </a:defRPr>
             </a:lvl1pPr>
@@ -5257,6 +5270,9 @@
   <p:clrMapOvr>
     <a:masterClrMapping/>
   </p:clrMapOvr>
+  <p:transition spd="med" advClick="1">
+    <p:fade/>
+  </p:transition>
 </p:sld>
 </file>
 
@@ -5343,14 +5359,14 @@
               <a:buNone/>
             </a:pPr>
             <a:r>
-              <a:rPr lang="en-US" sz="1400" dirty="0">
-                <a:solidFill>
-                  <a:srgbClr val="52514E"/>
+              <a:rPr lang="en-US" sz="1500" dirty="0">
+                <a:solidFill>
+                  <a:srgbClr val="353430"/>
                 </a:solidFill>
               </a:rPr>
               <a:t>Même question posée deux fois : quel chiffre d'affaires en mars 2025 ?</a:t>
             </a:r>
-            <a:endParaRPr lang="en-US" sz="1400" dirty="0"/>
+            <a:endParaRPr lang="en-US" sz="1500" dirty="0"/>
           </a:p>
         </p:txBody>
       </p:sp>
@@ -5371,7 +5387,7 @@
             </a:avLst>
           </a:prstGeom>
           <a:solidFill>
-            <a:srgbClr val="F2F5FC"/>
+            <a:srgbClr val="FFFFFF"/>
           </a:solidFill>
           <a:ln w="12700">
             <a:solidFill>
@@ -5406,14 +5422,14 @@
               <a:buNone/>
             </a:pPr>
             <a:r>
-              <a:rPr lang="en-US" sz="1400" b="1" dirty="0">
+              <a:rPr lang="en-US" sz="1500" b="1" dirty="0">
                 <a:solidFill>
                   <a:srgbClr val="1E2761"/>
                 </a:solidFill>
               </a:rPr>
               <a:t>Sur la table partitionnée</a:t>
             </a:r>
-            <a:endParaRPr lang="en-US" sz="1400" dirty="0"/>
+            <a:endParaRPr lang="en-US" sz="1500" dirty="0"/>
           </a:p>
         </p:txBody>
       </p:sp>
@@ -5442,9 +5458,9 @@
               <a:buNone/>
             </a:pPr>
             <a:r>
-              <a:rPr lang="en-US" sz="1100" dirty="0">
-                <a:solidFill>
-                  <a:srgbClr val="52514E"/>
+              <a:rPr lang="en-US" sz="1250" dirty="0">
+                <a:solidFill>
+                  <a:srgbClr val="353430"/>
                 </a:solidFill>
                 <a:latin typeface="Courier New" pitchFamily="34" charset="0"/>
                 <a:ea typeface="Courier New" pitchFamily="34" charset="-122"/>
@@ -5452,7 +5468,7 @@
               </a:rPr>
               <a:t>WHERE annee = 2025 AND mois = 3</a:t>
             </a:r>
-            <a:endParaRPr lang="en-US" sz="1100" dirty="0"/>
+            <a:endParaRPr lang="en-US" sz="1250" dirty="0"/>
           </a:p>
         </p:txBody>
       </p:sp>
@@ -5517,14 +5533,14 @@
               <a:buNone/>
             </a:pPr>
             <a:r>
-              <a:rPr lang="en-US" sz="1200" dirty="0">
-                <a:solidFill>
-                  <a:srgbClr val="52514E"/>
+              <a:rPr lang="en-US" sz="1350" dirty="0">
+                <a:solidFill>
+                  <a:srgbClr val="353430"/>
                 </a:solidFill>
               </a:rPr>
               <a:t>lignes annoncées par le plan</a:t>
             </a:r>
-            <a:endParaRPr lang="en-US" sz="1200" dirty="0"/>
+            <a:endParaRPr lang="en-US" sz="1350" dirty="0"/>
           </a:p>
         </p:txBody>
       </p:sp>
@@ -5616,14 +5632,14 @@
               <a:buNone/>
             </a:pPr>
             <a:r>
-              <a:rPr lang="en-US" sz="1400" b="1" dirty="0">
+              <a:rPr lang="en-US" sz="1500" b="1" dirty="0">
                 <a:solidFill>
                   <a:srgbClr val="1E2761"/>
                 </a:solidFill>
               </a:rPr>
               <a:t>Sur la table TEXTFILE</a:t>
             </a:r>
-            <a:endParaRPr lang="en-US" sz="1400" dirty="0"/>
+            <a:endParaRPr lang="en-US" sz="1500" dirty="0"/>
           </a:p>
         </p:txBody>
       </p:sp>
@@ -5652,9 +5668,9 @@
               <a:buNone/>
             </a:pPr>
             <a:r>
-              <a:rPr lang="en-US" sz="1100" dirty="0">
-                <a:solidFill>
-                  <a:srgbClr val="52514E"/>
+              <a:rPr lang="en-US" sz="1250" dirty="0">
+                <a:solidFill>
+                  <a:srgbClr val="353430"/>
                 </a:solidFill>
                 <a:latin typeface="Courier New" pitchFamily="34" charset="0"/>
                 <a:ea typeface="Courier New" pitchFamily="34" charset="-122"/>
@@ -5662,7 +5678,7 @@
               </a:rPr>
               <a:t>WHERE SUBSTR(datetime,1,7) = '2025-03'</a:t>
             </a:r>
-            <a:endParaRPr lang="en-US" sz="1100" dirty="0"/>
+            <a:endParaRPr lang="en-US" sz="1250" dirty="0"/>
           </a:p>
         </p:txBody>
       </p:sp>
@@ -5727,14 +5743,14 @@
               <a:buNone/>
             </a:pPr>
             <a:r>
-              <a:rPr lang="en-US" sz="1200" dirty="0">
-                <a:solidFill>
-                  <a:srgbClr val="52514E"/>
+              <a:rPr lang="en-US" sz="1350" dirty="0">
+                <a:solidFill>
+                  <a:srgbClr val="353430"/>
                 </a:solidFill>
               </a:rPr>
               <a:t>lignes annoncées par le plan</a:t>
             </a:r>
-            <a:endParaRPr lang="en-US" sz="1200" dirty="0"/>
+            <a:endParaRPr lang="en-US" sz="1350" dirty="0"/>
           </a:p>
         </p:txBody>
       </p:sp>
@@ -5829,7 +5845,7 @@
               <a:buNone/>
             </a:pPr>
             <a:r>
-              <a:rPr lang="en-US" sz="1350" b="1" dirty="0">
+              <a:rPr lang="en-US" sz="1450" b="1" dirty="0">
                 <a:solidFill>
                   <a:srgbClr val="FFFFFF"/>
                 </a:solidFill>
@@ -5843,14 +5859,14 @@
               <a:buNone/>
             </a:pPr>
             <a:r>
-              <a:rPr lang="en-US" sz="1350" dirty="0">
+              <a:rPr lang="en-US" sz="1450" dirty="0">
                 <a:solidFill>
                   <a:srgbClr val="CADCFC"/>
                 </a:solidFill>
               </a:rPr>
               <a:t>Hive n'ouvre qu'un seul des vingt-quatre dossiers. Les deux requêtes rendent le même résultat : 194 982 547,5 FCFA.</a:t>
             </a:r>
-            <a:endParaRPr lang="en-US" sz="1350" dirty="0"/>
+            <a:endParaRPr lang="en-US" sz="1450" dirty="0"/>
           </a:p>
         </p:txBody>
       </p:sp>
@@ -5882,9 +5898,9 @@
           <a:bodyPr/>
           <a:lstStyle>
             <a:lvl1pPr>
-              <a:defRPr sz="1000">
-                <a:solidFill>
-                  <a:srgbClr val="52514E"/>
+              <a:defRPr sz="1200">
+                <a:solidFill>
+                  <a:srgbClr val="353430"/>
                 </a:solidFill>
               </a:defRPr>
             </a:lvl1pPr>
@@ -5904,6 +5920,9 @@
   <p:clrMapOvr>
     <a:masterClrMapping/>
   </p:clrMapOvr>
+  <p:transition spd="med" advClick="1">
+    <p:fade/>
+  </p:transition>
 </p:sld>
 </file>
 
@@ -5965,30 +5984,499 @@
           </a:p>
         </p:txBody>
       </p:sp>
-      <p:pic>
-        <p:nvPicPr>
-          <p:cNvPr id="3" name="Image 0" descr="/mnt/user-data/uploads/Hadoop/TP6_Hive_Groupe6/resultats/graphiques/benchmark_formats.png">    </p:cNvPr>
-          <p:cNvPicPr>
-            <a:picLocks noChangeAspect="1"/>
-          </p:cNvPicPr>
-          <p:nvPr/>
-        </p:nvPicPr>
-        <p:blipFill>
-          <a:blip r:embed="rId1"/>
-          <a:stretch>
-            <a:fillRect/>
-          </a:stretch>
-        </p:blipFill>
+      <p:sp>
+        <p:nvSpPr>
+          <p:cNvPr id="30" name="grp-30"/>
+          <p:cNvSpPr txBox="1"/>
+          <p:nvPr/>
+        </p:nvSpPr>
         <p:spPr>
           <a:xfrm>
             <a:off x="594360" y="1280160"/>
-            <a:ext cx="6144768" cy="3017520"/>
-          </a:xfrm>
-          <a:prstGeom prst="rect">
-            <a:avLst/>
-          </a:prstGeom>
-        </p:spPr>
-      </p:pic>
+            <a:ext cx="5500000" cy="300000"/>
+          </a:xfrm>
+          <a:prstGeom prst="rect">
+            <a:avLst/>
+          </a:prstGeom>
+          <a:noFill/>
+          <a:ln/>
+        </p:spPr>
+        <p:txBody>
+          <a:bodyPr wrap="square" lIns="0" tIns="0" rIns="0" bIns="0" rtlCol="0" anchor="ctr"/>
+          <a:lstStyle/>
+          <a:p>
+            <a:pPr indent="0" marL="0">
+              <a:buNone/>
+            </a:pPr>
+            <a:r>
+              <a:rPr lang="fr-FR" sz="1350" b="1" dirty="0">
+                <a:solidFill>
+                  <a:srgbClr val="1E2761"/>
+                </a:solidFill>
+              </a:rPr>
+              <a:t>Balayage complet — CA par ville</a:t>
+            </a:r>
+          </a:p>
+        </p:txBody>
+      </p:sp>
+      <p:sp>
+        <p:nvSpPr>
+          <p:cNvPr id="31" name="lib-31"/>
+          <p:cNvSpPr txBox="1"/>
+          <p:nvPr/>
+        </p:nvSpPr>
+        <p:spPr>
+          <a:xfrm>
+            <a:off x="594360" y="1680160"/>
+            <a:ext cx="2150000" cy="400000"/>
+          </a:xfrm>
+          <a:prstGeom prst="rect">
+            <a:avLst/>
+          </a:prstGeom>
+          <a:noFill/>
+          <a:ln/>
+        </p:spPr>
+        <p:txBody>
+          <a:bodyPr wrap="square" lIns="0" tIns="0" rIns="0" bIns="0" rtlCol="0" anchor="ctr"/>
+          <a:lstStyle/>
+          <a:p>
+            <a:pPr indent="0" marL="0" algn="r">
+              <a:buNone/>
+            </a:pPr>
+            <a:r>
+              <a:rPr lang="fr-FR" sz="1350" b="0" dirty="0">
+                <a:solidFill>
+                  <a:srgbClr val="1A1A1A"/>
+                </a:solidFill>
+              </a:rPr>
+              <a:t>TEXTFILE</a:t>
+            </a:r>
+          </a:p>
+        </p:txBody>
+      </p:sp>
+      <p:sp>
+        <p:nvSpPr>
+          <p:cNvPr id="32" name="bar-32"/>
+          <p:cNvSpPr/>
+          <p:nvPr/>
+        </p:nvSpPr>
+        <p:spPr>
+          <a:xfrm>
+            <a:off x="2924360" y="1680160"/>
+            <a:ext cx="2610000" cy="400000"/>
+          </a:xfrm>
+          <a:prstGeom prst="roundRect">
+            <a:avLst>
+              <a:gd name="adj" fmla="val 18000"/>
+            </a:avLst>
+          </a:prstGeom>
+          <a:solidFill>
+            <a:srgbClr val="353430"/>
+          </a:solidFill>
+          <a:ln/>
+        </p:spPr>
+        <p:txBody>
+          <a:bodyPr/>
+          <a:lstStyle/>
+          <a:p/>
+        </p:txBody>
+      </p:sp>
+      <p:sp>
+        <p:nvSpPr>
+          <p:cNvPr id="33" name="val-33"/>
+          <p:cNvSpPr txBox="1"/>
+          <p:nvPr/>
+        </p:nvSpPr>
+        <p:spPr>
+          <a:xfrm>
+            <a:off x="5634360" y="1680160"/>
+            <a:ext cx="900000" cy="400000"/>
+          </a:xfrm>
+          <a:prstGeom prst="rect">
+            <a:avLst/>
+          </a:prstGeom>
+          <a:noFill/>
+          <a:ln/>
+        </p:spPr>
+        <p:txBody>
+          <a:bodyPr wrap="square" lIns="0" tIns="0" rIns="0" bIns="0" rtlCol="0" anchor="ctr"/>
+          <a:lstStyle/>
+          <a:p>
+            <a:pPr indent="0" marL="0">
+              <a:buNone/>
+            </a:pPr>
+            <a:r>
+              <a:rPr lang="fr-FR" sz="1350" b="1" dirty="0">
+                <a:solidFill>
+                  <a:srgbClr val="353430"/>
+                </a:solidFill>
+              </a:rPr>
+              <a:t>2,61 s</a:t>
+            </a:r>
+          </a:p>
+        </p:txBody>
+      </p:sp>
+      <p:sp>
+        <p:nvSpPr>
+          <p:cNvPr id="34" name="lib-34"/>
+          <p:cNvSpPr txBox="1"/>
+          <p:nvPr/>
+        </p:nvSpPr>
+        <p:spPr>
+          <a:xfrm>
+            <a:off x="594360" y="2200160"/>
+            <a:ext cx="2150000" cy="400000"/>
+          </a:xfrm>
+          <a:prstGeom prst="rect">
+            <a:avLst/>
+          </a:prstGeom>
+          <a:noFill/>
+          <a:ln/>
+        </p:spPr>
+        <p:txBody>
+          <a:bodyPr wrap="square" lIns="0" tIns="0" rIns="0" bIns="0" rtlCol="0" anchor="ctr"/>
+          <a:lstStyle/>
+          <a:p>
+            <a:pPr indent="0" marL="0" algn="r">
+              <a:buNone/>
+            </a:pPr>
+            <a:r>
+              <a:rPr lang="fr-FR" sz="1350" b="0" dirty="0">
+                <a:solidFill>
+                  <a:srgbClr val="1A1A1A"/>
+                </a:solidFill>
+              </a:rPr>
+              <a:t>ORC partitionné</a:t>
+            </a:r>
+          </a:p>
+        </p:txBody>
+      </p:sp>
+      <p:sp>
+        <p:nvSpPr>
+          <p:cNvPr id="35" name="bar-35"/>
+          <p:cNvSpPr/>
+          <p:nvPr/>
+        </p:nvSpPr>
+        <p:spPr>
+          <a:xfrm>
+            <a:off x="2924360" y="2200160"/>
+            <a:ext cx="2790000" cy="400000"/>
+          </a:xfrm>
+          <a:prstGeom prst="roundRect">
+            <a:avLst>
+              <a:gd name="adj" fmla="val 18000"/>
+            </a:avLst>
+          </a:prstGeom>
+          <a:solidFill>
+            <a:srgbClr val="2A78D6"/>
+          </a:solidFill>
+          <a:ln/>
+        </p:spPr>
+        <p:txBody>
+          <a:bodyPr/>
+          <a:lstStyle/>
+          <a:p/>
+        </p:txBody>
+      </p:sp>
+      <p:sp>
+        <p:nvSpPr>
+          <p:cNvPr id="36" name="val-36"/>
+          <p:cNvSpPr txBox="1"/>
+          <p:nvPr/>
+        </p:nvSpPr>
+        <p:spPr>
+          <a:xfrm>
+            <a:off x="5814360" y="2200160"/>
+            <a:ext cx="900000" cy="400000"/>
+          </a:xfrm>
+          <a:prstGeom prst="rect">
+            <a:avLst/>
+          </a:prstGeom>
+          <a:noFill/>
+          <a:ln/>
+        </p:spPr>
+        <p:txBody>
+          <a:bodyPr wrap="square" lIns="0" tIns="0" rIns="0" bIns="0" rtlCol="0" anchor="ctr"/>
+          <a:lstStyle/>
+          <a:p>
+            <a:pPr indent="0" marL="0">
+              <a:buNone/>
+            </a:pPr>
+            <a:r>
+              <a:rPr lang="fr-FR" sz="1350" b="1" dirty="0">
+                <a:solidFill>
+                  <a:srgbClr val="2A78D6"/>
+                </a:solidFill>
+              </a:rPr>
+              <a:t>2,79 s</a:t>
+            </a:r>
+          </a:p>
+        </p:txBody>
+      </p:sp>
+      <p:sp>
+        <p:nvSpPr>
+          <p:cNvPr id="37" name="grp-37"/>
+          <p:cNvSpPr txBox="1"/>
+          <p:nvPr/>
+        </p:nvSpPr>
+        <p:spPr>
+          <a:xfrm>
+            <a:off x="594360" y="2830160"/>
+            <a:ext cx="5500000" cy="300000"/>
+          </a:xfrm>
+          <a:prstGeom prst="rect">
+            <a:avLst/>
+          </a:prstGeom>
+          <a:noFill/>
+          <a:ln/>
+        </p:spPr>
+        <p:txBody>
+          <a:bodyPr wrap="square" lIns="0" tIns="0" rIns="0" bIns="0" rtlCol="0" anchor="ctr"/>
+          <a:lstStyle/>
+          <a:p>
+            <a:pPr indent="0" marL="0">
+              <a:buNone/>
+            </a:pPr>
+            <a:r>
+              <a:rPr lang="fr-FR" sz="1350" b="1" dirty="0">
+                <a:solidFill>
+                  <a:srgbClr val="1E2761"/>
+                </a:solidFill>
+              </a:rPr>
+              <a:t>Requête filtrée — mars 2025</a:t>
+            </a:r>
+          </a:p>
+        </p:txBody>
+      </p:sp>
+      <p:sp>
+        <p:nvSpPr>
+          <p:cNvPr id="38" name="lib-38"/>
+          <p:cNvSpPr txBox="1"/>
+          <p:nvPr/>
+        </p:nvSpPr>
+        <p:spPr>
+          <a:xfrm>
+            <a:off x="594360" y="3230160"/>
+            <a:ext cx="2150000" cy="400000"/>
+          </a:xfrm>
+          <a:prstGeom prst="rect">
+            <a:avLst/>
+          </a:prstGeom>
+          <a:noFill/>
+          <a:ln/>
+        </p:spPr>
+        <p:txBody>
+          <a:bodyPr wrap="square" lIns="0" tIns="0" rIns="0" bIns="0" rtlCol="0" anchor="ctr"/>
+          <a:lstStyle/>
+          <a:p>
+            <a:pPr indent="0" marL="0" algn="r">
+              <a:buNone/>
+            </a:pPr>
+            <a:r>
+              <a:rPr lang="fr-FR" sz="1350" b="0" dirty="0">
+                <a:solidFill>
+                  <a:srgbClr val="1A1A1A"/>
+                </a:solidFill>
+              </a:rPr>
+              <a:t>TEXTFILE</a:t>
+            </a:r>
+          </a:p>
+        </p:txBody>
+      </p:sp>
+      <p:sp>
+        <p:nvSpPr>
+          <p:cNvPr id="39" name="bar-39"/>
+          <p:cNvSpPr/>
+          <p:nvPr/>
+        </p:nvSpPr>
+        <p:spPr>
+          <a:xfrm>
+            <a:off x="2924360" y="3230160"/>
+            <a:ext cx="2570000" cy="400000"/>
+          </a:xfrm>
+          <a:prstGeom prst="roundRect">
+            <a:avLst>
+              <a:gd name="adj" fmla="val 18000"/>
+            </a:avLst>
+          </a:prstGeom>
+          <a:solidFill>
+            <a:srgbClr val="353430"/>
+          </a:solidFill>
+          <a:ln/>
+        </p:spPr>
+        <p:txBody>
+          <a:bodyPr/>
+          <a:lstStyle/>
+          <a:p/>
+        </p:txBody>
+      </p:sp>
+      <p:sp>
+        <p:nvSpPr>
+          <p:cNvPr id="40" name="val-40"/>
+          <p:cNvSpPr txBox="1"/>
+          <p:nvPr/>
+        </p:nvSpPr>
+        <p:spPr>
+          <a:xfrm>
+            <a:off x="5594360" y="3230160"/>
+            <a:ext cx="900000" cy="400000"/>
+          </a:xfrm>
+          <a:prstGeom prst="rect">
+            <a:avLst/>
+          </a:prstGeom>
+          <a:noFill/>
+          <a:ln/>
+        </p:spPr>
+        <p:txBody>
+          <a:bodyPr wrap="square" lIns="0" tIns="0" rIns="0" bIns="0" rtlCol="0" anchor="ctr"/>
+          <a:lstStyle/>
+          <a:p>
+            <a:pPr indent="0" marL="0">
+              <a:buNone/>
+            </a:pPr>
+            <a:r>
+              <a:rPr lang="fr-FR" sz="1350" b="1" dirty="0">
+                <a:solidFill>
+                  <a:srgbClr val="353430"/>
+                </a:solidFill>
+              </a:rPr>
+              <a:t>2,57 s</a:t>
+            </a:r>
+          </a:p>
+        </p:txBody>
+      </p:sp>
+      <p:sp>
+        <p:nvSpPr>
+          <p:cNvPr id="41" name="lib-41"/>
+          <p:cNvSpPr txBox="1"/>
+          <p:nvPr/>
+        </p:nvSpPr>
+        <p:spPr>
+          <a:xfrm>
+            <a:off x="594360" y="3750160"/>
+            <a:ext cx="2150000" cy="400000"/>
+          </a:xfrm>
+          <a:prstGeom prst="rect">
+            <a:avLst/>
+          </a:prstGeom>
+          <a:noFill/>
+          <a:ln/>
+        </p:spPr>
+        <p:txBody>
+          <a:bodyPr wrap="square" lIns="0" tIns="0" rIns="0" bIns="0" rtlCol="0" anchor="ctr"/>
+          <a:lstStyle/>
+          <a:p>
+            <a:pPr indent="0" marL="0" algn="r">
+              <a:buNone/>
+            </a:pPr>
+            <a:r>
+              <a:rPr lang="fr-FR" sz="1350" b="0" dirty="0">
+                <a:solidFill>
+                  <a:srgbClr val="1A1A1A"/>
+                </a:solidFill>
+              </a:rPr>
+              <a:t>ORC, 1 partition</a:t>
+            </a:r>
+          </a:p>
+        </p:txBody>
+      </p:sp>
+      <p:sp>
+        <p:nvSpPr>
+          <p:cNvPr id="42" name="bar-42"/>
+          <p:cNvSpPr/>
+          <p:nvPr/>
+        </p:nvSpPr>
+        <p:spPr>
+          <a:xfrm>
+            <a:off x="2924360" y="3750160"/>
+            <a:ext cx="1620000" cy="400000"/>
+          </a:xfrm>
+          <a:prstGeom prst="roundRect">
+            <a:avLst>
+              <a:gd name="adj" fmla="val 18000"/>
+            </a:avLst>
+          </a:prstGeom>
+          <a:solidFill>
+            <a:srgbClr val="1BAF7A"/>
+          </a:solidFill>
+          <a:ln/>
+        </p:spPr>
+        <p:txBody>
+          <a:bodyPr/>
+          <a:lstStyle/>
+          <a:p/>
+        </p:txBody>
+      </p:sp>
+      <p:sp>
+        <p:nvSpPr>
+          <p:cNvPr id="43" name="val-43"/>
+          <p:cNvSpPr txBox="1"/>
+          <p:nvPr/>
+        </p:nvSpPr>
+        <p:spPr>
+          <a:xfrm>
+            <a:off x="4644360" y="3750160"/>
+            <a:ext cx="900000" cy="400000"/>
+          </a:xfrm>
+          <a:prstGeom prst="rect">
+            <a:avLst/>
+          </a:prstGeom>
+          <a:noFill/>
+          <a:ln/>
+        </p:spPr>
+        <p:txBody>
+          <a:bodyPr wrap="square" lIns="0" tIns="0" rIns="0" bIns="0" rtlCol="0" anchor="ctr"/>
+          <a:lstStyle/>
+          <a:p>
+            <a:pPr indent="0" marL="0">
+              <a:buNone/>
+            </a:pPr>
+            <a:r>
+              <a:rPr lang="fr-FR" sz="1350" b="1" dirty="0">
+                <a:solidFill>
+                  <a:srgbClr val="1BAF7A"/>
+                </a:solidFill>
+              </a:rPr>
+              <a:t>1,62 s</a:t>
+            </a:r>
+          </a:p>
+        </p:txBody>
+      </p:sp>
+      <p:sp>
+        <p:nvSpPr>
+          <p:cNvPr id="44" name="note-44"/>
+          <p:cNvSpPr txBox="1"/>
+          <p:nvPr/>
+        </p:nvSpPr>
+        <p:spPr>
+          <a:xfrm>
+            <a:off x="5700000" y="3750160"/>
+            <a:ext cx="1000000" cy="400000"/>
+          </a:xfrm>
+          <a:prstGeom prst="rect">
+            <a:avLst/>
+          </a:prstGeom>
+          <a:noFill/>
+          <a:ln/>
+        </p:spPr>
+        <p:txBody>
+          <a:bodyPr wrap="square" lIns="0" tIns="0" rIns="0" bIns="0" rtlCol="0" anchor="ctr"/>
+          <a:lstStyle/>
+          <a:p>
+            <a:pPr indent="0" marL="0">
+              <a:buNone/>
+            </a:pPr>
+            <a:r>
+              <a:rPr lang="fr-FR" sz="1800" b="1" dirty="0">
+                <a:solidFill>
+                  <a:srgbClr val="1BAF7A"/>
+                </a:solidFill>
+              </a:rPr>
+              <a:t>−37 %</a:t>
+            </a:r>
+          </a:p>
+        </p:txBody>
+      </p:sp>
       <p:sp>
         <p:nvSpPr>
           <p:cNvPr id="4" name="carte-188"/>
@@ -6041,14 +6529,14 @@
               <a:buNone/>
             </a:pPr>
             <a:r>
-              <a:rPr lang="en-US" sz="1400" b="1" dirty="0">
+              <a:rPr lang="en-US" sz="1500" b="1" dirty="0">
                 <a:solidFill>
                   <a:srgbClr val="EB6834"/>
                 </a:solidFill>
               </a:rPr>
               <a:t>Le résultat contre-intuitif</a:t>
             </a:r>
-            <a:endParaRPr lang="en-US" sz="1400" dirty="0"/>
+            <a:endParaRPr lang="en-US" sz="1500" dirty="0"/>
           </a:p>
         </p:txBody>
       </p:sp>
@@ -6080,14 +6568,14 @@
               <a:buNone/>
             </a:pPr>
             <a:r>
-              <a:rPr lang="en-US" sz="1250" dirty="0">
+              <a:rPr lang="en-US" sz="1400" dirty="0">
                 <a:solidFill>
                   <a:srgbClr val="1A1A1A"/>
                 </a:solidFill>
               </a:rPr>
               <a:t>Sur une requête qui balaie tout, l'ORC partitionné n'est pas plus rapide : 2,79 s contre 2,61 s. Il faut ouvrir 24 fichiers au lieu d'un.</a:t>
             </a:r>
-            <a:endParaRPr lang="en-US" sz="1250" dirty="0"/>
+            <a:endParaRPr lang="en-US" sz="1400" dirty="0"/>
           </a:p>
         </p:txBody>
       </p:sp>
@@ -6108,11 +6596,11 @@
             </a:avLst>
           </a:prstGeom>
           <a:solidFill>
-            <a:srgbClr val="F2F5FC"/>
+            <a:srgbClr val="FFFFFF"/>
           </a:solidFill>
           <a:ln w="12700">
             <a:solidFill>
-              <a:srgbClr val="F2F5FC"/>
+              <a:srgbClr val="FFFFFF"/>
             </a:solidFill>
             <a:prstDash val="solid"/>
           </a:ln>
@@ -6143,14 +6631,14 @@
               <a:buNone/>
             </a:pPr>
             <a:r>
-              <a:rPr lang="en-US" sz="1400" b="1" dirty="0">
+              <a:rPr lang="en-US" sz="1500" b="1" dirty="0">
                 <a:solidFill>
                   <a:srgbClr val="2A78D6"/>
                 </a:solidFill>
               </a:rPr>
               <a:t>Où ORC gagne vraiment</a:t>
             </a:r>
-            <a:endParaRPr lang="en-US" sz="1400" dirty="0"/>
+            <a:endParaRPr lang="en-US" sz="1500" dirty="0"/>
           </a:p>
         </p:txBody>
       </p:sp>
@@ -6183,14 +6671,14 @@
               <a:buChar char="•"/>
             </a:pPr>
             <a:r>
-              <a:rPr lang="en-US" sz="1250" dirty="0">
+              <a:rPr lang="en-US" sz="1400" dirty="0">
                 <a:solidFill>
                   <a:srgbClr val="1A1A1A"/>
                 </a:solidFill>
               </a:rPr>
               <a:t>Le stockage, divisé par 5,7.</a:t>
             </a:r>
-            <a:endParaRPr lang="en-US" sz="1250" dirty="0"/>
+            <a:endParaRPr lang="en-US" sz="1400" dirty="0"/>
           </a:p>
           <a:p>
             <a:pPr marL="342900" indent="-342900">
@@ -6201,14 +6689,14 @@
               <a:buChar char="•"/>
             </a:pPr>
             <a:r>
-              <a:rPr lang="en-US" sz="1250" dirty="0">
+              <a:rPr lang="en-US" sz="1400" dirty="0">
                 <a:solidFill>
                   <a:srgbClr val="1A1A1A"/>
                 </a:solidFill>
               </a:rPr>
               <a:t>Le filtrage par partition : 37 % plus rapide.</a:t>
             </a:r>
-            <a:endParaRPr lang="en-US" sz="1250" dirty="0"/>
+            <a:endParaRPr lang="en-US" sz="1400" dirty="0"/>
           </a:p>
         </p:txBody>
       </p:sp>
@@ -6267,7 +6755,7 @@
               <a:buNone/>
             </a:pPr>
             <a:r>
-              <a:rPr lang="en-US" sz="1350" b="1" dirty="0">
+              <a:rPr lang="en-US" sz="1450" b="1" dirty="0">
                 <a:solidFill>
                   <a:srgbClr val="CADCFC"/>
                 </a:solidFill>
@@ -6281,14 +6769,14 @@
               <a:buNone/>
             </a:pPr>
             <a:r>
-              <a:rPr lang="en-US" sz="1350" dirty="0">
+              <a:rPr lang="en-US" sz="1450" dirty="0">
                 <a:solidFill>
                   <a:srgbClr val="FFFFFF"/>
                 </a:solidFill>
               </a:rPr>
               <a:t>Le gzip n'est pas splittable : impossible de décompresser depuis le milieu du fichier. Un seul mapper traite les 5 millions de lignes pendant que le reste du cluster attend.</a:t>
             </a:r>
-            <a:endParaRPr lang="en-US" sz="1350" dirty="0"/>
+            <a:endParaRPr lang="en-US" sz="1450" dirty="0"/>
           </a:p>
         </p:txBody>
       </p:sp>
@@ -6320,9 +6808,9 @@
           <a:bodyPr/>
           <a:lstStyle>
             <a:lvl1pPr>
-              <a:defRPr sz="1000">
-                <a:solidFill>
-                  <a:srgbClr val="52514E"/>
+              <a:defRPr sz="1200">
+                <a:solidFill>
+                  <a:srgbClr val="353430"/>
                 </a:solidFill>
               </a:defRPr>
             </a:lvl1pPr>
@@ -6342,6 +6830,9 @@
   <p:clrMapOvr>
     <a:masterClrMapping/>
   </p:clrMapOvr>
+  <p:transition spd="med" advClick="1">
+    <p:fade/>
+  </p:transition>
 </p:sld>
 </file>
 
@@ -6464,14 +6955,14 @@
               <a:buNone/>
             </a:pPr>
             <a:r>
-              <a:rPr lang="en-US" sz="1200" dirty="0">
-                <a:solidFill>
-                  <a:srgbClr val="52514E"/>
+              <a:rPr lang="en-US" sz="1350" dirty="0">
+                <a:solidFill>
+                  <a:srgbClr val="353430"/>
                 </a:solidFill>
               </a:rPr>
               <a:t>FCFA de chiffre d'affaires</a:t>
             </a:r>
-            <a:endParaRPr lang="en-US" sz="1200" dirty="0"/>
+            <a:endParaRPr lang="en-US" sz="1350" dirty="0"/>
           </a:p>
         </p:txBody>
       </p:sp>
@@ -6536,14 +7027,14 @@
               <a:buNone/>
             </a:pPr>
             <a:r>
-              <a:rPr lang="en-US" sz="1200" dirty="0">
-                <a:solidFill>
-                  <a:srgbClr val="52514E"/>
+              <a:rPr lang="en-US" sz="1350" dirty="0">
+                <a:solidFill>
+                  <a:srgbClr val="353430"/>
                 </a:solidFill>
               </a:rPr>
               <a:t>transactions analysées</a:t>
             </a:r>
-            <a:endParaRPr lang="en-US" sz="1200" dirty="0"/>
+            <a:endParaRPr lang="en-US" sz="1350" dirty="0"/>
           </a:p>
         </p:txBody>
       </p:sp>
@@ -6608,14 +7099,14 @@
               <a:buNone/>
             </a:pPr>
             <a:r>
-              <a:rPr lang="en-US" sz="1200" dirty="0">
-                <a:solidFill>
-                  <a:srgbClr val="52514E"/>
+              <a:rPr lang="en-US" sz="1350" dirty="0">
+                <a:solidFill>
+                  <a:srgbClr val="353430"/>
                 </a:solidFill>
               </a:rPr>
               <a:t>du chiffre d'affaires à Lomé</a:t>
             </a:r>
-            <a:endParaRPr lang="en-US" sz="1200" dirty="0"/>
+            <a:endParaRPr lang="en-US" sz="1350" dirty="0"/>
           </a:p>
         </p:txBody>
       </p:sp>
@@ -6680,65 +7171,1797 @@
               <a:buNone/>
             </a:pPr>
             <a:r>
-              <a:rPr lang="en-US" sz="1200" dirty="0">
-                <a:solidFill>
-                  <a:srgbClr val="52514E"/>
+              <a:rPr lang="en-US" sz="1350" dirty="0">
+                <a:solidFill>
+                  <a:srgbClr val="353430"/>
                 </a:solidFill>
               </a:rPr>
               <a:t>FCFA de panier moyen</a:t>
             </a:r>
-            <a:endParaRPr lang="en-US" sz="1200" dirty="0"/>
-          </a:p>
-        </p:txBody>
-      </p:sp>
-      <p:pic>
-        <p:nvPicPr>
-          <p:cNvPr id="11" name="Image 0" descr="/mnt/user-data/uploads/Hadoop/TP6_Hive_Groupe6/resultats/graphiques/ca_par_ville.png">    </p:cNvPr>
-          <p:cNvPicPr>
-            <a:picLocks noChangeAspect="1"/>
-          </p:cNvPicPr>
-          <p:nvPr/>
-        </p:nvPicPr>
-        <p:blipFill>
-          <a:blip r:embed="rId1"/>
-          <a:stretch>
-            <a:fillRect/>
-          </a:stretch>
-        </p:blipFill>
+            <a:endParaRPr lang="en-US" sz="1350" dirty="0"/>
+          </a:p>
+        </p:txBody>
+      </p:sp>
+      <p:sp>
+        <p:nvSpPr>
+          <p:cNvPr id="40" name="gt-40"/>
+          <p:cNvSpPr txBox="1"/>
+          <p:nvPr/>
+        </p:nvSpPr>
         <p:spPr>
           <a:xfrm>
             <a:off x="594360" y="2514600"/>
-            <a:ext cx="5303520" cy="2194560"/>
-          </a:xfrm>
-          <a:prstGeom prst="rect">
-            <a:avLst/>
-          </a:prstGeom>
-        </p:spPr>
-      </p:pic>
-      <p:pic>
-        <p:nvPicPr>
-          <p:cNvPr id="12" name="Image 1" descr="/mnt/user-data/uploads/Hadoop/TP6_Hive_Groupe6/resultats/graphiques/top10_produits.png">    </p:cNvPr>
-          <p:cNvPicPr>
-            <a:picLocks noChangeAspect="1"/>
-          </p:cNvPicPr>
-          <p:nvPr/>
-        </p:nvPicPr>
-        <p:blipFill>
-          <a:blip r:embed="rId2"/>
-          <a:stretch>
-            <a:fillRect/>
-          </a:stretch>
-        </p:blipFill>
+            <a:ext cx="5303520" cy="300000"/>
+          </a:xfrm>
+          <a:prstGeom prst="rect">
+            <a:avLst/>
+          </a:prstGeom>
+          <a:noFill/>
+          <a:ln/>
+        </p:spPr>
+        <p:txBody>
+          <a:bodyPr wrap="square" lIns="0" tIns="0" rIns="0" bIns="0" anchor="ctr"/>
+          <a:lstStyle/>
+          <a:p>
+            <a:pPr indent="0" marL="0" algn="l">
+              <a:buNone/>
+            </a:pPr>
+            <a:r>
+              <a:rPr lang="fr-FR" sz="1250" b="1" dirty="0">
+                <a:solidFill>
+                  <a:srgbClr val="1E2761"/>
+                </a:solidFill>
+              </a:rPr>
+              <a:t>Chiffre d'affaires par ville (millions de FCFA)</a:t>
+            </a:r>
+          </a:p>
+        </p:txBody>
+      </p:sp>
+      <p:sp>
+        <p:nvSpPr>
+          <p:cNvPr id="41" name="gl-41"/>
+          <p:cNvSpPr txBox="1"/>
+          <p:nvPr/>
+        </p:nvSpPr>
+        <p:spPr>
+          <a:xfrm>
+            <a:off x="594360" y="2914600"/>
+            <a:ext cx="1000000" cy="170000"/>
+          </a:xfrm>
+          <a:prstGeom prst="rect">
+            <a:avLst/>
+          </a:prstGeom>
+          <a:noFill/>
+          <a:ln/>
+        </p:spPr>
+        <p:txBody>
+          <a:bodyPr wrap="square" lIns="0" tIns="0" rIns="0" bIns="0" anchor="ctr"/>
+          <a:lstStyle/>
+          <a:p>
+            <a:pPr indent="0" marL="0" algn="r">
+              <a:buNone/>
+            </a:pPr>
+            <a:r>
+              <a:rPr lang="fr-FR" sz="1200" b="0" dirty="0">
+                <a:solidFill>
+                  <a:srgbClr val="1A1A1A"/>
+                </a:solidFill>
+              </a:rPr>
+              <a:t>Lomé</a:t>
+            </a:r>
+          </a:p>
+        </p:txBody>
+      </p:sp>
+      <p:sp>
+        <p:nvSpPr>
+          <p:cNvPr id="42" name="bar-42"/>
+          <p:cNvSpPr/>
+          <p:nvPr/>
+        </p:nvSpPr>
+        <p:spPr>
+          <a:xfrm>
+            <a:off x="1714360" y="2914600"/>
+            <a:ext cx="3000000" cy="170000"/>
+          </a:xfrm>
+          <a:prstGeom prst="rect">
+            <a:avLst/>
+          </a:prstGeom>
+          <a:solidFill>
+            <a:srgbClr val="1E2761"/>
+          </a:solidFill>
+          <a:ln/>
+        </p:spPr>
+        <p:txBody>
+          <a:bodyPr/>
+          <a:lstStyle/>
+          <a:p/>
+        </p:txBody>
+      </p:sp>
+      <p:sp>
+        <p:nvSpPr>
+          <p:cNvPr id="43" name="gv-43"/>
+          <p:cNvSpPr txBox="1"/>
+          <p:nvPr/>
+        </p:nvSpPr>
+        <p:spPr>
+          <a:xfrm>
+            <a:off x="4794360" y="2914600"/>
+            <a:ext cx="800000" cy="170000"/>
+          </a:xfrm>
+          <a:prstGeom prst="rect">
+            <a:avLst/>
+          </a:prstGeom>
+          <a:noFill/>
+          <a:ln/>
+        </p:spPr>
+        <p:txBody>
+          <a:bodyPr wrap="square" lIns="0" tIns="0" rIns="0" bIns="0" anchor="ctr"/>
+          <a:lstStyle/>
+          <a:p>
+            <a:pPr indent="0" marL="0" algn="l">
+              <a:buNone/>
+            </a:pPr>
+            <a:r>
+              <a:rPr lang="fr-FR" sz="1200" b="1" dirty="0">
+                <a:solidFill>
+                  <a:srgbClr val="353430"/>
+                </a:solidFill>
+              </a:rPr>
+              <a:t>1 838</a:t>
+            </a:r>
+          </a:p>
+        </p:txBody>
+      </p:sp>
+      <p:sp>
+        <p:nvSpPr>
+          <p:cNvPr id="44" name="gl-44"/>
+          <p:cNvSpPr txBox="1"/>
+          <p:nvPr/>
+        </p:nvSpPr>
+        <p:spPr>
+          <a:xfrm>
+            <a:off x="594360" y="3144600"/>
+            <a:ext cx="1000000" cy="170000"/>
+          </a:xfrm>
+          <a:prstGeom prst="rect">
+            <a:avLst/>
+          </a:prstGeom>
+          <a:noFill/>
+          <a:ln/>
+        </p:spPr>
+        <p:txBody>
+          <a:bodyPr wrap="square" lIns="0" tIns="0" rIns="0" bIns="0" anchor="ctr"/>
+          <a:lstStyle/>
+          <a:p>
+            <a:pPr indent="0" marL="0" algn="r">
+              <a:buNone/>
+            </a:pPr>
+            <a:r>
+              <a:rPr lang="fr-FR" sz="1200" b="0" dirty="0">
+                <a:solidFill>
+                  <a:srgbClr val="1A1A1A"/>
+                </a:solidFill>
+              </a:rPr>
+              <a:t>Kara</a:t>
+            </a:r>
+          </a:p>
+        </p:txBody>
+      </p:sp>
+      <p:sp>
+        <p:nvSpPr>
+          <p:cNvPr id="45" name="bar-45"/>
+          <p:cNvSpPr/>
+          <p:nvPr/>
+        </p:nvSpPr>
+        <p:spPr>
+          <a:xfrm>
+            <a:off x="1714360" y="3144600"/>
+            <a:ext cx="899200" cy="170000"/>
+          </a:xfrm>
+          <a:prstGeom prst="rect">
+            <a:avLst/>
+          </a:prstGeom>
+          <a:solidFill>
+            <a:srgbClr val="2A78D6"/>
+          </a:solidFill>
+          <a:ln/>
+        </p:spPr>
+        <p:txBody>
+          <a:bodyPr/>
+          <a:lstStyle/>
+          <a:p/>
+        </p:txBody>
+      </p:sp>
+      <p:sp>
+        <p:nvSpPr>
+          <p:cNvPr id="46" name="gv-46"/>
+          <p:cNvSpPr txBox="1"/>
+          <p:nvPr/>
+        </p:nvSpPr>
+        <p:spPr>
+          <a:xfrm>
+            <a:off x="2693560" y="3144600"/>
+            <a:ext cx="800000" cy="170000"/>
+          </a:xfrm>
+          <a:prstGeom prst="rect">
+            <a:avLst/>
+          </a:prstGeom>
+          <a:noFill/>
+          <a:ln/>
+        </p:spPr>
+        <p:txBody>
+          <a:bodyPr wrap="square" lIns="0" tIns="0" rIns="0" bIns="0" anchor="ctr"/>
+          <a:lstStyle/>
+          <a:p>
+            <a:pPr indent="0" marL="0" algn="l">
+              <a:buNone/>
+            </a:pPr>
+            <a:r>
+              <a:rPr lang="fr-FR" sz="1200" b="1" dirty="0">
+                <a:solidFill>
+                  <a:srgbClr val="353430"/>
+                </a:solidFill>
+              </a:rPr>
+              <a:t>551</a:t>
+            </a:r>
+          </a:p>
+        </p:txBody>
+      </p:sp>
+      <p:sp>
+        <p:nvSpPr>
+          <p:cNvPr id="47" name="gl-47"/>
+          <p:cNvSpPr txBox="1"/>
+          <p:nvPr/>
+        </p:nvSpPr>
+        <p:spPr>
+          <a:xfrm>
+            <a:off x="594360" y="3374600"/>
+            <a:ext cx="1000000" cy="170000"/>
+          </a:xfrm>
+          <a:prstGeom prst="rect">
+            <a:avLst/>
+          </a:prstGeom>
+          <a:noFill/>
+          <a:ln/>
+        </p:spPr>
+        <p:txBody>
+          <a:bodyPr wrap="square" lIns="0" tIns="0" rIns="0" bIns="0" anchor="ctr"/>
+          <a:lstStyle/>
+          <a:p>
+            <a:pPr indent="0" marL="0" algn="r">
+              <a:buNone/>
+            </a:pPr>
+            <a:r>
+              <a:rPr lang="fr-FR" sz="1200" b="0" dirty="0">
+                <a:solidFill>
+                  <a:srgbClr val="1A1A1A"/>
+                </a:solidFill>
+              </a:rPr>
+              <a:t>Sokodé</a:t>
+            </a:r>
+          </a:p>
+        </p:txBody>
+      </p:sp>
+      <p:sp>
+        <p:nvSpPr>
+          <p:cNvPr id="48" name="bar-48"/>
+          <p:cNvSpPr/>
+          <p:nvPr/>
+        </p:nvSpPr>
+        <p:spPr>
+          <a:xfrm>
+            <a:off x="1714360" y="3374600"/>
+            <a:ext cx="821846" cy="170000"/>
+          </a:xfrm>
+          <a:prstGeom prst="rect">
+            <a:avLst/>
+          </a:prstGeom>
+          <a:solidFill>
+            <a:srgbClr val="2A78D6"/>
+          </a:solidFill>
+          <a:ln/>
+        </p:spPr>
+        <p:txBody>
+          <a:bodyPr/>
+          <a:lstStyle/>
+          <a:p/>
+        </p:txBody>
+      </p:sp>
+      <p:sp>
+        <p:nvSpPr>
+          <p:cNvPr id="49" name="gv-49"/>
+          <p:cNvSpPr txBox="1"/>
+          <p:nvPr/>
+        </p:nvSpPr>
+        <p:spPr>
+          <a:xfrm>
+            <a:off x="2616206" y="3374600"/>
+            <a:ext cx="800000" cy="170000"/>
+          </a:xfrm>
+          <a:prstGeom prst="rect">
+            <a:avLst/>
+          </a:prstGeom>
+          <a:noFill/>
+          <a:ln/>
+        </p:spPr>
+        <p:txBody>
+          <a:bodyPr wrap="square" lIns="0" tIns="0" rIns="0" bIns="0" anchor="ctr"/>
+          <a:lstStyle/>
+          <a:p>
+            <a:pPr indent="0" marL="0" algn="l">
+              <a:buNone/>
+            </a:pPr>
+            <a:r>
+              <a:rPr lang="fr-FR" sz="1200" b="1" dirty="0">
+                <a:solidFill>
+                  <a:srgbClr val="353430"/>
+                </a:solidFill>
+              </a:rPr>
+              <a:t>504</a:t>
+            </a:r>
+          </a:p>
+        </p:txBody>
+      </p:sp>
+      <p:sp>
+        <p:nvSpPr>
+          <p:cNvPr id="50" name="gl-50"/>
+          <p:cNvSpPr txBox="1"/>
+          <p:nvPr/>
+        </p:nvSpPr>
+        <p:spPr>
+          <a:xfrm>
+            <a:off x="594360" y="3604600"/>
+            <a:ext cx="1000000" cy="170000"/>
+          </a:xfrm>
+          <a:prstGeom prst="rect">
+            <a:avLst/>
+          </a:prstGeom>
+          <a:noFill/>
+          <a:ln/>
+        </p:spPr>
+        <p:txBody>
+          <a:bodyPr wrap="square" lIns="0" tIns="0" rIns="0" bIns="0" anchor="ctr"/>
+          <a:lstStyle/>
+          <a:p>
+            <a:pPr indent="0" marL="0" algn="r">
+              <a:buNone/>
+            </a:pPr>
+            <a:r>
+              <a:rPr lang="fr-FR" sz="1200" b="0" dirty="0">
+                <a:solidFill>
+                  <a:srgbClr val="1A1A1A"/>
+                </a:solidFill>
+              </a:rPr>
+              <a:t>Kpalimé</a:t>
+            </a:r>
+          </a:p>
+        </p:txBody>
+      </p:sp>
+      <p:sp>
+        <p:nvSpPr>
+          <p:cNvPr id="51" name="bar-51"/>
+          <p:cNvSpPr/>
+          <p:nvPr/>
+        </p:nvSpPr>
+        <p:spPr>
+          <a:xfrm>
+            <a:off x="1714360" y="3604600"/>
+            <a:ext cx="679214" cy="170000"/>
+          </a:xfrm>
+          <a:prstGeom prst="rect">
+            <a:avLst/>
+          </a:prstGeom>
+          <a:solidFill>
+            <a:srgbClr val="2A78D6"/>
+          </a:solidFill>
+          <a:ln/>
+        </p:spPr>
+        <p:txBody>
+          <a:bodyPr/>
+          <a:lstStyle/>
+          <a:p/>
+        </p:txBody>
+      </p:sp>
+      <p:sp>
+        <p:nvSpPr>
+          <p:cNvPr id="52" name="gv-52"/>
+          <p:cNvSpPr txBox="1"/>
+          <p:nvPr/>
+        </p:nvSpPr>
+        <p:spPr>
+          <a:xfrm>
+            <a:off x="2473574" y="3604600"/>
+            <a:ext cx="800000" cy="170000"/>
+          </a:xfrm>
+          <a:prstGeom prst="rect">
+            <a:avLst/>
+          </a:prstGeom>
+          <a:noFill/>
+          <a:ln/>
+        </p:spPr>
+        <p:txBody>
+          <a:bodyPr wrap="square" lIns="0" tIns="0" rIns="0" bIns="0" anchor="ctr"/>
+          <a:lstStyle/>
+          <a:p>
+            <a:pPr indent="0" marL="0" algn="l">
+              <a:buNone/>
+            </a:pPr>
+            <a:r>
+              <a:rPr lang="fr-FR" sz="1200" b="1" dirty="0">
+                <a:solidFill>
+                  <a:srgbClr val="353430"/>
+                </a:solidFill>
+              </a:rPr>
+              <a:t>416</a:t>
+            </a:r>
+          </a:p>
+        </p:txBody>
+      </p:sp>
+      <p:sp>
+        <p:nvSpPr>
+          <p:cNvPr id="53" name="gl-53"/>
+          <p:cNvSpPr txBox="1"/>
+          <p:nvPr/>
+        </p:nvSpPr>
+        <p:spPr>
+          <a:xfrm>
+            <a:off x="594360" y="3834600"/>
+            <a:ext cx="1000000" cy="170000"/>
+          </a:xfrm>
+          <a:prstGeom prst="rect">
+            <a:avLst/>
+          </a:prstGeom>
+          <a:noFill/>
+          <a:ln/>
+        </p:spPr>
+        <p:txBody>
+          <a:bodyPr wrap="square" lIns="0" tIns="0" rIns="0" bIns="0" anchor="ctr"/>
+          <a:lstStyle/>
+          <a:p>
+            <a:pPr indent="0" marL="0" algn="r">
+              <a:buNone/>
+            </a:pPr>
+            <a:r>
+              <a:rPr lang="fr-FR" sz="1200" b="0" dirty="0">
+                <a:solidFill>
+                  <a:srgbClr val="1A1A1A"/>
+                </a:solidFill>
+              </a:rPr>
+              <a:t>Atakpamé</a:t>
+            </a:r>
+          </a:p>
+        </p:txBody>
+      </p:sp>
+      <p:sp>
+        <p:nvSpPr>
+          <p:cNvPr id="54" name="bar-54"/>
+          <p:cNvSpPr/>
+          <p:nvPr/>
+        </p:nvSpPr>
+        <p:spPr>
+          <a:xfrm>
+            <a:off x="1714360" y="3834600"/>
+            <a:ext cx="671217" cy="170000"/>
+          </a:xfrm>
+          <a:prstGeom prst="rect">
+            <a:avLst/>
+          </a:prstGeom>
+          <a:solidFill>
+            <a:srgbClr val="2A78D6"/>
+          </a:solidFill>
+          <a:ln/>
+        </p:spPr>
+        <p:txBody>
+          <a:bodyPr/>
+          <a:lstStyle/>
+          <a:p/>
+        </p:txBody>
+      </p:sp>
+      <p:sp>
+        <p:nvSpPr>
+          <p:cNvPr id="55" name="gv-55"/>
+          <p:cNvSpPr txBox="1"/>
+          <p:nvPr/>
+        </p:nvSpPr>
+        <p:spPr>
+          <a:xfrm>
+            <a:off x="2465577" y="3834600"/>
+            <a:ext cx="800000" cy="170000"/>
+          </a:xfrm>
+          <a:prstGeom prst="rect">
+            <a:avLst/>
+          </a:prstGeom>
+          <a:noFill/>
+          <a:ln/>
+        </p:spPr>
+        <p:txBody>
+          <a:bodyPr wrap="square" lIns="0" tIns="0" rIns="0" bIns="0" anchor="ctr"/>
+          <a:lstStyle/>
+          <a:p>
+            <a:pPr indent="0" marL="0" algn="l">
+              <a:buNone/>
+            </a:pPr>
+            <a:r>
+              <a:rPr lang="fr-FR" sz="1200" b="1" dirty="0">
+                <a:solidFill>
+                  <a:srgbClr val="353430"/>
+                </a:solidFill>
+              </a:rPr>
+              <a:t>411</a:t>
+            </a:r>
+          </a:p>
+        </p:txBody>
+      </p:sp>
+      <p:sp>
+        <p:nvSpPr>
+          <p:cNvPr id="56" name="gl-56"/>
+          <p:cNvSpPr txBox="1"/>
+          <p:nvPr/>
+        </p:nvSpPr>
+        <p:spPr>
+          <a:xfrm>
+            <a:off x="594360" y="4064600"/>
+            <a:ext cx="1000000" cy="170000"/>
+          </a:xfrm>
+          <a:prstGeom prst="rect">
+            <a:avLst/>
+          </a:prstGeom>
+          <a:noFill/>
+          <a:ln/>
+        </p:spPr>
+        <p:txBody>
+          <a:bodyPr wrap="square" lIns="0" tIns="0" rIns="0" bIns="0" anchor="ctr"/>
+          <a:lstStyle/>
+          <a:p>
+            <a:pPr indent="0" marL="0" algn="r">
+              <a:buNone/>
+            </a:pPr>
+            <a:r>
+              <a:rPr lang="fr-FR" sz="1200" b="0" dirty="0">
+                <a:solidFill>
+                  <a:srgbClr val="1A1A1A"/>
+                </a:solidFill>
+              </a:rPr>
+              <a:t>Tsévié</a:t>
+            </a:r>
+          </a:p>
+        </p:txBody>
+      </p:sp>
+      <p:sp>
+        <p:nvSpPr>
+          <p:cNvPr id="57" name="bar-57"/>
+          <p:cNvSpPr/>
+          <p:nvPr/>
+        </p:nvSpPr>
+        <p:spPr>
+          <a:xfrm>
+            <a:off x="1714360" y="4064600"/>
+            <a:ext cx="527933" cy="170000"/>
+          </a:xfrm>
+          <a:prstGeom prst="rect">
+            <a:avLst/>
+          </a:prstGeom>
+          <a:solidFill>
+            <a:srgbClr val="2A78D6"/>
+          </a:solidFill>
+          <a:ln/>
+        </p:spPr>
+        <p:txBody>
+          <a:bodyPr/>
+          <a:lstStyle/>
+          <a:p/>
+        </p:txBody>
+      </p:sp>
+      <p:sp>
+        <p:nvSpPr>
+          <p:cNvPr id="58" name="gv-58"/>
+          <p:cNvSpPr txBox="1"/>
+          <p:nvPr/>
+        </p:nvSpPr>
+        <p:spPr>
+          <a:xfrm>
+            <a:off x="2322293" y="4064600"/>
+            <a:ext cx="800000" cy="170000"/>
+          </a:xfrm>
+          <a:prstGeom prst="rect">
+            <a:avLst/>
+          </a:prstGeom>
+          <a:noFill/>
+          <a:ln/>
+        </p:spPr>
+        <p:txBody>
+          <a:bodyPr wrap="square" lIns="0" tIns="0" rIns="0" bIns="0" anchor="ctr"/>
+          <a:lstStyle/>
+          <a:p>
+            <a:pPr indent="0" marL="0" algn="l">
+              <a:buNone/>
+            </a:pPr>
+            <a:r>
+              <a:rPr lang="fr-FR" sz="1200" b="1" dirty="0">
+                <a:solidFill>
+                  <a:srgbClr val="353430"/>
+                </a:solidFill>
+              </a:rPr>
+              <a:t>324</a:t>
+            </a:r>
+          </a:p>
+        </p:txBody>
+      </p:sp>
+      <p:sp>
+        <p:nvSpPr>
+          <p:cNvPr id="59" name="gl-59"/>
+          <p:cNvSpPr txBox="1"/>
+          <p:nvPr/>
+        </p:nvSpPr>
+        <p:spPr>
+          <a:xfrm>
+            <a:off x="594360" y="4294600"/>
+            <a:ext cx="1000000" cy="170000"/>
+          </a:xfrm>
+          <a:prstGeom prst="rect">
+            <a:avLst/>
+          </a:prstGeom>
+          <a:noFill/>
+          <a:ln/>
+        </p:spPr>
+        <p:txBody>
+          <a:bodyPr wrap="square" lIns="0" tIns="0" rIns="0" bIns="0" anchor="ctr"/>
+          <a:lstStyle/>
+          <a:p>
+            <a:pPr indent="0" marL="0" algn="r">
+              <a:buNone/>
+            </a:pPr>
+            <a:r>
+              <a:rPr lang="fr-FR" sz="1200" b="0" dirty="0">
+                <a:solidFill>
+                  <a:srgbClr val="1A1A1A"/>
+                </a:solidFill>
+              </a:rPr>
+              <a:t>Dapaong</a:t>
+            </a:r>
+          </a:p>
+        </p:txBody>
+      </p:sp>
+      <p:sp>
+        <p:nvSpPr>
+          <p:cNvPr id="60" name="bar-60"/>
+          <p:cNvSpPr/>
+          <p:nvPr/>
+        </p:nvSpPr>
+        <p:spPr>
+          <a:xfrm>
+            <a:off x="1714360" y="4294600"/>
+            <a:ext cx="524179" cy="170000"/>
+          </a:xfrm>
+          <a:prstGeom prst="rect">
+            <a:avLst/>
+          </a:prstGeom>
+          <a:solidFill>
+            <a:srgbClr val="2A78D6"/>
+          </a:solidFill>
+          <a:ln/>
+        </p:spPr>
+        <p:txBody>
+          <a:bodyPr/>
+          <a:lstStyle/>
+          <a:p/>
+        </p:txBody>
+      </p:sp>
+      <p:sp>
+        <p:nvSpPr>
+          <p:cNvPr id="61" name="gv-61"/>
+          <p:cNvSpPr txBox="1"/>
+          <p:nvPr/>
+        </p:nvSpPr>
+        <p:spPr>
+          <a:xfrm>
+            <a:off x="2318539" y="4294600"/>
+            <a:ext cx="800000" cy="170000"/>
+          </a:xfrm>
+          <a:prstGeom prst="rect">
+            <a:avLst/>
+          </a:prstGeom>
+          <a:noFill/>
+          <a:ln/>
+        </p:spPr>
+        <p:txBody>
+          <a:bodyPr wrap="square" lIns="0" tIns="0" rIns="0" bIns="0" anchor="ctr"/>
+          <a:lstStyle/>
+          <a:p>
+            <a:pPr indent="0" marL="0" algn="l">
+              <a:buNone/>
+            </a:pPr>
+            <a:r>
+              <a:rPr lang="fr-FR" sz="1200" b="1" dirty="0">
+                <a:solidFill>
+                  <a:srgbClr val="353430"/>
+                </a:solidFill>
+              </a:rPr>
+              <a:t>321</a:t>
+            </a:r>
+          </a:p>
+        </p:txBody>
+      </p:sp>
+      <p:sp>
+        <p:nvSpPr>
+          <p:cNvPr id="62" name="gl-62"/>
+          <p:cNvSpPr txBox="1"/>
+          <p:nvPr/>
+        </p:nvSpPr>
+        <p:spPr>
+          <a:xfrm>
+            <a:off x="594360" y="4524600"/>
+            <a:ext cx="1000000" cy="170000"/>
+          </a:xfrm>
+          <a:prstGeom prst="rect">
+            <a:avLst/>
+          </a:prstGeom>
+          <a:noFill/>
+          <a:ln/>
+        </p:spPr>
+        <p:txBody>
+          <a:bodyPr wrap="square" lIns="0" tIns="0" rIns="0" bIns="0" anchor="ctr"/>
+          <a:lstStyle/>
+          <a:p>
+            <a:pPr indent="0" marL="0" algn="r">
+              <a:buNone/>
+            </a:pPr>
+            <a:r>
+              <a:rPr lang="fr-FR" sz="1200" b="0" dirty="0">
+                <a:solidFill>
+                  <a:srgbClr val="1A1A1A"/>
+                </a:solidFill>
+              </a:rPr>
+              <a:t>Aného</a:t>
+            </a:r>
+          </a:p>
+        </p:txBody>
+      </p:sp>
+      <p:sp>
+        <p:nvSpPr>
+          <p:cNvPr id="63" name="bar-63"/>
+          <p:cNvSpPr/>
+          <p:nvPr/>
+        </p:nvSpPr>
+        <p:spPr>
+          <a:xfrm>
+            <a:off x="1714360" y="4524600"/>
+            <a:ext cx="377141" cy="170000"/>
+          </a:xfrm>
+          <a:prstGeom prst="rect">
+            <a:avLst/>
+          </a:prstGeom>
+          <a:solidFill>
+            <a:srgbClr val="2A78D6"/>
+          </a:solidFill>
+          <a:ln/>
+        </p:spPr>
+        <p:txBody>
+          <a:bodyPr/>
+          <a:lstStyle/>
+          <a:p/>
+        </p:txBody>
+      </p:sp>
+      <p:sp>
+        <p:nvSpPr>
+          <p:cNvPr id="64" name="gv-64"/>
+          <p:cNvSpPr txBox="1"/>
+          <p:nvPr/>
+        </p:nvSpPr>
+        <p:spPr>
+          <a:xfrm>
+            <a:off x="2171501" y="4524600"/>
+            <a:ext cx="800000" cy="170000"/>
+          </a:xfrm>
+          <a:prstGeom prst="rect">
+            <a:avLst/>
+          </a:prstGeom>
+          <a:noFill/>
+          <a:ln/>
+        </p:spPr>
+        <p:txBody>
+          <a:bodyPr wrap="square" lIns="0" tIns="0" rIns="0" bIns="0" anchor="ctr"/>
+          <a:lstStyle/>
+          <a:p>
+            <a:pPr indent="0" marL="0" algn="l">
+              <a:buNone/>
+            </a:pPr>
+            <a:r>
+              <a:rPr lang="fr-FR" sz="1200" b="1" dirty="0">
+                <a:solidFill>
+                  <a:srgbClr val="353430"/>
+                </a:solidFill>
+              </a:rPr>
+              <a:t>231</a:t>
+            </a:r>
+          </a:p>
+        </p:txBody>
+      </p:sp>
+      <p:sp>
+        <p:nvSpPr>
+          <p:cNvPr id="65" name="gt-65"/>
+          <p:cNvSpPr txBox="1"/>
+          <p:nvPr/>
+        </p:nvSpPr>
         <p:spPr>
           <a:xfrm>
             <a:off x="6263640" y="2514600"/>
-            <a:ext cx="5303520" cy="2194560"/>
-          </a:xfrm>
-          <a:prstGeom prst="rect">
-            <a:avLst/>
-          </a:prstGeom>
-        </p:spPr>
-      </p:pic>
+            <a:ext cx="5303520" cy="300000"/>
+          </a:xfrm>
+          <a:prstGeom prst="rect">
+            <a:avLst/>
+          </a:prstGeom>
+          <a:noFill/>
+          <a:ln/>
+        </p:spPr>
+        <p:txBody>
+          <a:bodyPr wrap="square" lIns="0" tIns="0" rIns="0" bIns="0" anchor="ctr"/>
+          <a:lstStyle/>
+          <a:p>
+            <a:pPr indent="0" marL="0" algn="l">
+              <a:buNone/>
+            </a:pPr>
+            <a:r>
+              <a:rPr lang="fr-FR" sz="1250" b="1" dirty="0">
+                <a:solidFill>
+                  <a:srgbClr val="1E2761"/>
+                </a:solidFill>
+              </a:rPr>
+              <a:t>Top 10 des produits par chiffre d'affaires (millions de FCFA)</a:t>
+            </a:r>
+          </a:p>
+        </p:txBody>
+      </p:sp>
+      <p:sp>
+        <p:nvSpPr>
+          <p:cNvPr id="66" name="gl-66"/>
+          <p:cNvSpPr txBox="1"/>
+          <p:nvPr/>
+        </p:nvSpPr>
+        <p:spPr>
+          <a:xfrm>
+            <a:off x="6263640" y="2914600"/>
+            <a:ext cx="1150000" cy="140000"/>
+          </a:xfrm>
+          <a:prstGeom prst="rect">
+            <a:avLst/>
+          </a:prstGeom>
+          <a:noFill/>
+          <a:ln/>
+        </p:spPr>
+        <p:txBody>
+          <a:bodyPr wrap="square" lIns="0" tIns="0" rIns="0" bIns="0" anchor="ctr"/>
+          <a:lstStyle/>
+          <a:p>
+            <a:pPr indent="0" marL="0" algn="r">
+              <a:buNone/>
+            </a:pPr>
+            <a:r>
+              <a:rPr lang="fr-FR" sz="1200" b="0" dirty="0">
+                <a:solidFill>
+                  <a:srgbClr val="1A1A1A"/>
+                </a:solidFill>
+              </a:rPr>
+              <a:t>Powerbank</a:t>
+            </a:r>
+          </a:p>
+        </p:txBody>
+      </p:sp>
+      <p:sp>
+        <p:nvSpPr>
+          <p:cNvPr id="67" name="bar-67"/>
+          <p:cNvSpPr/>
+          <p:nvPr/>
+        </p:nvSpPr>
+        <p:spPr>
+          <a:xfrm>
+            <a:off x="7533640" y="2914600"/>
+            <a:ext cx="2800000" cy="140000"/>
+          </a:xfrm>
+          <a:prstGeom prst="rect">
+            <a:avLst/>
+          </a:prstGeom>
+          <a:solidFill>
+            <a:srgbClr val="1E2761"/>
+          </a:solidFill>
+          <a:ln/>
+        </p:spPr>
+        <p:txBody>
+          <a:bodyPr/>
+          <a:lstStyle/>
+          <a:p/>
+        </p:txBody>
+      </p:sp>
+      <p:sp>
+        <p:nvSpPr>
+          <p:cNvPr id="68" name="gv-68"/>
+          <p:cNvSpPr txBox="1"/>
+          <p:nvPr/>
+        </p:nvSpPr>
+        <p:spPr>
+          <a:xfrm>
+            <a:off x="10413640" y="2914600"/>
+            <a:ext cx="800000" cy="140000"/>
+          </a:xfrm>
+          <a:prstGeom prst="rect">
+            <a:avLst/>
+          </a:prstGeom>
+          <a:noFill/>
+          <a:ln/>
+        </p:spPr>
+        <p:txBody>
+          <a:bodyPr wrap="square" lIns="0" tIns="0" rIns="0" bIns="0" anchor="ctr"/>
+          <a:lstStyle/>
+          <a:p>
+            <a:pPr indent="0" marL="0" algn="l">
+              <a:buNone/>
+            </a:pPr>
+            <a:r>
+              <a:rPr lang="fr-FR" sz="1200" b="1" dirty="0">
+                <a:solidFill>
+                  <a:srgbClr val="353430"/>
+                </a:solidFill>
+              </a:rPr>
+              <a:t>888</a:t>
+            </a:r>
+          </a:p>
+        </p:txBody>
+      </p:sp>
+      <p:sp>
+        <p:nvSpPr>
+          <p:cNvPr id="69" name="gl-69"/>
+          <p:cNvSpPr txBox="1"/>
+          <p:nvPr/>
+        </p:nvSpPr>
+        <p:spPr>
+          <a:xfrm>
+            <a:off x="6263640" y="3098600"/>
+            <a:ext cx="1150000" cy="140000"/>
+          </a:xfrm>
+          <a:prstGeom prst="rect">
+            <a:avLst/>
+          </a:prstGeom>
+          <a:noFill/>
+          <a:ln/>
+        </p:spPr>
+        <p:txBody>
+          <a:bodyPr wrap="square" lIns="0" tIns="0" rIns="0" bIns="0" anchor="ctr"/>
+          <a:lstStyle/>
+          <a:p>
+            <a:pPr indent="0" marL="0" algn="r">
+              <a:buNone/>
+            </a:pPr>
+            <a:r>
+              <a:rPr lang="fr-FR" sz="1200" b="0" dirty="0">
+                <a:solidFill>
+                  <a:srgbClr val="1A1A1A"/>
+                </a:solidFill>
+              </a:rPr>
+              <a:t>Souris</a:t>
+            </a:r>
+          </a:p>
+        </p:txBody>
+      </p:sp>
+      <p:sp>
+        <p:nvSpPr>
+          <p:cNvPr id="70" name="bar-70"/>
+          <p:cNvSpPr/>
+          <p:nvPr/>
+        </p:nvSpPr>
+        <p:spPr>
+          <a:xfrm>
+            <a:off x="7533640" y="3098600"/>
+            <a:ext cx="1839981" cy="140000"/>
+          </a:xfrm>
+          <a:prstGeom prst="rect">
+            <a:avLst/>
+          </a:prstGeom>
+          <a:solidFill>
+            <a:srgbClr val="1E2761"/>
+          </a:solidFill>
+          <a:ln/>
+        </p:spPr>
+        <p:txBody>
+          <a:bodyPr/>
+          <a:lstStyle/>
+          <a:p/>
+        </p:txBody>
+      </p:sp>
+      <p:sp>
+        <p:nvSpPr>
+          <p:cNvPr id="71" name="gv-71"/>
+          <p:cNvSpPr txBox="1"/>
+          <p:nvPr/>
+        </p:nvSpPr>
+        <p:spPr>
+          <a:xfrm>
+            <a:off x="9453621" y="3098600"/>
+            <a:ext cx="800000" cy="140000"/>
+          </a:xfrm>
+          <a:prstGeom prst="rect">
+            <a:avLst/>
+          </a:prstGeom>
+          <a:noFill/>
+          <a:ln/>
+        </p:spPr>
+        <p:txBody>
+          <a:bodyPr wrap="square" lIns="0" tIns="0" rIns="0" bIns="0" anchor="ctr"/>
+          <a:lstStyle/>
+          <a:p>
+            <a:pPr indent="0" marL="0" algn="l">
+              <a:buNone/>
+            </a:pPr>
+            <a:r>
+              <a:rPr lang="fr-FR" sz="1200" b="1" dirty="0">
+                <a:solidFill>
+                  <a:srgbClr val="353430"/>
+                </a:solidFill>
+              </a:rPr>
+              <a:t>584</a:t>
+            </a:r>
+          </a:p>
+        </p:txBody>
+      </p:sp>
+      <p:sp>
+        <p:nvSpPr>
+          <p:cNvPr id="72" name="gl-72"/>
+          <p:cNvSpPr txBox="1"/>
+          <p:nvPr/>
+        </p:nvSpPr>
+        <p:spPr>
+          <a:xfrm>
+            <a:off x="6263640" y="3282600"/>
+            <a:ext cx="1150000" cy="140000"/>
+          </a:xfrm>
+          <a:prstGeom prst="rect">
+            <a:avLst/>
+          </a:prstGeom>
+          <a:noFill/>
+          <a:ln/>
+        </p:spPr>
+        <p:txBody>
+          <a:bodyPr wrap="square" lIns="0" tIns="0" rIns="0" bIns="0" anchor="ctr"/>
+          <a:lstStyle/>
+          <a:p>
+            <a:pPr indent="0" marL="0" algn="r">
+              <a:buNone/>
+            </a:pPr>
+            <a:r>
+              <a:rPr lang="fr-FR" sz="1200" b="0" dirty="0">
+                <a:solidFill>
+                  <a:srgbClr val="1A1A1A"/>
+                </a:solidFill>
+              </a:rPr>
+              <a:t>Clé USB</a:t>
+            </a:r>
+          </a:p>
+        </p:txBody>
+      </p:sp>
+      <p:sp>
+        <p:nvSpPr>
+          <p:cNvPr id="73" name="bar-73"/>
+          <p:cNvSpPr/>
+          <p:nvPr/>
+        </p:nvSpPr>
+        <p:spPr>
+          <a:xfrm>
+            <a:off x="7533640" y="3282600"/>
+            <a:ext cx="1637325" cy="140000"/>
+          </a:xfrm>
+          <a:prstGeom prst="rect">
+            <a:avLst/>
+          </a:prstGeom>
+          <a:solidFill>
+            <a:srgbClr val="1E2761"/>
+          </a:solidFill>
+          <a:ln/>
+        </p:spPr>
+        <p:txBody>
+          <a:bodyPr/>
+          <a:lstStyle/>
+          <a:p/>
+        </p:txBody>
+      </p:sp>
+      <p:sp>
+        <p:nvSpPr>
+          <p:cNvPr id="74" name="gv-74"/>
+          <p:cNvSpPr txBox="1"/>
+          <p:nvPr/>
+        </p:nvSpPr>
+        <p:spPr>
+          <a:xfrm>
+            <a:off x="9250965" y="3282600"/>
+            <a:ext cx="800000" cy="140000"/>
+          </a:xfrm>
+          <a:prstGeom prst="rect">
+            <a:avLst/>
+          </a:prstGeom>
+          <a:noFill/>
+          <a:ln/>
+        </p:spPr>
+        <p:txBody>
+          <a:bodyPr wrap="square" lIns="0" tIns="0" rIns="0" bIns="0" anchor="ctr"/>
+          <a:lstStyle/>
+          <a:p>
+            <a:pPr indent="0" marL="0" algn="l">
+              <a:buNone/>
+            </a:pPr>
+            <a:r>
+              <a:rPr lang="fr-FR" sz="1200" b="1" dirty="0">
+                <a:solidFill>
+                  <a:srgbClr val="353430"/>
+                </a:solidFill>
+              </a:rPr>
+              <a:t>520</a:t>
+            </a:r>
+          </a:p>
+        </p:txBody>
+      </p:sp>
+      <p:sp>
+        <p:nvSpPr>
+          <p:cNvPr id="75" name="gl-75"/>
+          <p:cNvSpPr txBox="1"/>
+          <p:nvPr/>
+        </p:nvSpPr>
+        <p:spPr>
+          <a:xfrm>
+            <a:off x="6263640" y="3466600"/>
+            <a:ext cx="1150000" cy="140000"/>
+          </a:xfrm>
+          <a:prstGeom prst="rect">
+            <a:avLst/>
+          </a:prstGeom>
+          <a:noFill/>
+          <a:ln/>
+        </p:spPr>
+        <p:txBody>
+          <a:bodyPr wrap="square" lIns="0" tIns="0" rIns="0" bIns="0" anchor="ctr"/>
+          <a:lstStyle/>
+          <a:p>
+            <a:pPr indent="0" marL="0" algn="r">
+              <a:buNone/>
+            </a:pPr>
+            <a:r>
+              <a:rPr lang="fr-FR" sz="1200" b="0" dirty="0">
+                <a:solidFill>
+                  <a:srgbClr val="1A1A1A"/>
+                </a:solidFill>
+              </a:rPr>
+              <a:t>Écouteurs</a:t>
+            </a:r>
+          </a:p>
+        </p:txBody>
+      </p:sp>
+      <p:sp>
+        <p:nvSpPr>
+          <p:cNvPr id="76" name="bar-76"/>
+          <p:cNvSpPr/>
+          <p:nvPr/>
+        </p:nvSpPr>
+        <p:spPr>
+          <a:xfrm>
+            <a:off x="7533640" y="3466600"/>
+            <a:ext cx="1520396" cy="140000"/>
+          </a:xfrm>
+          <a:prstGeom prst="rect">
+            <a:avLst/>
+          </a:prstGeom>
+          <a:solidFill>
+            <a:srgbClr val="1E2761"/>
+          </a:solidFill>
+          <a:ln/>
+        </p:spPr>
+        <p:txBody>
+          <a:bodyPr/>
+          <a:lstStyle/>
+          <a:p/>
+        </p:txBody>
+      </p:sp>
+      <p:sp>
+        <p:nvSpPr>
+          <p:cNvPr id="77" name="gv-77"/>
+          <p:cNvSpPr txBox="1"/>
+          <p:nvPr/>
+        </p:nvSpPr>
+        <p:spPr>
+          <a:xfrm>
+            <a:off x="9134036" y="3466600"/>
+            <a:ext cx="800000" cy="140000"/>
+          </a:xfrm>
+          <a:prstGeom prst="rect">
+            <a:avLst/>
+          </a:prstGeom>
+          <a:noFill/>
+          <a:ln/>
+        </p:spPr>
+        <p:txBody>
+          <a:bodyPr wrap="square" lIns="0" tIns="0" rIns="0" bIns="0" anchor="ctr"/>
+          <a:lstStyle/>
+          <a:p>
+            <a:pPr indent="0" marL="0" algn="l">
+              <a:buNone/>
+            </a:pPr>
+            <a:r>
+              <a:rPr lang="fr-FR" sz="1200" b="1" dirty="0">
+                <a:solidFill>
+                  <a:srgbClr val="353430"/>
+                </a:solidFill>
+              </a:rPr>
+              <a:t>482</a:t>
+            </a:r>
+          </a:p>
+        </p:txBody>
+      </p:sp>
+      <p:sp>
+        <p:nvSpPr>
+          <p:cNvPr id="78" name="gl-78"/>
+          <p:cNvSpPr txBox="1"/>
+          <p:nvPr/>
+        </p:nvSpPr>
+        <p:spPr>
+          <a:xfrm>
+            <a:off x="6263640" y="3650600"/>
+            <a:ext cx="1150000" cy="140000"/>
+          </a:xfrm>
+          <a:prstGeom prst="rect">
+            <a:avLst/>
+          </a:prstGeom>
+          <a:noFill/>
+          <a:ln/>
+        </p:spPr>
+        <p:txBody>
+          <a:bodyPr wrap="square" lIns="0" tIns="0" rIns="0" bIns="0" anchor="ctr"/>
+          <a:lstStyle/>
+          <a:p>
+            <a:pPr indent="0" marL="0" algn="r">
+              <a:buNone/>
+            </a:pPr>
+            <a:r>
+              <a:rPr lang="fr-FR" sz="1200" b="0" dirty="0">
+                <a:solidFill>
+                  <a:srgbClr val="1A1A1A"/>
+                </a:solidFill>
+              </a:rPr>
+              <a:t>Riz 5 kg</a:t>
+            </a:r>
+          </a:p>
+        </p:txBody>
+      </p:sp>
+      <p:sp>
+        <p:nvSpPr>
+          <p:cNvPr id="79" name="bar-79"/>
+          <p:cNvSpPr/>
+          <p:nvPr/>
+        </p:nvSpPr>
+        <p:spPr>
+          <a:xfrm>
+            <a:off x="7533640" y="3650600"/>
+            <a:ext cx="1510310" cy="140000"/>
+          </a:xfrm>
+          <a:prstGeom prst="rect">
+            <a:avLst/>
+          </a:prstGeom>
+          <a:solidFill>
+            <a:srgbClr val="2A78D6"/>
+          </a:solidFill>
+          <a:ln/>
+        </p:spPr>
+        <p:txBody>
+          <a:bodyPr/>
+          <a:lstStyle/>
+          <a:p/>
+        </p:txBody>
+      </p:sp>
+      <p:sp>
+        <p:nvSpPr>
+          <p:cNvPr id="80" name="gv-80"/>
+          <p:cNvSpPr txBox="1"/>
+          <p:nvPr/>
+        </p:nvSpPr>
+        <p:spPr>
+          <a:xfrm>
+            <a:off x="9123950" y="3650600"/>
+            <a:ext cx="800000" cy="140000"/>
+          </a:xfrm>
+          <a:prstGeom prst="rect">
+            <a:avLst/>
+          </a:prstGeom>
+          <a:noFill/>
+          <a:ln/>
+        </p:spPr>
+        <p:txBody>
+          <a:bodyPr wrap="square" lIns="0" tIns="0" rIns="0" bIns="0" anchor="ctr"/>
+          <a:lstStyle/>
+          <a:p>
+            <a:pPr indent="0" marL="0" algn="l">
+              <a:buNone/>
+            </a:pPr>
+            <a:r>
+              <a:rPr lang="fr-FR" sz="1200" b="1" dirty="0">
+                <a:solidFill>
+                  <a:srgbClr val="353430"/>
+                </a:solidFill>
+              </a:rPr>
+              <a:t>479</a:t>
+            </a:r>
+          </a:p>
+        </p:txBody>
+      </p:sp>
+      <p:sp>
+        <p:nvSpPr>
+          <p:cNvPr id="81" name="gl-81"/>
+          <p:cNvSpPr txBox="1"/>
+          <p:nvPr/>
+        </p:nvSpPr>
+        <p:spPr>
+          <a:xfrm>
+            <a:off x="6263640" y="3834600"/>
+            <a:ext cx="1150000" cy="140000"/>
+          </a:xfrm>
+          <a:prstGeom prst="rect">
+            <a:avLst/>
+          </a:prstGeom>
+          <a:noFill/>
+          <a:ln/>
+        </p:spPr>
+        <p:txBody>
+          <a:bodyPr wrap="square" lIns="0" tIns="0" rIns="0" bIns="0" anchor="ctr"/>
+          <a:lstStyle/>
+          <a:p>
+            <a:pPr indent="0" marL="0" algn="r">
+              <a:buNone/>
+            </a:pPr>
+            <a:r>
+              <a:rPr lang="fr-FR" sz="1200" b="0" dirty="0">
+                <a:solidFill>
+                  <a:srgbClr val="1A1A1A"/>
+                </a:solidFill>
+              </a:rPr>
+              <a:t>Ramette A4</a:t>
+            </a:r>
+          </a:p>
+        </p:txBody>
+      </p:sp>
+      <p:sp>
+        <p:nvSpPr>
+          <p:cNvPr id="82" name="bar-82"/>
+          <p:cNvSpPr/>
+          <p:nvPr/>
+        </p:nvSpPr>
+        <p:spPr>
+          <a:xfrm>
+            <a:off x="7533640" y="3834600"/>
+            <a:ext cx="1052048" cy="140000"/>
+          </a:xfrm>
+          <a:prstGeom prst="rect">
+            <a:avLst/>
+          </a:prstGeom>
+          <a:solidFill>
+            <a:srgbClr val="2A78D6"/>
+          </a:solidFill>
+          <a:ln/>
+        </p:spPr>
+        <p:txBody>
+          <a:bodyPr/>
+          <a:lstStyle/>
+          <a:p/>
+        </p:txBody>
+      </p:sp>
+      <p:sp>
+        <p:nvSpPr>
+          <p:cNvPr id="83" name="gv-83"/>
+          <p:cNvSpPr txBox="1"/>
+          <p:nvPr/>
+        </p:nvSpPr>
+        <p:spPr>
+          <a:xfrm>
+            <a:off x="8665688" y="3834600"/>
+            <a:ext cx="800000" cy="140000"/>
+          </a:xfrm>
+          <a:prstGeom prst="rect">
+            <a:avLst/>
+          </a:prstGeom>
+          <a:noFill/>
+          <a:ln/>
+        </p:spPr>
+        <p:txBody>
+          <a:bodyPr wrap="square" lIns="0" tIns="0" rIns="0" bIns="0" anchor="ctr"/>
+          <a:lstStyle/>
+          <a:p>
+            <a:pPr indent="0" marL="0" algn="l">
+              <a:buNone/>
+            </a:pPr>
+            <a:r>
+              <a:rPr lang="fr-FR" sz="1200" b="1" dirty="0">
+                <a:solidFill>
+                  <a:srgbClr val="353430"/>
+                </a:solidFill>
+              </a:rPr>
+              <a:t>334</a:t>
+            </a:r>
+          </a:p>
+        </p:txBody>
+      </p:sp>
+      <p:sp>
+        <p:nvSpPr>
+          <p:cNvPr id="84" name="gl-84"/>
+          <p:cNvSpPr txBox="1"/>
+          <p:nvPr/>
+        </p:nvSpPr>
+        <p:spPr>
+          <a:xfrm>
+            <a:off x="6263640" y="4018600"/>
+            <a:ext cx="1150000" cy="140000"/>
+          </a:xfrm>
+          <a:prstGeom prst="rect">
+            <a:avLst/>
+          </a:prstGeom>
+          <a:noFill/>
+          <a:ln/>
+        </p:spPr>
+        <p:txBody>
+          <a:bodyPr wrap="square" lIns="0" tIns="0" rIns="0" bIns="0" anchor="ctr"/>
+          <a:lstStyle/>
+          <a:p>
+            <a:pPr indent="0" marL="0" algn="r">
+              <a:buNone/>
+            </a:pPr>
+            <a:r>
+              <a:rPr lang="fr-FR" sz="1200" b="0" dirty="0">
+                <a:solidFill>
+                  <a:srgbClr val="1A1A1A"/>
+                </a:solidFill>
+              </a:rPr>
+              <a:t>Café</a:t>
+            </a:r>
+          </a:p>
+        </p:txBody>
+      </p:sp>
+      <p:sp>
+        <p:nvSpPr>
+          <p:cNvPr id="85" name="bar-85"/>
+          <p:cNvSpPr/>
+          <p:nvPr/>
+        </p:nvSpPr>
+        <p:spPr>
+          <a:xfrm>
+            <a:off x="7533640" y="4018600"/>
+            <a:ext cx="577397" cy="140000"/>
+          </a:xfrm>
+          <a:prstGeom prst="rect">
+            <a:avLst/>
+          </a:prstGeom>
+          <a:solidFill>
+            <a:srgbClr val="2A78D6"/>
+          </a:solidFill>
+          <a:ln/>
+        </p:spPr>
+        <p:txBody>
+          <a:bodyPr/>
+          <a:lstStyle/>
+          <a:p/>
+        </p:txBody>
+      </p:sp>
+      <p:sp>
+        <p:nvSpPr>
+          <p:cNvPr id="86" name="gv-86"/>
+          <p:cNvSpPr txBox="1"/>
+          <p:nvPr/>
+        </p:nvSpPr>
+        <p:spPr>
+          <a:xfrm>
+            <a:off x="8191037" y="4018600"/>
+            <a:ext cx="800000" cy="140000"/>
+          </a:xfrm>
+          <a:prstGeom prst="rect">
+            <a:avLst/>
+          </a:prstGeom>
+          <a:noFill/>
+          <a:ln/>
+        </p:spPr>
+        <p:txBody>
+          <a:bodyPr wrap="square" lIns="0" tIns="0" rIns="0" bIns="0" anchor="ctr"/>
+          <a:lstStyle/>
+          <a:p>
+            <a:pPr indent="0" marL="0" algn="l">
+              <a:buNone/>
+            </a:pPr>
+            <a:r>
+              <a:rPr lang="fr-FR" sz="1200" b="1" dirty="0">
+                <a:solidFill>
+                  <a:srgbClr val="353430"/>
+                </a:solidFill>
+              </a:rPr>
+              <a:t>183</a:t>
+            </a:r>
+          </a:p>
+        </p:txBody>
+      </p:sp>
+      <p:sp>
+        <p:nvSpPr>
+          <p:cNvPr id="87" name="gl-87"/>
+          <p:cNvSpPr txBox="1"/>
+          <p:nvPr/>
+        </p:nvSpPr>
+        <p:spPr>
+          <a:xfrm>
+            <a:off x="6263640" y="4202600"/>
+            <a:ext cx="1150000" cy="140000"/>
+          </a:xfrm>
+          <a:prstGeom prst="rect">
+            <a:avLst/>
+          </a:prstGeom>
+          <a:noFill/>
+          <a:ln/>
+        </p:spPr>
+        <p:txBody>
+          <a:bodyPr wrap="square" lIns="0" tIns="0" rIns="0" bIns="0" anchor="ctr"/>
+          <a:lstStyle/>
+          <a:p>
+            <a:pPr indent="0" marL="0" algn="r">
+              <a:buNone/>
+            </a:pPr>
+            <a:r>
+              <a:rPr lang="fr-FR" sz="1200" b="0" dirty="0">
+                <a:solidFill>
+                  <a:srgbClr val="1A1A1A"/>
+                </a:solidFill>
+              </a:rPr>
+              <a:t>Shampooing</a:t>
+            </a:r>
+          </a:p>
+        </p:txBody>
+      </p:sp>
+      <p:sp>
+        <p:nvSpPr>
+          <p:cNvPr id="88" name="bar-88"/>
+          <p:cNvSpPr/>
+          <p:nvPr/>
+        </p:nvSpPr>
+        <p:spPr>
+          <a:xfrm>
+            <a:off x="7533640" y="4202600"/>
+            <a:ext cx="513102" cy="140000"/>
+          </a:xfrm>
+          <a:prstGeom prst="rect">
+            <a:avLst/>
+          </a:prstGeom>
+          <a:solidFill>
+            <a:srgbClr val="2A78D6"/>
+          </a:solidFill>
+          <a:ln/>
+        </p:spPr>
+        <p:txBody>
+          <a:bodyPr/>
+          <a:lstStyle/>
+          <a:p/>
+        </p:txBody>
+      </p:sp>
+      <p:sp>
+        <p:nvSpPr>
+          <p:cNvPr id="89" name="gv-89"/>
+          <p:cNvSpPr txBox="1"/>
+          <p:nvPr/>
+        </p:nvSpPr>
+        <p:spPr>
+          <a:xfrm>
+            <a:off x="8126742" y="4202600"/>
+            <a:ext cx="800000" cy="140000"/>
+          </a:xfrm>
+          <a:prstGeom prst="rect">
+            <a:avLst/>
+          </a:prstGeom>
+          <a:noFill/>
+          <a:ln/>
+        </p:spPr>
+        <p:txBody>
+          <a:bodyPr wrap="square" lIns="0" tIns="0" rIns="0" bIns="0" anchor="ctr"/>
+          <a:lstStyle/>
+          <a:p>
+            <a:pPr indent="0" marL="0" algn="l">
+              <a:buNone/>
+            </a:pPr>
+            <a:r>
+              <a:rPr lang="fr-FR" sz="1200" b="1" dirty="0">
+                <a:solidFill>
+                  <a:srgbClr val="353430"/>
+                </a:solidFill>
+              </a:rPr>
+              <a:t>163</a:t>
+            </a:r>
+          </a:p>
+        </p:txBody>
+      </p:sp>
+      <p:sp>
+        <p:nvSpPr>
+          <p:cNvPr id="90" name="gl-90"/>
+          <p:cNvSpPr txBox="1"/>
+          <p:nvPr/>
+        </p:nvSpPr>
+        <p:spPr>
+          <a:xfrm>
+            <a:off x="6263640" y="4386600"/>
+            <a:ext cx="1150000" cy="140000"/>
+          </a:xfrm>
+          <a:prstGeom prst="rect">
+            <a:avLst/>
+          </a:prstGeom>
+          <a:noFill/>
+          <a:ln/>
+        </p:spPr>
+        <p:txBody>
+          <a:bodyPr wrap="square" lIns="0" tIns="0" rIns="0" bIns="0" anchor="ctr"/>
+          <a:lstStyle/>
+          <a:p>
+            <a:pPr indent="0" marL="0" algn="r">
+              <a:buNone/>
+            </a:pPr>
+            <a:r>
+              <a:rPr lang="fr-FR" sz="1200" b="0" dirty="0">
+                <a:solidFill>
+                  <a:srgbClr val="1A1A1A"/>
+                </a:solidFill>
+              </a:rPr>
+              <a:t>Huile 1 L</a:t>
+            </a:r>
+          </a:p>
+        </p:txBody>
+      </p:sp>
+      <p:sp>
+        <p:nvSpPr>
+          <p:cNvPr id="91" name="bar-91"/>
+          <p:cNvSpPr/>
+          <p:nvPr/>
+        </p:nvSpPr>
+        <p:spPr>
+          <a:xfrm>
+            <a:off x="7533640" y="4386600"/>
+            <a:ext cx="420756" cy="140000"/>
+          </a:xfrm>
+          <a:prstGeom prst="rect">
+            <a:avLst/>
+          </a:prstGeom>
+          <a:solidFill>
+            <a:srgbClr val="2A78D6"/>
+          </a:solidFill>
+          <a:ln/>
+        </p:spPr>
+        <p:txBody>
+          <a:bodyPr/>
+          <a:lstStyle/>
+          <a:p/>
+        </p:txBody>
+      </p:sp>
+      <p:sp>
+        <p:nvSpPr>
+          <p:cNvPr id="92" name="gv-92"/>
+          <p:cNvSpPr txBox="1"/>
+          <p:nvPr/>
+        </p:nvSpPr>
+        <p:spPr>
+          <a:xfrm>
+            <a:off x="8034396" y="4386600"/>
+            <a:ext cx="800000" cy="140000"/>
+          </a:xfrm>
+          <a:prstGeom prst="rect">
+            <a:avLst/>
+          </a:prstGeom>
+          <a:noFill/>
+          <a:ln/>
+        </p:spPr>
+        <p:txBody>
+          <a:bodyPr wrap="square" lIns="0" tIns="0" rIns="0" bIns="0" anchor="ctr"/>
+          <a:lstStyle/>
+          <a:p>
+            <a:pPr indent="0" marL="0" algn="l">
+              <a:buNone/>
+            </a:pPr>
+            <a:r>
+              <a:rPr lang="fr-FR" sz="1200" b="1" dirty="0">
+                <a:solidFill>
+                  <a:srgbClr val="353430"/>
+                </a:solidFill>
+              </a:rPr>
+              <a:t>134</a:t>
+            </a:r>
+          </a:p>
+        </p:txBody>
+      </p:sp>
+      <p:sp>
+        <p:nvSpPr>
+          <p:cNvPr id="93" name="gl-93"/>
+          <p:cNvSpPr txBox="1"/>
+          <p:nvPr/>
+        </p:nvSpPr>
+        <p:spPr>
+          <a:xfrm>
+            <a:off x="6263640" y="4570600"/>
+            <a:ext cx="1150000" cy="140000"/>
+          </a:xfrm>
+          <a:prstGeom prst="rect">
+            <a:avLst/>
+          </a:prstGeom>
+          <a:noFill/>
+          <a:ln/>
+        </p:spPr>
+        <p:txBody>
+          <a:bodyPr wrap="square" lIns="0" tIns="0" rIns="0" bIns="0" anchor="ctr"/>
+          <a:lstStyle/>
+          <a:p>
+            <a:pPr indent="0" marL="0" algn="r">
+              <a:buNone/>
+            </a:pPr>
+            <a:r>
+              <a:rPr lang="fr-FR" sz="1200" b="0" dirty="0">
+                <a:solidFill>
+                  <a:srgbClr val="1A1A1A"/>
+                </a:solidFill>
+              </a:rPr>
+              <a:t>Lessive</a:t>
+            </a:r>
+          </a:p>
+        </p:txBody>
+      </p:sp>
+      <p:sp>
+        <p:nvSpPr>
+          <p:cNvPr id="94" name="bar-94"/>
+          <p:cNvSpPr/>
+          <p:nvPr/>
+        </p:nvSpPr>
+        <p:spPr>
+          <a:xfrm>
+            <a:off x="7533640" y="4570600"/>
+            <a:ext cx="416974" cy="140000"/>
+          </a:xfrm>
+          <a:prstGeom prst="rect">
+            <a:avLst/>
+          </a:prstGeom>
+          <a:solidFill>
+            <a:srgbClr val="2A78D6"/>
+          </a:solidFill>
+          <a:ln/>
+        </p:spPr>
+        <p:txBody>
+          <a:bodyPr/>
+          <a:lstStyle/>
+          <a:p/>
+        </p:txBody>
+      </p:sp>
+      <p:sp>
+        <p:nvSpPr>
+          <p:cNvPr id="95" name="gv-95"/>
+          <p:cNvSpPr txBox="1"/>
+          <p:nvPr/>
+        </p:nvSpPr>
+        <p:spPr>
+          <a:xfrm>
+            <a:off x="8030614" y="4570600"/>
+            <a:ext cx="800000" cy="140000"/>
+          </a:xfrm>
+          <a:prstGeom prst="rect">
+            <a:avLst/>
+          </a:prstGeom>
+          <a:noFill/>
+          <a:ln/>
+        </p:spPr>
+        <p:txBody>
+          <a:bodyPr wrap="square" lIns="0" tIns="0" rIns="0" bIns="0" anchor="ctr"/>
+          <a:lstStyle/>
+          <a:p>
+            <a:pPr indent="0" marL="0" algn="l">
+              <a:buNone/>
+            </a:pPr>
+            <a:r>
+              <a:rPr lang="fr-FR" sz="1200" b="1" dirty="0">
+                <a:solidFill>
+                  <a:srgbClr val="353430"/>
+                </a:solidFill>
+              </a:rPr>
+              <a:t>132</a:t>
+            </a:r>
+          </a:p>
+        </p:txBody>
+      </p:sp>
       <p:sp>
         <p:nvSpPr>
           <p:cNvPr id="13" name="Text 9"/>
@@ -6764,14 +8987,14 @@
               <a:buNone/>
             </a:pPr>
             <a:r>
-              <a:rPr lang="en-US" sz="1300" i="1" dirty="0">
-                <a:solidFill>
-                  <a:srgbClr val="52514E"/>
-                </a:solidFill>
-              </a:rPr>
-              <a:t>Le panier moyen est d'une stabilité remarquable : les huit villes tiennent dans un intervalle de 0,7 %.</a:t>
-            </a:r>
-            <a:endParaRPr lang="en-US" sz="1300" dirty="0"/>
+              <a:rPr lang="en-US" sz="1400" i="1" dirty="0">
+                <a:solidFill>
+                  <a:srgbClr val="353430"/>
+                </a:solidFill>
+              </a:rPr>
+              <a:t>Le panier moyen est d'une stabilité remarquable : les huit villes tiennent dans un intervalle de 0,7 %. En bleu foncé, les quatre produits d'électronique — ils occupent tout le haut du classement.</a:t>
+            </a:r>
+            <a:endParaRPr lang="en-US" sz="1400" dirty="0"/>
           </a:p>
         </p:txBody>
       </p:sp>
@@ -6803,9 +9026,9 @@
           <a:bodyPr/>
           <a:lstStyle>
             <a:lvl1pPr>
-              <a:defRPr sz="1000">
-                <a:solidFill>
-                  <a:srgbClr val="52514E"/>
+              <a:defRPr sz="1200">
+                <a:solidFill>
+                  <a:srgbClr val="353430"/>
                 </a:solidFill>
               </a:defRPr>
             </a:lvl1pPr>
@@ -6825,6 +9048,9 @@
   <p:clrMapOvr>
     <a:masterClrMapping/>
   </p:clrMapOvr>
+  <p:transition spd="med" advClick="1">
+    <p:fade/>
+  </p:transition>
 </p:sld>
 </file>
 
@@ -6911,14 +9137,14 @@
               <a:buNone/>
             </a:pPr>
             <a:r>
-              <a:rPr lang="en-US" sz="1400" dirty="0">
-                <a:solidFill>
-                  <a:srgbClr val="52514E"/>
+              <a:rPr lang="en-US" sz="1500" dirty="0">
+                <a:solidFill>
+                  <a:srgbClr val="353430"/>
                 </a:solidFill>
               </a:rPr>
               <a:t>Le jeu est synthétique. Nous avons lu le code du générateur, et trois de ses propriétés invalident des conclusions tentantes.</a:t>
             </a:r>
-            <a:endParaRPr lang="en-US" sz="1400" dirty="0"/>
+            <a:endParaRPr lang="en-US" sz="1500" dirty="0"/>
           </a:p>
         </p:txBody>
       </p:sp>
@@ -6999,14 +9225,14 @@
               <a:buNone/>
             </a:pPr>
             <a:r>
-              <a:rPr lang="en-US" sz="1500" b="1" dirty="0">
+              <a:rPr lang="en-US" sz="1600" b="1" dirty="0">
                 <a:solidFill>
                   <a:srgbClr val="FFFFFF"/>
                 </a:solidFill>
               </a:rPr>
               <a:t>!</a:t>
             </a:r>
-            <a:endParaRPr lang="en-US" sz="1500" dirty="0"/>
+            <a:endParaRPr lang="en-US" sz="1600" dirty="0"/>
           </a:p>
         </p:txBody>
       </p:sp>
@@ -7035,14 +9261,14 @@
               <a:buNone/>
             </a:pPr>
             <a:r>
-              <a:rPr lang="en-US" sz="1450" b="1" dirty="0">
+              <a:rPr lang="en-US" sz="1550" b="1" dirty="0">
                 <a:solidFill>
                   <a:srgbClr val="1E2761"/>
                 </a:solidFill>
               </a:rPr>
               <a:t>Le Top 10 mesure les prix, pas la demande</a:t>
             </a:r>
-            <a:endParaRPr lang="en-US" sz="1450" dirty="0"/>
+            <a:endParaRPr lang="en-US" sz="1550" dirty="0"/>
           </a:p>
         </p:txBody>
       </p:sp>
@@ -7074,14 +9300,14 @@
               <a:buNone/>
             </a:pPr>
             <a:r>
-              <a:rPr lang="en-US" sz="1250" dirty="0">
+              <a:rPr lang="en-US" sz="1400" dirty="0">
                 <a:solidFill>
                   <a:srgbClr val="1A1A1A"/>
                 </a:solidFill>
               </a:rPr>
               <a:t>Les 21 produits sont tirés uniformément : leurs quantités vendues tiennent dans 1,7 %. Si l'Électronique domine, c'est qu'un Powerbank coûte 12 000 FCFA et un stylo 250.</a:t>
             </a:r>
-            <a:endParaRPr lang="en-US" sz="1250" dirty="0"/>
+            <a:endParaRPr lang="en-US" sz="1400" dirty="0"/>
           </a:p>
         </p:txBody>
       </p:sp>
@@ -7162,14 +9388,14 @@
               <a:buNone/>
             </a:pPr>
             <a:r>
-              <a:rPr lang="en-US" sz="1500" b="1" dirty="0">
+              <a:rPr lang="en-US" sz="1600" b="1" dirty="0">
                 <a:solidFill>
                   <a:srgbClr val="FFFFFF"/>
                 </a:solidFill>
               </a:rPr>
               <a:t>!</a:t>
             </a:r>
-            <a:endParaRPr lang="en-US" sz="1500" dirty="0"/>
+            <a:endParaRPr lang="en-US" sz="1600" dirty="0"/>
           </a:p>
         </p:txBody>
       </p:sp>
@@ -7198,14 +9424,14 @@
               <a:buNone/>
             </a:pPr>
             <a:r>
-              <a:rPr lang="en-US" sz="1450" b="1" dirty="0">
+              <a:rPr lang="en-US" sz="1550" b="1" dirty="0">
                 <a:solidFill>
                   <a:srgbClr val="1E2761"/>
                 </a:solidFill>
               </a:rPr>
               <a:t>Les promotions ne peuvent pas faire vendre plus</a:t>
             </a:r>
-            <a:endParaRPr lang="en-US" sz="1450" dirty="0"/>
+            <a:endParaRPr lang="en-US" sz="1550" dirty="0"/>
           </a:p>
         </p:txBody>
       </p:sp>
@@ -7237,14 +9463,14 @@
               <a:buNone/>
             </a:pPr>
             <a:r>
-              <a:rPr lang="en-US" sz="1250" dirty="0">
+              <a:rPr lang="en-US" sz="1400" dirty="0">
                 <a:solidFill>
                   <a:srgbClr val="1A1A1A"/>
                 </a:solidFill>
               </a:rPr>
               <a:t>La quantité suit une loi de Poisson tirée indépendamment de la promotion. L'égalité mesurée — 3,201 contre 3,199, soit 0,06 % — vérifie le générateur, elle ne dit rien du commerce.</a:t>
             </a:r>
-            <a:endParaRPr lang="en-US" sz="1250" dirty="0"/>
+            <a:endParaRPr lang="en-US" sz="1400" dirty="0"/>
           </a:p>
         </p:txBody>
       </p:sp>
@@ -7325,14 +9551,14 @@
               <a:buNone/>
             </a:pPr>
             <a:r>
-              <a:rPr lang="en-US" sz="1500" b="1" dirty="0">
+              <a:rPr lang="en-US" sz="1600" b="1" dirty="0">
                 <a:solidFill>
                   <a:srgbClr val="FFFFFF"/>
                 </a:solidFill>
               </a:rPr>
               <a:t>!</a:t>
             </a:r>
-            <a:endParaRPr lang="en-US" sz="1500" dirty="0"/>
+            <a:endParaRPr lang="en-US" sz="1600" dirty="0"/>
           </a:p>
         </p:txBody>
       </p:sp>
@@ -7361,14 +9587,14 @@
               <a:buNone/>
             </a:pPr>
             <a:r>
-              <a:rPr lang="en-US" sz="1450" b="1" dirty="0">
+              <a:rPr lang="en-US" sz="1550" b="1" dirty="0">
                 <a:solidFill>
                   <a:srgbClr val="1E2761"/>
                 </a:solidFill>
               </a:rPr>
               <a:t>Il n'y a aucune saisonnalité</a:t>
             </a:r>
-            <a:endParaRPr lang="en-US" sz="1450" dirty="0"/>
+            <a:endParaRPr lang="en-US" sz="1550" dirty="0"/>
           </a:p>
         </p:txBody>
       </p:sp>
@@ -7400,14 +9626,14 @@
               <a:buNone/>
             </a:pPr>
             <a:r>
-              <a:rPr lang="en-US" sz="1250" dirty="0">
+              <a:rPr lang="en-US" sz="1400" dirty="0">
                 <a:solidFill>
                   <a:srgbClr val="1A1A1A"/>
                 </a:solidFill>
               </a:rPr>
               <a:t>Les 12 % d'écart entre mois tombent à 3,9 % une fois ramenés au jour calendaire, et la dispersion résiduelle (0,79 %) est au niveau du bruit de Poisson attendu (0,69 %).</a:t>
             </a:r>
-            <a:endParaRPr lang="en-US" sz="1250" dirty="0"/>
+            <a:endParaRPr lang="en-US" sz="1400" dirty="0"/>
           </a:p>
         </p:txBody>
       </p:sp>
@@ -7436,14 +9662,14 @@
               <a:buNone/>
             </a:pPr>
             <a:r>
-              <a:rPr lang="en-US" sz="1250" i="1" dirty="0">
-                <a:solidFill>
-                  <a:srgbClr val="52514E"/>
+              <a:rPr lang="en-US" sz="1400" i="1" dirty="0">
+                <a:solidFill>
+                  <a:srgbClr val="353430"/>
                 </a:solidFill>
               </a:rPr>
               <a:t>Ces trois points viennent de la lecture du générateur fourni, pas d'une intuition.</a:t>
             </a:r>
-            <a:endParaRPr lang="en-US" sz="1250" dirty="0"/>
+            <a:endParaRPr lang="en-US" sz="1400" dirty="0"/>
           </a:p>
         </p:txBody>
       </p:sp>
@@ -7475,9 +9701,9 @@
           <a:bodyPr/>
           <a:lstStyle>
             <a:lvl1pPr>
-              <a:defRPr sz="1000">
-                <a:solidFill>
-                  <a:srgbClr val="52514E"/>
+              <a:defRPr sz="1200">
+                <a:solidFill>
+                  <a:srgbClr val="353430"/>
                 </a:solidFill>
               </a:defRPr>
             </a:lvl1pPr>
@@ -7497,6 +9723,9 @@
   <p:clrMapOvr>
     <a:masterClrMapping/>
   </p:clrMapOvr>
+  <p:transition spd="med" advClick="1">
+    <p:fade/>
+  </p:transition>
 </p:sld>
 </file>
 
@@ -7552,7 +9781,7 @@
                 <a:ea typeface="Cambria" pitchFamily="34" charset="-122"/>
                 <a:cs typeface="Cambria" pitchFamily="34" charset="-120"/>
               </a:rPr>
-              <a:t>Trois moteurs, les mêmes nombres</a:t>
+              <a:t>Quatre chemins, les mêmes nombres</a:t>
             </a:r>
             <a:endParaRPr lang="en-US" sz="2800" dirty="0"/>
           </a:p>
@@ -7583,14 +9812,14 @@
               <a:buNone/>
             </a:pPr>
             <a:r>
-              <a:rPr lang="en-US" sz="1400" dirty="0">
-                <a:solidFill>
-                  <a:srgbClr val="52514E"/>
+              <a:rPr lang="en-US" sz="1500" dirty="0">
+                <a:solidFill>
+                  <a:srgbClr val="353430"/>
                 </a:solidFill>
               </a:rPr>
               <a:t>La consigne impose que toute valeur soit contrôlée par rapport à une autre technologie.</a:t>
             </a:r>
-            <a:endParaRPr lang="en-US" sz="1400" dirty="0"/>
+            <a:endParaRPr lang="en-US" sz="1500" dirty="0"/>
           </a:p>
         </p:txBody>
       </p:sp>
@@ -7611,11 +9840,11 @@
             </a:avLst>
           </a:prstGeom>
           <a:solidFill>
-            <a:srgbClr val="F2F5FC"/>
+            <a:srgbClr val="FFFFFF"/>
           </a:solidFill>
           <a:ln w="12700">
             <a:solidFill>
-              <a:srgbClr val="F2F5FC"/>
+              <a:srgbClr val="FFFFFF"/>
             </a:solidFill>
             <a:prstDash val="solid"/>
           </a:ln>
@@ -7682,7 +9911,7 @@
               <a:buNone/>
             </a:pPr>
             <a:r>
-              <a:rPr lang="en-US" sz="1150" dirty="0">
+              <a:rPr lang="en-US" sz="1250" dirty="0">
                 <a:solidFill>
                   <a:srgbClr val="1A1A1A"/>
                 </a:solidFill>
@@ -7692,7 +9921,7 @@
               </a:rPr>
               <a:t>HiveQL sur le cluster</a:t>
             </a:r>
-            <a:endParaRPr lang="en-US" sz="1150" dirty="0"/>
+            <a:endParaRPr lang="en-US" sz="1250" dirty="0"/>
           </a:p>
         </p:txBody>
       </p:sp>
@@ -7721,14 +9950,14 @@
               <a:buNone/>
             </a:pPr>
             <a:r>
-              <a:rPr lang="en-US" sz="1200" i="1" dirty="0">
-                <a:solidFill>
-                  <a:srgbClr val="52514E"/>
+              <a:rPr lang="en-US" sz="1350" i="1" dirty="0">
+                <a:solidFill>
+                  <a:srgbClr val="353430"/>
                 </a:solidFill>
               </a:rPr>
               <a:t>le livrable</a:t>
             </a:r>
-            <a:endParaRPr lang="en-US" sz="1200" dirty="0"/>
+            <a:endParaRPr lang="en-US" sz="1350" dirty="0"/>
           </a:p>
         </p:txBody>
       </p:sp>
@@ -7749,11 +9978,11 @@
             </a:avLst>
           </a:prstGeom>
           <a:solidFill>
-            <a:srgbClr val="F2F5FC"/>
+            <a:srgbClr val="FFFFFF"/>
           </a:solidFill>
           <a:ln w="12700">
             <a:solidFill>
-              <a:srgbClr val="F2F5FC"/>
+              <a:srgbClr val="FFFFFF"/>
             </a:solidFill>
             <a:prstDash val="solid"/>
           </a:ln>
@@ -7820,7 +10049,7 @@
               <a:buNone/>
             </a:pPr>
             <a:r>
-              <a:rPr lang="en-US" sz="1150" dirty="0">
+              <a:rPr lang="en-US" sz="1250" dirty="0">
                 <a:solidFill>
                   <a:srgbClr val="1A1A1A"/>
                 </a:solidFill>
@@ -7830,7 +10059,7 @@
               </a:rPr>
               <a:t>mêmes requêtes sur le CSV brut</a:t>
             </a:r>
-            <a:endParaRPr lang="en-US" sz="1150" dirty="0"/>
+            <a:endParaRPr lang="en-US" sz="1250" dirty="0"/>
           </a:p>
         </p:txBody>
       </p:sp>
@@ -7859,14 +10088,14 @@
               <a:buNone/>
             </a:pPr>
             <a:r>
-              <a:rPr lang="en-US" sz="1200" i="1" dirty="0">
-                <a:solidFill>
-                  <a:srgbClr val="52514E"/>
+              <a:rPr lang="en-US" sz="1350" i="1" dirty="0">
+                <a:solidFill>
+                  <a:srgbClr val="353430"/>
                 </a:solidFill>
               </a:rPr>
               <a:t>les résultats attendus</a:t>
             </a:r>
-            <a:endParaRPr lang="en-US" sz="1200" dirty="0"/>
+            <a:endParaRPr lang="en-US" sz="1350" dirty="0"/>
           </a:p>
         </p:txBody>
       </p:sp>
@@ -7887,11 +10116,11 @@
             </a:avLst>
           </a:prstGeom>
           <a:solidFill>
-            <a:srgbClr val="F2F5FC"/>
+            <a:srgbClr val="FFFFFF"/>
           </a:solidFill>
           <a:ln w="12700">
             <a:solidFill>
-              <a:srgbClr val="F2F5FC"/>
+              <a:srgbClr val="FFFFFF"/>
             </a:solidFill>
             <a:prstDash val="solid"/>
           </a:ln>
@@ -7958,7 +10187,7 @@
               <a:buNone/>
             </a:pPr>
             <a:r>
-              <a:rPr lang="en-US" sz="1150" dirty="0">
+              <a:rPr lang="en-US" sz="1250" dirty="0">
                 <a:solidFill>
                   <a:srgbClr val="1A1A1A"/>
                 </a:solidFill>
@@ -7966,9 +10195,9 @@
                 <a:ea typeface="Courier New" pitchFamily="34" charset="-122"/>
                 <a:cs typeface="Courier New" pitchFamily="34" charset="-120"/>
               </a:rPr>
-              <a:t>mapper.py | sort | reducer.py</a:t>
-            </a:r>
-            <a:endParaRPr lang="en-US" sz="1150" dirty="0"/>
+              <a:t>le nôtre, et celui du Groupe 5 sous YARN</a:t>
+            </a:r>
+            <a:endParaRPr lang="en-US" sz="1250" dirty="0"/>
           </a:p>
         </p:txBody>
       </p:sp>
@@ -7997,14 +10226,14 @@
               <a:buNone/>
             </a:pPr>
             <a:r>
-              <a:rPr lang="en-US" sz="1200" i="1" dirty="0">
-                <a:solidFill>
-                  <a:srgbClr val="52514E"/>
+              <a:rPr lang="en-US" sz="1350" i="1" dirty="0">
+                <a:solidFill>
+                  <a:srgbClr val="353430"/>
                 </a:solidFill>
               </a:rPr>
               <a:t>la référence Map/Reduce</a:t>
             </a:r>
-            <a:endParaRPr lang="en-US" sz="1200" dirty="0"/>
+            <a:endParaRPr lang="en-US" sz="1350" dirty="0"/>
           </a:p>
         </p:txBody>
       </p:sp>
@@ -8060,14 +10289,14 @@
               <a:buNone/>
             </a:pPr>
             <a:r>
-              <a:rPr lang="en-US" sz="1350" dirty="0">
+              <a:rPr lang="en-US" sz="1450" dirty="0">
                 <a:solidFill>
                   <a:srgbClr val="1A1A1A"/>
                 </a:solidFill>
               </a:rPr>
               <a:t>Hive contre DuckDB</a:t>
             </a:r>
-            <a:endParaRPr lang="en-US" sz="1350" dirty="0"/>
+            <a:endParaRPr lang="en-US" sz="1450" dirty="0"/>
           </a:p>
         </p:txBody>
       </p:sp>
@@ -8096,14 +10325,14 @@
               <a:buNone/>
             </a:pPr>
             <a:r>
-              <a:rPr lang="en-US" sz="1500" b="1" dirty="0">
+              <a:rPr lang="en-US" sz="1600" b="1" dirty="0">
                 <a:solidFill>
                   <a:srgbClr val="1BAF7A"/>
                 </a:solidFill>
               </a:rPr>
               <a:t>17 / 17</a:t>
             </a:r>
-            <a:endParaRPr lang="en-US" sz="1500" dirty="0"/>
+            <a:endParaRPr lang="en-US" sz="1600" dirty="0"/>
           </a:p>
         </p:txBody>
       </p:sp>
@@ -8132,14 +10361,14 @@
               <a:buNone/>
             </a:pPr>
             <a:r>
-              <a:rPr lang="en-US" sz="1250" dirty="0">
-                <a:solidFill>
-                  <a:srgbClr val="52514E"/>
+              <a:rPr lang="en-US" sz="1400" dirty="0">
+                <a:solidFill>
+                  <a:srgbClr val="353430"/>
                 </a:solidFill>
               </a:rPr>
               <a:t>écart maximal : 0</a:t>
             </a:r>
-            <a:endParaRPr lang="en-US" sz="1250" dirty="0"/>
+            <a:endParaRPr lang="en-US" sz="1400" dirty="0"/>
           </a:p>
         </p:txBody>
       </p:sp>
@@ -8195,14 +10424,14 @@
               <a:buNone/>
             </a:pPr>
             <a:r>
-              <a:rPr lang="en-US" sz="1350" dirty="0">
+              <a:rPr lang="en-US" sz="1450" dirty="0">
                 <a:solidFill>
                   <a:srgbClr val="1A1A1A"/>
                 </a:solidFill>
               </a:rPr>
               <a:t>Hive contre MapReduce</a:t>
             </a:r>
-            <a:endParaRPr lang="en-US" sz="1350" dirty="0"/>
+            <a:endParaRPr lang="en-US" sz="1450" dirty="0"/>
           </a:p>
         </p:txBody>
       </p:sp>
@@ -8231,14 +10460,14 @@
               <a:buNone/>
             </a:pPr>
             <a:r>
-              <a:rPr lang="en-US" sz="1500" b="1" dirty="0">
+              <a:rPr lang="en-US" sz="1600" b="1" dirty="0">
                 <a:solidFill>
                   <a:srgbClr val="1BAF7A"/>
                 </a:solidFill>
               </a:rPr>
               <a:t>5 / 5</a:t>
             </a:r>
-            <a:endParaRPr lang="en-US" sz="1500" dirty="0"/>
+            <a:endParaRPr lang="en-US" sz="1600" dirty="0"/>
           </a:p>
         </p:txBody>
       </p:sp>
@@ -8267,14 +10496,14 @@
               <a:buNone/>
             </a:pPr>
             <a:r>
-              <a:rPr lang="en-US" sz="1250" dirty="0">
-                <a:solidFill>
-                  <a:srgbClr val="52514E"/>
+              <a:rPr lang="en-US" sz="1400" dirty="0">
+                <a:solidFill>
+                  <a:srgbClr val="353430"/>
                 </a:solidFill>
               </a:rPr>
               <a:t>écart maximal : 0</a:t>
             </a:r>
-            <a:endParaRPr lang="en-US" sz="1250" dirty="0"/>
+            <a:endParaRPr lang="en-US" sz="1400" dirty="0"/>
           </a:p>
         </p:txBody>
       </p:sp>
@@ -8330,14 +10559,14 @@
               <a:buNone/>
             </a:pPr>
             <a:r>
-              <a:rPr lang="en-US" sz="1350" dirty="0">
+              <a:rPr lang="en-US" sz="1450" dirty="0">
                 <a:solidFill>
                   <a:srgbClr val="1A1A1A"/>
                 </a:solidFill>
               </a:rPr>
-              <a:t>MapReduce contre DuckDB</a:t>
-            </a:r>
-            <a:endParaRPr lang="en-US" sz="1350" dirty="0"/>
+              <a:t>Hive contre le Groupe 5</a:t>
+            </a:r>
+            <a:endParaRPr lang="en-US" sz="1450" dirty="0"/>
           </a:p>
         </p:txBody>
       </p:sp>
@@ -8366,14 +10595,14 @@
               <a:buNone/>
             </a:pPr>
             <a:r>
-              <a:rPr lang="en-US" sz="1500" b="1" dirty="0">
+              <a:rPr lang="en-US" sz="1600" b="1" dirty="0">
                 <a:solidFill>
                   <a:srgbClr val="1BAF7A"/>
                 </a:solidFill>
               </a:rPr>
-              <a:t>5 / 5</a:t>
-            </a:r>
-            <a:endParaRPr lang="en-US" sz="1500" dirty="0"/>
+              <a:t>15 / 15</a:t>
+            </a:r>
+            <a:endParaRPr lang="en-US" sz="1600" dirty="0"/>
           </a:p>
         </p:txBody>
       </p:sp>
@@ -8402,14 +10631,14 @@
               <a:buNone/>
             </a:pPr>
             <a:r>
-              <a:rPr lang="en-US" sz="1250" dirty="0">
-                <a:solidFill>
-                  <a:srgbClr val="52514E"/>
+              <a:rPr lang="en-US" sz="1400" dirty="0">
+                <a:solidFill>
+                  <a:srgbClr val="353430"/>
                 </a:solidFill>
               </a:rPr>
               <a:t>écart maximal : 0</a:t>
             </a:r>
-            <a:endParaRPr lang="en-US" sz="1250" dirty="0"/>
+            <a:endParaRPr lang="en-US" sz="1400" dirty="0"/>
           </a:p>
         </p:txBody>
       </p:sp>
@@ -8438,14 +10667,14 @@
               <a:buNone/>
             </a:pPr>
             <a:r>
-              <a:rPr lang="en-US" sz="1300" i="1" dirty="0">
-                <a:solidFill>
-                  <a:srgbClr val="52514E"/>
-                </a:solidFill>
-              </a:rPr>
-              <a:t>Vingt-sept comparaisons de fichiers, écart rigoureusement nul — et non simplement inférieur à la tolérance.</a:t>
-            </a:r>
-            <a:endParaRPr lang="en-US" sz="1300" dirty="0"/>
+              <a:rPr lang="en-US" sz="1400" i="1" dirty="0">
+                <a:solidFill>
+                  <a:srgbClr val="353430"/>
+                </a:solidFill>
+              </a:rPr>
+              <a:t>Trente-sept comparaisons ci-dessus, et cinq de plus entre nos deux références internes : quarante-deux fichiers, écart rigoureusement nul.</a:t>
+            </a:r>
+            <a:endParaRPr lang="en-US" sz="1400" dirty="0"/>
           </a:p>
         </p:txBody>
       </p:sp>
@@ -8477,9 +10706,9 @@
           <a:bodyPr/>
           <a:lstStyle>
             <a:lvl1pPr>
-              <a:defRPr sz="1000">
-                <a:solidFill>
-                  <a:srgbClr val="52514E"/>
+              <a:defRPr sz="1200">
+                <a:solidFill>
+                  <a:srgbClr val="353430"/>
                 </a:solidFill>
               </a:defRPr>
             </a:lvl1pPr>
@@ -8499,6 +10728,9 @@
   <p:clrMapOvr>
     <a:masterClrMapping/>
   </p:clrMapOvr>
+  <p:transition spd="med" advClick="1">
+    <p:fade/>
+  </p:transition>
 </p:sld>
 </file>
 
@@ -8577,11 +10809,11 @@
             </a:avLst>
           </a:prstGeom>
           <a:solidFill>
-            <a:srgbClr val="F2F5FC"/>
+            <a:srgbClr val="FFFFFF"/>
           </a:solidFill>
           <a:ln w="12700">
             <a:solidFill>
-              <a:srgbClr val="F2F5FC"/>
+              <a:srgbClr val="FFFFFF"/>
             </a:solidFill>
             <a:prstDash val="solid"/>
           </a:ln>
@@ -8612,14 +10844,14 @@
               <a:buNone/>
             </a:pPr>
             <a:r>
-              <a:rPr lang="en-US" sz="1450" b="1" dirty="0">
+              <a:rPr lang="en-US" sz="1550" b="1" dirty="0">
                 <a:solidFill>
                   <a:srgbClr val="1E2761"/>
                 </a:solidFill>
               </a:rPr>
               <a:t>4 tables de données</a:t>
             </a:r>
-            <a:endParaRPr lang="en-US" sz="1450" dirty="0"/>
+            <a:endParaRPr lang="en-US" sz="1550" dirty="0"/>
           </a:p>
         </p:txBody>
       </p:sp>
@@ -8648,9 +10880,9 @@
               <a:buNone/>
             </a:pPr>
             <a:r>
-              <a:rPr lang="en-US" sz="1150" dirty="0">
-                <a:solidFill>
-                  <a:srgbClr val="52514E"/>
+              <a:rPr lang="en-US" sz="1250" dirty="0">
+                <a:solidFill>
+                  <a:srgbClr val="353430"/>
                 </a:solidFill>
                 <a:latin typeface="Courier New" pitchFamily="34" charset="0"/>
                 <a:ea typeface="Courier New" pitchFamily="34" charset="-122"/>
@@ -8658,7 +10890,7 @@
               </a:rPr>
               <a:t>transactions, _small, _big, _part</a:t>
             </a:r>
-            <a:endParaRPr lang="en-US" sz="1150" dirty="0"/>
+            <a:endParaRPr lang="en-US" sz="1250" dirty="0"/>
           </a:p>
         </p:txBody>
       </p:sp>
@@ -8679,11 +10911,11 @@
             </a:avLst>
           </a:prstGeom>
           <a:solidFill>
-            <a:srgbClr val="F2F5FC"/>
+            <a:srgbClr val="FFFFFF"/>
           </a:solidFill>
           <a:ln w="12700">
             <a:solidFill>
-              <a:srgbClr val="F2F5FC"/>
+              <a:srgbClr val="FFFFFF"/>
             </a:solidFill>
             <a:prstDash val="solid"/>
           </a:ln>
@@ -8714,14 +10946,14 @@
               <a:buNone/>
             </a:pPr>
             <a:r>
-              <a:rPr lang="en-US" sz="1450" b="1" dirty="0">
+              <a:rPr lang="en-US" sz="1550" b="1" dirty="0">
                 <a:solidFill>
                   <a:srgbClr val="1E2761"/>
                 </a:solidFill>
               </a:rPr>
               <a:t>12 tables de résultats</a:t>
             </a:r>
-            <a:endParaRPr lang="en-US" sz="1450" dirty="0"/>
+            <a:endParaRPr lang="en-US" sz="1550" dirty="0"/>
           </a:p>
         </p:txBody>
       </p:sp>
@@ -8750,9 +10982,9 @@
               <a:buNone/>
             </a:pPr>
             <a:r>
-              <a:rPr lang="en-US" sz="1150" dirty="0">
-                <a:solidFill>
-                  <a:srgbClr val="52514E"/>
+              <a:rPr lang="en-US" sz="1250" dirty="0">
+                <a:solidFill>
+                  <a:srgbClr val="353430"/>
                 </a:solidFill>
                 <a:latin typeface="Courier New" pitchFamily="34" charset="0"/>
                 <a:ea typeface="Courier New" pitchFamily="34" charset="-122"/>
@@ -8760,7 +10992,7 @@
               </a:rPr>
               <a:t>res_q1a_ca_mensuel ... res_q7_*</a:t>
             </a:r>
-            <a:endParaRPr lang="en-US" sz="1150" dirty="0"/>
+            <a:endParaRPr lang="en-US" sz="1250" dirty="0"/>
           </a:p>
         </p:txBody>
       </p:sp>
@@ -8781,11 +11013,11 @@
             </a:avLst>
           </a:prstGeom>
           <a:solidFill>
-            <a:srgbClr val="F2F5FC"/>
+            <a:srgbClr val="FFFFFF"/>
           </a:solidFill>
           <a:ln w="12700">
             <a:solidFill>
-              <a:srgbClr val="F2F5FC"/>
+              <a:srgbClr val="FFFFFF"/>
             </a:solidFill>
             <a:prstDash val="solid"/>
           </a:ln>
@@ -8816,14 +11048,14 @@
               <a:buNone/>
             </a:pPr>
             <a:r>
-              <a:rPr lang="en-US" sz="1450" b="1" dirty="0">
+              <a:rPr lang="en-US" sz="1550" b="1" dirty="0">
                 <a:solidFill>
                   <a:srgbClr val="1E2761"/>
                 </a:solidFill>
               </a:rPr>
               <a:t>12 fichiers CSV</a:t>
             </a:r>
-            <a:endParaRPr lang="en-US" sz="1450" dirty="0"/>
+            <a:endParaRPr lang="en-US" sz="1550" dirty="0"/>
           </a:p>
         </p:txBody>
       </p:sp>
@@ -8852,9 +11084,9 @@
               <a:buNone/>
             </a:pPr>
             <a:r>
-              <a:rPr lang="en-US" sz="1150" dirty="0">
-                <a:solidFill>
-                  <a:srgbClr val="52514E"/>
+              <a:rPr lang="en-US" sz="1250" dirty="0">
+                <a:solidFill>
+                  <a:srgbClr val="353430"/>
                 </a:solidFill>
                 <a:latin typeface="Courier New" pitchFamily="34" charset="0"/>
                 <a:ea typeface="Courier New" pitchFamily="34" charset="-122"/>
@@ -8862,7 +11094,7 @@
               </a:rPr>
               <a:t>/datalake/results/hive/</a:t>
             </a:r>
-            <a:endParaRPr lang="en-US" sz="1150" dirty="0"/>
+            <a:endParaRPr lang="en-US" sz="1250" dirty="0"/>
           </a:p>
         </p:txBody>
       </p:sp>
@@ -8883,11 +11115,11 @@
             </a:avLst>
           </a:prstGeom>
           <a:solidFill>
-            <a:srgbClr val="F2F5FC"/>
+            <a:srgbClr val="FFFFFF"/>
           </a:solidFill>
           <a:ln w="12700">
             <a:solidFill>
-              <a:srgbClr val="F2F5FC"/>
+              <a:srgbClr val="FFFFFF"/>
             </a:solidFill>
             <a:prstDash val="solid"/>
           </a:ln>
@@ -8918,14 +11150,14 @@
               <a:buNone/>
             </a:pPr>
             <a:r>
-              <a:rPr lang="en-US" sz="1450" b="1" dirty="0">
+              <a:rPr lang="en-US" sz="1550" b="1" dirty="0">
                 <a:solidFill>
                   <a:srgbClr val="1E2761"/>
                 </a:solidFill>
               </a:rPr>
               <a:t>1 dictionnaire</a:t>
             </a:r>
-            <a:endParaRPr lang="en-US" sz="1450" dirty="0"/>
+            <a:endParaRPr lang="en-US" sz="1550" dirty="0"/>
           </a:p>
         </p:txBody>
       </p:sp>
@@ -8954,9 +11186,9 @@
               <a:buNone/>
             </a:pPr>
             <a:r>
-              <a:rPr lang="en-US" sz="1150" dirty="0">
-                <a:solidFill>
-                  <a:srgbClr val="52514E"/>
+              <a:rPr lang="en-US" sz="1250" dirty="0">
+                <a:solidFill>
+                  <a:srgbClr val="353430"/>
                 </a:solidFill>
                 <a:latin typeface="Courier New" pitchFamily="34" charset="0"/>
                 <a:ea typeface="Courier New" pitchFamily="34" charset="-122"/>
@@ -8964,7 +11196,7 @@
               </a:rPr>
               <a:t>colonnes, types, conventions de calcul</a:t>
             </a:r>
-            <a:endParaRPr lang="en-US" sz="1150" dirty="0"/>
+            <a:endParaRPr lang="en-US" sz="1250" dirty="0"/>
           </a:p>
         </p:txBody>
       </p:sp>
@@ -8993,14 +11225,14 @@
               <a:buNone/>
             </a:pPr>
             <a:r>
-              <a:rPr lang="en-US" sz="1400" b="1" dirty="0">
+              <a:rPr lang="en-US" sz="1500" b="1" dirty="0">
                 <a:solidFill>
                   <a:srgbClr val="1E2761"/>
                 </a:solidFill>
               </a:rPr>
               <a:t>La source recommandée pour PySpark</a:t>
             </a:r>
-            <a:endParaRPr lang="en-US" sz="1400" dirty="0"/>
+            <a:endParaRPr lang="en-US" sz="1500" dirty="0"/>
           </a:p>
         </p:txBody>
       </p:sp>
@@ -9056,7 +11288,7 @@
               <a:buNone/>
             </a:pPr>
             <a:r>
-              <a:rPr lang="en-US" sz="1250" dirty="0">
+              <a:rPr lang="en-US" sz="1400" dirty="0">
                 <a:solidFill>
                   <a:srgbClr val="1A1A1A"/>
                 </a:solidFill>
@@ -9066,14 +11298,14 @@
               </a:rPr>
               <a:t>df = spark.table("datawarehouse.transactions_part")</a:t>
             </a:r>
-            <a:endParaRPr lang="en-US" sz="1250" dirty="0"/>
+            <a:endParaRPr lang="en-US" sz="1400" dirty="0"/>
           </a:p>
           <a:p>
             <a:pPr algn="l" indent="0" marL="0">
               <a:buNone/>
             </a:pPr>
             <a:r>
-              <a:rPr lang="en-US" sz="1250" dirty="0">
+              <a:rPr lang="en-US" sz="1400" dirty="0">
                 <a:solidFill>
                   <a:srgbClr val="1A1A1A"/>
                 </a:solidFill>
@@ -9083,7 +11315,7 @@
               </a:rPr>
               <a:t>mars = df.filter((df.annee == 2025) &amp; (df.mois == 3))   # une seule partition lue</a:t>
             </a:r>
-            <a:endParaRPr lang="en-US" sz="1250" dirty="0"/>
+            <a:endParaRPr lang="en-US" sz="1400" dirty="0"/>
           </a:p>
         </p:txBody>
       </p:sp>
@@ -9112,14 +11344,14 @@
               <a:buNone/>
             </a:pPr>
             <a:r>
-              <a:rPr lang="en-US" sz="1300" i="1" dirty="0">
-                <a:solidFill>
-                  <a:srgbClr val="52514E"/>
+              <a:rPr lang="en-US" sz="1400" i="1" dirty="0">
+                <a:solidFill>
+                  <a:srgbClr val="353430"/>
                 </a:solidFill>
               </a:rPr>
               <a:t>Le Groupe 7 hérite du partitionnement sans rien refaire : l'information est dans le nom des dossiers, et Spark sait la lire.</a:t>
             </a:r>
-            <a:endParaRPr lang="en-US" sz="1300" dirty="0"/>
+            <a:endParaRPr lang="en-US" sz="1400" dirty="0"/>
           </a:p>
         </p:txBody>
       </p:sp>
@@ -9151,9 +11383,9 @@
           <a:bodyPr/>
           <a:lstStyle>
             <a:lvl1pPr>
-              <a:defRPr sz="1000">
-                <a:solidFill>
-                  <a:srgbClr val="52514E"/>
+              <a:defRPr sz="1200">
+                <a:solidFill>
+                  <a:srgbClr val="353430"/>
                 </a:solidFill>
               </a:defRPr>
             </a:lvl1pPr>
@@ -9173,6 +11405,9 @@
   <p:clrMapOvr>
     <a:masterClrMapping/>
   </p:clrMapOvr>
+  <p:transition spd="med" advClick="1">
+    <p:fade/>
+  </p:transition>
 </p:sld>
 </file>
 
@@ -9311,14 +11546,14 @@
               <a:buNone/>
             </a:pPr>
             <a:r>
-              <a:rPr lang="en-US" sz="1300" b="1" dirty="0">
+              <a:rPr lang="en-US" sz="1400" b="1" dirty="0">
                 <a:solidFill>
                   <a:srgbClr val="FFFFFF"/>
                 </a:solidFill>
               </a:rPr>
               <a:t>1</a:t>
             </a:r>
-            <a:endParaRPr lang="en-US" sz="1300" dirty="0"/>
+            <a:endParaRPr lang="en-US" sz="1400" dirty="0"/>
           </a:p>
         </p:txBody>
       </p:sp>
@@ -9347,14 +11582,14 @@
               <a:buNone/>
             </a:pPr>
             <a:r>
-              <a:rPr lang="en-US" sz="1500" b="1" dirty="0">
+              <a:rPr lang="en-US" sz="1600" b="1" dirty="0">
                 <a:solidFill>
                   <a:srgbClr val="FFFFFF"/>
                 </a:solidFill>
               </a:rPr>
               <a:t>Le partitionnement ne vaut que s'il est exploité</a:t>
             </a:r>
-            <a:endParaRPr lang="en-US" sz="1500" dirty="0"/>
+            <a:endParaRPr lang="en-US" sz="1600" dirty="0"/>
           </a:p>
         </p:txBody>
       </p:sp>
@@ -9383,14 +11618,14 @@
               <a:buNone/>
             </a:pPr>
             <a:r>
-              <a:rPr lang="en-US" sz="1250" dirty="0">
+              <a:rPr lang="en-US" sz="1400" dirty="0">
                 <a:solidFill>
                   <a:srgbClr val="CADCFC"/>
                 </a:solidFill>
               </a:rPr>
               <a:t>Une requête qui balaie tout n'en tire aucun bénéfice. Nous l'avons mesuré plutôt que supposé.</a:t>
             </a:r>
-            <a:endParaRPr lang="en-US" sz="1250" dirty="0"/>
+            <a:endParaRPr lang="en-US" sz="1400" dirty="0"/>
           </a:p>
         </p:txBody>
       </p:sp>
@@ -9471,14 +11706,14 @@
               <a:buNone/>
             </a:pPr>
             <a:r>
-              <a:rPr lang="en-US" sz="1300" b="1" dirty="0">
+              <a:rPr lang="en-US" sz="1400" b="1" dirty="0">
                 <a:solidFill>
                   <a:srgbClr val="FFFFFF"/>
                 </a:solidFill>
               </a:rPr>
               <a:t>2</a:t>
             </a:r>
-            <a:endParaRPr lang="en-US" sz="1300" dirty="0"/>
+            <a:endParaRPr lang="en-US" sz="1400" dirty="0"/>
           </a:p>
         </p:txBody>
       </p:sp>
@@ -9507,14 +11742,14 @@
               <a:buNone/>
             </a:pPr>
             <a:r>
-              <a:rPr lang="en-US" sz="1500" b="1" dirty="0">
+              <a:rPr lang="en-US" sz="1600" b="1" dirty="0">
                 <a:solidFill>
                   <a:srgbClr val="FFFFFF"/>
                 </a:solidFill>
               </a:rPr>
               <a:t>Un fichier gzip bride le parallélisme</a:t>
             </a:r>
-            <a:endParaRPr lang="en-US" sz="1500" dirty="0"/>
+            <a:endParaRPr lang="en-US" sz="1600" dirty="0"/>
           </a:p>
         </p:txBody>
       </p:sp>
@@ -9543,14 +11778,14 @@
               <a:buNone/>
             </a:pPr>
             <a:r>
-              <a:rPr lang="en-US" sz="1250" dirty="0">
+              <a:rPr lang="en-US" sz="1400" dirty="0">
                 <a:solidFill>
                   <a:srgbClr val="CADCFC"/>
                 </a:solidFill>
               </a:rPr>
               <a:t>Non splittable : un seul mapper pour 5 millions de lignes. C'est l'argument décisif en faveur d'ORC.</a:t>
             </a:r>
-            <a:endParaRPr lang="en-US" sz="1250" dirty="0"/>
+            <a:endParaRPr lang="en-US" sz="1400" dirty="0"/>
           </a:p>
         </p:txBody>
       </p:sp>
@@ -9631,14 +11866,14 @@
               <a:buNone/>
             </a:pPr>
             <a:r>
-              <a:rPr lang="en-US" sz="1300" b="1" dirty="0">
+              <a:rPr lang="en-US" sz="1400" b="1" dirty="0">
                 <a:solidFill>
                   <a:srgbClr val="FFFFFF"/>
                 </a:solidFill>
               </a:rPr>
               <a:t>3</a:t>
             </a:r>
-            <a:endParaRPr lang="en-US" sz="1300" dirty="0"/>
+            <a:endParaRPr lang="en-US" sz="1400" dirty="0"/>
           </a:p>
         </p:txBody>
       </p:sp>
@@ -9667,14 +11902,14 @@
               <a:buNone/>
             </a:pPr>
             <a:r>
-              <a:rPr lang="en-US" sz="1500" b="1" dirty="0">
+              <a:rPr lang="en-US" sz="1600" b="1" dirty="0">
                 <a:solidFill>
                   <a:srgbClr val="FFFFFF"/>
                 </a:solidFill>
               </a:rPr>
               <a:t>Un résultat doit être contrôlé, pas seulement produit</a:t>
             </a:r>
-            <a:endParaRPr lang="en-US" sz="1500" dirty="0"/>
+            <a:endParaRPr lang="en-US" sz="1600" dirty="0"/>
           </a:p>
         </p:txBody>
       </p:sp>
@@ -9703,14 +11938,14 @@
               <a:buNone/>
             </a:pPr>
             <a:r>
-              <a:rPr lang="en-US" sz="1250" dirty="0">
+              <a:rPr lang="en-US" sz="1400" dirty="0">
                 <a:solidFill>
                   <a:srgbClr val="CADCFC"/>
                 </a:solidFill>
               </a:rPr>
-              <a:t>Trois moteurs indépendants, vingt-sept comparaisons, écart nul.</a:t>
-            </a:r>
-            <a:endParaRPr lang="en-US" sz="1250" dirty="0"/>
+              <a:t>Quatre chemins indépendants, quarante-deux comparaisons, écart nul.</a:t>
+            </a:r>
+            <a:endParaRPr lang="en-US" sz="1400" dirty="0"/>
           </a:p>
         </p:txBody>
       </p:sp>
@@ -9742,14 +11977,14 @@
               <a:buNone/>
             </a:pPr>
             <a:r>
-              <a:rPr lang="en-US" sz="1300" i="1" dirty="0">
+              <a:rPr lang="en-US" sz="1400" i="1" dirty="0">
                 <a:solidFill>
                   <a:srgbClr val="CADCFC"/>
                 </a:solidFill>
               </a:rPr>
-              <a:t>Les limites : un seul DataNode, donc réplication à 1 et aucune résilience démontrée. Un jeu synthétique, donc aucune conclusion commerciale. Et une comparaison MapReduce fondée sur nos propres références, faute de livraison du Groupe 4.</a:t>
-            </a:r>
-            <a:endParaRPr lang="en-US" sz="1300" dirty="0"/>
+              <a:t>Les limites : un seul DataNode, donc réplication à 1 et aucune résilience démontrée. Un jeu synthétique, donc aucune conclusion commerciale. Et une vérification croisée appuyée sur un travail — celui du Groupe 5 — qui n'est pas encore passé devant le jury.</a:t>
+            </a:r>
+            <a:endParaRPr lang="en-US" sz="1400" dirty="0"/>
           </a:p>
         </p:txBody>
       </p:sp>
@@ -9794,6 +12029,9 @@
   <p:clrMapOvr>
     <a:masterClrMapping/>
   </p:clrMapOvr>
+  <p:transition spd="med" advClick="1">
+    <p:fade/>
+  </p:transition>
 </p:sld>
 </file>
 
@@ -9880,14 +12118,14 @@
               <a:buNone/>
             </a:pPr>
             <a:r>
-              <a:rPr lang="en-US" sz="1400" dirty="0">
-                <a:solidFill>
-                  <a:srgbClr val="52514E"/>
+              <a:rPr lang="en-US" sz="1500" dirty="0">
+                <a:solidFill>
+                  <a:srgbClr val="353430"/>
                 </a:solidFill>
               </a:rPr>
               <a:t>Le travail est cumulatif : chaque groupe reprend le livrable du précédent.</a:t>
             </a:r>
-            <a:endParaRPr lang="en-US" sz="1400" dirty="0"/>
+            <a:endParaRPr lang="en-US" sz="1500" dirty="0"/>
           </a:p>
         </p:txBody>
       </p:sp>
@@ -9908,7 +12146,7 @@
             </a:avLst>
           </a:prstGeom>
           <a:solidFill>
-            <a:srgbClr val="F2F5FC"/>
+            <a:srgbClr val="FFFFFF"/>
           </a:solidFill>
           <a:ln w="12700">
             <a:solidFill>
@@ -9943,14 +12181,14 @@
               <a:buNone/>
             </a:pPr>
             <a:r>
-              <a:rPr lang="en-US" sz="1300" b="1" dirty="0">
-                <a:solidFill>
-                  <a:srgbClr val="52514E"/>
+              <a:rPr lang="en-US" sz="1400" b="1" dirty="0">
+                <a:solidFill>
+                  <a:srgbClr val="353430"/>
                 </a:solidFill>
               </a:rPr>
               <a:t>1</a:t>
             </a:r>
-            <a:endParaRPr lang="en-US" sz="1300" dirty="0"/>
+            <a:endParaRPr lang="en-US" sz="1400" dirty="0"/>
           </a:p>
         </p:txBody>
       </p:sp>
@@ -9979,14 +12217,14 @@
               <a:buNone/>
             </a:pPr>
             <a:r>
-              <a:rPr lang="en-US" sz="1200" b="1" dirty="0">
+              <a:rPr lang="en-US" sz="1350" b="1" dirty="0">
                 <a:solidFill>
                   <a:srgbClr val="1E2761"/>
                 </a:solidFill>
               </a:rPr>
               <a:t>Fondamentaux</a:t>
             </a:r>
-            <a:endParaRPr lang="en-US" sz="1200" dirty="0"/>
+            <a:endParaRPr lang="en-US" sz="1350" dirty="0"/>
           </a:p>
         </p:txBody>
       </p:sp>
@@ -10015,14 +12253,14 @@
               <a:buNone/>
             </a:pPr>
             <a:r>
-              <a:rPr lang="en-US" sz="950" dirty="0">
-                <a:solidFill>
-                  <a:srgbClr val="52514E"/>
+              <a:rPr lang="en-US" sz="1150" dirty="0">
+                <a:solidFill>
+                  <a:srgbClr val="353430"/>
                 </a:solidFill>
               </a:rPr>
               <a:t>Python, Pandas</a:t>
             </a:r>
-            <a:endParaRPr lang="en-US" sz="950" dirty="0"/>
+            <a:endParaRPr lang="en-US" sz="1150" dirty="0"/>
           </a:p>
         </p:txBody>
       </p:sp>
@@ -10053,7 +12291,7 @@
             <a:r>
               <a:rPr lang="en-US" sz="1800" dirty="0">
                 <a:solidFill>
-                  <a:srgbClr val="52514E"/>
+                  <a:srgbClr val="353430"/>
                 </a:solidFill>
               </a:rPr>
               <a:t>›</a:t>
@@ -10079,7 +12317,7 @@
             </a:avLst>
           </a:prstGeom>
           <a:solidFill>
-            <a:srgbClr val="F2F5FC"/>
+            <a:srgbClr val="FFFFFF"/>
           </a:solidFill>
           <a:ln w="12700">
             <a:solidFill>
@@ -10114,14 +12352,14 @@
               <a:buNone/>
             </a:pPr>
             <a:r>
-              <a:rPr lang="en-US" sz="1300" b="1" dirty="0">
-                <a:solidFill>
-                  <a:srgbClr val="52514E"/>
+              <a:rPr lang="en-US" sz="1400" b="1" dirty="0">
+                <a:solidFill>
+                  <a:srgbClr val="353430"/>
                 </a:solidFill>
               </a:rPr>
               <a:t>2</a:t>
             </a:r>
-            <a:endParaRPr lang="en-US" sz="1300" dirty="0"/>
+            <a:endParaRPr lang="en-US" sz="1400" dirty="0"/>
           </a:p>
         </p:txBody>
       </p:sp>
@@ -10150,14 +12388,14 @@
               <a:buNone/>
             </a:pPr>
             <a:r>
-              <a:rPr lang="en-US" sz="1200" b="1" dirty="0">
+              <a:rPr lang="en-US" sz="1350" b="1" dirty="0">
                 <a:solidFill>
                   <a:srgbClr val="1E2761"/>
                 </a:solidFill>
               </a:rPr>
               <a:t>HDFS</a:t>
             </a:r>
-            <a:endParaRPr lang="en-US" sz="1200" dirty="0"/>
+            <a:endParaRPr lang="en-US" sz="1350" dirty="0"/>
           </a:p>
         </p:txBody>
       </p:sp>
@@ -10186,14 +12424,14 @@
               <a:buNone/>
             </a:pPr>
             <a:r>
-              <a:rPr lang="en-US" sz="950" dirty="0">
-                <a:solidFill>
-                  <a:srgbClr val="52514E"/>
+              <a:rPr lang="en-US" sz="1150" dirty="0">
+                <a:solidFill>
+                  <a:srgbClr val="353430"/>
                 </a:solidFill>
               </a:rPr>
               <a:t>Data Lake</a:t>
             </a:r>
-            <a:endParaRPr lang="en-US" sz="950" dirty="0"/>
+            <a:endParaRPr lang="en-US" sz="1150" dirty="0"/>
           </a:p>
         </p:txBody>
       </p:sp>
@@ -10224,7 +12462,7 @@
             <a:r>
               <a:rPr lang="en-US" sz="1800" dirty="0">
                 <a:solidFill>
-                  <a:srgbClr val="52514E"/>
+                  <a:srgbClr val="353430"/>
                 </a:solidFill>
               </a:rPr>
               <a:t>›</a:t>
@@ -10250,7 +12488,7 @@
             </a:avLst>
           </a:prstGeom>
           <a:solidFill>
-            <a:srgbClr val="F2F5FC"/>
+            <a:srgbClr val="FFFFFF"/>
           </a:solidFill>
           <a:ln w="12700">
             <a:solidFill>
@@ -10285,14 +12523,14 @@
               <a:buNone/>
             </a:pPr>
             <a:r>
-              <a:rPr lang="en-US" sz="1300" b="1" dirty="0">
-                <a:solidFill>
-                  <a:srgbClr val="52514E"/>
+              <a:rPr lang="en-US" sz="1400" b="1" dirty="0">
+                <a:solidFill>
+                  <a:srgbClr val="353430"/>
                 </a:solidFill>
               </a:rPr>
               <a:t>3</a:t>
             </a:r>
-            <a:endParaRPr lang="en-US" sz="1300" dirty="0"/>
+            <a:endParaRPr lang="en-US" sz="1400" dirty="0"/>
           </a:p>
         </p:txBody>
       </p:sp>
@@ -10321,14 +12559,14 @@
               <a:buNone/>
             </a:pPr>
             <a:r>
-              <a:rPr lang="en-US" sz="1200" b="1" dirty="0">
+              <a:rPr lang="en-US" sz="1350" b="1" dirty="0">
                 <a:solidFill>
                   <a:srgbClr val="1E2761"/>
                 </a:solidFill>
               </a:rPr>
               <a:t>MapReduce</a:t>
             </a:r>
-            <a:endParaRPr lang="en-US" sz="1200" dirty="0"/>
+            <a:endParaRPr lang="en-US" sz="1350" dirty="0"/>
           </a:p>
         </p:txBody>
       </p:sp>
@@ -10357,14 +12595,14 @@
               <a:buNone/>
             </a:pPr>
             <a:r>
-              <a:rPr lang="en-US" sz="950" dirty="0">
-                <a:solidFill>
-                  <a:srgbClr val="52514E"/>
+              <a:rPr lang="en-US" sz="1150" dirty="0">
+                <a:solidFill>
+                  <a:srgbClr val="353430"/>
                 </a:solidFill>
               </a:rPr>
               <a:t>conception</a:t>
             </a:r>
-            <a:endParaRPr lang="en-US" sz="950" dirty="0"/>
+            <a:endParaRPr lang="en-US" sz="1150" dirty="0"/>
           </a:p>
         </p:txBody>
       </p:sp>
@@ -10395,7 +12633,7 @@
             <a:r>
               <a:rPr lang="en-US" sz="1800" dirty="0">
                 <a:solidFill>
-                  <a:srgbClr val="52514E"/>
+                  <a:srgbClr val="353430"/>
                 </a:solidFill>
               </a:rPr>
               <a:t>›</a:t>
@@ -10421,7 +12659,7 @@
             </a:avLst>
           </a:prstGeom>
           <a:solidFill>
-            <a:srgbClr val="F2F5FC"/>
+            <a:srgbClr val="FFFFFF"/>
           </a:solidFill>
           <a:ln w="12700">
             <a:solidFill>
@@ -10456,14 +12694,14 @@
               <a:buNone/>
             </a:pPr>
             <a:r>
-              <a:rPr lang="en-US" sz="1300" b="1" dirty="0">
-                <a:solidFill>
-                  <a:srgbClr val="52514E"/>
+              <a:rPr lang="en-US" sz="1400" b="1" dirty="0">
+                <a:solidFill>
+                  <a:srgbClr val="353430"/>
                 </a:solidFill>
               </a:rPr>
               <a:t>4</a:t>
             </a:r>
-            <a:endParaRPr lang="en-US" sz="1300" dirty="0"/>
+            <a:endParaRPr lang="en-US" sz="1400" dirty="0"/>
           </a:p>
         </p:txBody>
       </p:sp>
@@ -10492,14 +12730,14 @@
               <a:buNone/>
             </a:pPr>
             <a:r>
-              <a:rPr lang="en-US" sz="1200" b="1" dirty="0">
+              <a:rPr lang="en-US" sz="1350" b="1" dirty="0">
                 <a:solidFill>
                   <a:srgbClr val="1E2761"/>
                 </a:solidFill>
               </a:rPr>
               <a:t>Streaming</a:t>
             </a:r>
-            <a:endParaRPr lang="en-US" sz="1200" dirty="0"/>
+            <a:endParaRPr lang="en-US" sz="1350" dirty="0"/>
           </a:p>
         </p:txBody>
       </p:sp>
@@ -10528,14 +12766,14 @@
               <a:buNone/>
             </a:pPr>
             <a:r>
-              <a:rPr lang="en-US" sz="950" dirty="0">
-                <a:solidFill>
-                  <a:srgbClr val="52514E"/>
+              <a:rPr lang="en-US" sz="1150" dirty="0">
+                <a:solidFill>
+                  <a:srgbClr val="353430"/>
                 </a:solidFill>
               </a:rPr>
               <a:t>mapper, reducer</a:t>
             </a:r>
-            <a:endParaRPr lang="en-US" sz="950" dirty="0"/>
+            <a:endParaRPr lang="en-US" sz="1150" dirty="0"/>
           </a:p>
         </p:txBody>
       </p:sp>
@@ -10566,7 +12804,7 @@
             <a:r>
               <a:rPr lang="en-US" sz="1800" dirty="0">
                 <a:solidFill>
-                  <a:srgbClr val="52514E"/>
+                  <a:srgbClr val="353430"/>
                 </a:solidFill>
               </a:rPr>
               <a:t>›</a:t>
@@ -10592,7 +12830,7 @@
             </a:avLst>
           </a:prstGeom>
           <a:solidFill>
-            <a:srgbClr val="F2F5FC"/>
+            <a:srgbClr val="FFFFFF"/>
           </a:solidFill>
           <a:ln w="12700">
             <a:solidFill>
@@ -10627,14 +12865,14 @@
               <a:buNone/>
             </a:pPr>
             <a:r>
-              <a:rPr lang="en-US" sz="1300" b="1" dirty="0">
-                <a:solidFill>
-                  <a:srgbClr val="52514E"/>
+              <a:rPr lang="en-US" sz="1400" b="1" dirty="0">
+                <a:solidFill>
+                  <a:srgbClr val="353430"/>
                 </a:solidFill>
               </a:rPr>
               <a:t>5</a:t>
             </a:r>
-            <a:endParaRPr lang="en-US" sz="1300" dirty="0"/>
+            <a:endParaRPr lang="en-US" sz="1400" dirty="0"/>
           </a:p>
         </p:txBody>
       </p:sp>
@@ -10663,14 +12901,14 @@
               <a:buNone/>
             </a:pPr>
             <a:r>
-              <a:rPr lang="en-US" sz="1200" b="1" dirty="0">
+              <a:rPr lang="en-US" sz="1350" b="1" dirty="0">
                 <a:solidFill>
                   <a:srgbClr val="1E2761"/>
                 </a:solidFill>
               </a:rPr>
               <a:t>YARN</a:t>
             </a:r>
-            <a:endParaRPr lang="en-US" sz="1200" dirty="0"/>
+            <a:endParaRPr lang="en-US" sz="1350" dirty="0"/>
           </a:p>
         </p:txBody>
       </p:sp>
@@ -10699,14 +12937,14 @@
               <a:buNone/>
             </a:pPr>
             <a:r>
-              <a:rPr lang="en-US" sz="950" dirty="0">
-                <a:solidFill>
-                  <a:srgbClr val="52514E"/>
+              <a:rPr lang="en-US" sz="1150" dirty="0">
+                <a:solidFill>
+                  <a:srgbClr val="353430"/>
                 </a:solidFill>
               </a:rPr>
               <a:t>performances</a:t>
             </a:r>
-            <a:endParaRPr lang="en-US" sz="950" dirty="0"/>
+            <a:endParaRPr lang="en-US" sz="1150" dirty="0"/>
           </a:p>
         </p:txBody>
       </p:sp>
@@ -10737,7 +12975,7 @@
             <a:r>
               <a:rPr lang="en-US" sz="1800" dirty="0">
                 <a:solidFill>
-                  <a:srgbClr val="52514E"/>
+                  <a:srgbClr val="353430"/>
                 </a:solidFill>
               </a:rPr>
               <a:t>›</a:t>
@@ -10798,14 +13036,14 @@
               <a:buNone/>
             </a:pPr>
             <a:r>
-              <a:rPr lang="en-US" sz="1300" b="1" dirty="0">
+              <a:rPr lang="en-US" sz="1400" b="1" dirty="0">
                 <a:solidFill>
                   <a:srgbClr val="FFFFFF"/>
                 </a:solidFill>
               </a:rPr>
               <a:t>6</a:t>
             </a:r>
-            <a:endParaRPr lang="en-US" sz="1300" dirty="0"/>
+            <a:endParaRPr lang="en-US" sz="1400" dirty="0"/>
           </a:p>
         </p:txBody>
       </p:sp>
@@ -10834,14 +13072,14 @@
               <a:buNone/>
             </a:pPr>
             <a:r>
-              <a:rPr lang="en-US" sz="1200" b="1" dirty="0">
+              <a:rPr lang="en-US" sz="1350" b="1" dirty="0">
                 <a:solidFill>
                   <a:srgbClr val="FFFFFF"/>
                 </a:solidFill>
               </a:rPr>
               <a:t>Hive</a:t>
             </a:r>
-            <a:endParaRPr lang="en-US" sz="1200" dirty="0"/>
+            <a:endParaRPr lang="en-US" sz="1350" dirty="0"/>
           </a:p>
         </p:txBody>
       </p:sp>
@@ -10870,14 +13108,14 @@
               <a:buNone/>
             </a:pPr>
             <a:r>
-              <a:rPr lang="en-US" sz="950" dirty="0">
+              <a:rPr lang="en-US" sz="1150" dirty="0">
                 <a:solidFill>
                   <a:srgbClr val="FFFFFF"/>
                 </a:solidFill>
               </a:rPr>
               <a:t>entrepôt SQL</a:t>
             </a:r>
-            <a:endParaRPr lang="en-US" sz="950" dirty="0"/>
+            <a:endParaRPr lang="en-US" sz="1150" dirty="0"/>
           </a:p>
         </p:txBody>
       </p:sp>
@@ -10908,7 +13146,7 @@
             <a:r>
               <a:rPr lang="en-US" sz="1800" dirty="0">
                 <a:solidFill>
-                  <a:srgbClr val="52514E"/>
+                  <a:srgbClr val="353430"/>
                 </a:solidFill>
               </a:rPr>
               <a:t>›</a:t>
@@ -10934,7 +13172,7 @@
             </a:avLst>
           </a:prstGeom>
           <a:solidFill>
-            <a:srgbClr val="F2F5FC"/>
+            <a:srgbClr val="FFFFFF"/>
           </a:solidFill>
           <a:ln w="12700">
             <a:solidFill>
@@ -10969,14 +13207,14 @@
               <a:buNone/>
             </a:pPr>
             <a:r>
-              <a:rPr lang="en-US" sz="1300" b="1" dirty="0">
-                <a:solidFill>
-                  <a:srgbClr val="52514E"/>
+              <a:rPr lang="en-US" sz="1400" b="1" dirty="0">
+                <a:solidFill>
+                  <a:srgbClr val="353430"/>
                 </a:solidFill>
               </a:rPr>
               <a:t>7</a:t>
             </a:r>
-            <a:endParaRPr lang="en-US" sz="1300" dirty="0"/>
+            <a:endParaRPr lang="en-US" sz="1400" dirty="0"/>
           </a:p>
         </p:txBody>
       </p:sp>
@@ -11005,14 +13243,14 @@
               <a:buNone/>
             </a:pPr>
             <a:r>
-              <a:rPr lang="en-US" sz="1200" b="1" dirty="0">
+              <a:rPr lang="en-US" sz="1350" b="1" dirty="0">
                 <a:solidFill>
                   <a:srgbClr val="1E2761"/>
                 </a:solidFill>
               </a:rPr>
               <a:t>Spark</a:t>
             </a:r>
-            <a:endParaRPr lang="en-US" sz="1200" dirty="0"/>
+            <a:endParaRPr lang="en-US" sz="1350" dirty="0"/>
           </a:p>
         </p:txBody>
       </p:sp>
@@ -11041,14 +13279,14 @@
               <a:buNone/>
             </a:pPr>
             <a:r>
-              <a:rPr lang="en-US" sz="950" dirty="0">
-                <a:solidFill>
-                  <a:srgbClr val="52514E"/>
+              <a:rPr lang="en-US" sz="1150" dirty="0">
+                <a:solidFill>
+                  <a:srgbClr val="353430"/>
                 </a:solidFill>
               </a:rPr>
               <a:t>PySpark</a:t>
             </a:r>
-            <a:endParaRPr lang="en-US" sz="950" dirty="0"/>
+            <a:endParaRPr lang="en-US" sz="1150" dirty="0"/>
           </a:p>
         </p:txBody>
       </p:sp>
@@ -11079,7 +13317,7 @@
             <a:r>
               <a:rPr lang="en-US" sz="1800" dirty="0">
                 <a:solidFill>
-                  <a:srgbClr val="52514E"/>
+                  <a:srgbClr val="353430"/>
                 </a:solidFill>
               </a:rPr>
               <a:t>›</a:t>
@@ -11105,7 +13343,7 @@
             </a:avLst>
           </a:prstGeom>
           <a:solidFill>
-            <a:srgbClr val="F2F5FC"/>
+            <a:srgbClr val="FFFFFF"/>
           </a:solidFill>
           <a:ln w="12700">
             <a:solidFill>
@@ -11140,14 +13378,14 @@
               <a:buNone/>
             </a:pPr>
             <a:r>
-              <a:rPr lang="en-US" sz="1300" b="1" dirty="0">
-                <a:solidFill>
-                  <a:srgbClr val="52514E"/>
+              <a:rPr lang="en-US" sz="1400" b="1" dirty="0">
+                <a:solidFill>
+                  <a:srgbClr val="353430"/>
                 </a:solidFill>
               </a:rPr>
               <a:t>8</a:t>
             </a:r>
-            <a:endParaRPr lang="en-US" sz="1300" dirty="0"/>
+            <a:endParaRPr lang="en-US" sz="1400" dirty="0"/>
           </a:p>
         </p:txBody>
       </p:sp>
@@ -11176,14 +13414,14 @@
               <a:buNone/>
             </a:pPr>
             <a:r>
-              <a:rPr lang="en-US" sz="1200" b="1" dirty="0">
+              <a:rPr lang="en-US" sz="1350" b="1" dirty="0">
                 <a:solidFill>
                   <a:srgbClr val="1E2761"/>
                 </a:solidFill>
               </a:rPr>
               <a:t>Machine Learning</a:t>
             </a:r>
-            <a:endParaRPr lang="en-US" sz="1200" dirty="0"/>
+            <a:endParaRPr lang="en-US" sz="1350" dirty="0"/>
           </a:p>
         </p:txBody>
       </p:sp>
@@ -11212,14 +13450,14 @@
               <a:buNone/>
             </a:pPr>
             <a:r>
-              <a:rPr lang="en-US" sz="950" dirty="0">
-                <a:solidFill>
-                  <a:srgbClr val="52514E"/>
+              <a:rPr lang="en-US" sz="1150" dirty="0">
+                <a:solidFill>
+                  <a:srgbClr val="353430"/>
                 </a:solidFill>
               </a:rPr>
               <a:t>régression</a:t>
             </a:r>
-            <a:endParaRPr lang="en-US" sz="950" dirty="0"/>
+            <a:endParaRPr lang="en-US" sz="1150" dirty="0"/>
           </a:p>
         </p:txBody>
       </p:sp>
@@ -11240,11 +13478,11 @@
             </a:avLst>
           </a:prstGeom>
           <a:solidFill>
-            <a:srgbClr val="F2F5FC"/>
+            <a:srgbClr val="FFFFFF"/>
           </a:solidFill>
           <a:ln w="12700">
             <a:solidFill>
-              <a:srgbClr val="F2F5FC"/>
+              <a:srgbClr val="FFFFFF"/>
             </a:solidFill>
             <a:prstDash val="solid"/>
           </a:ln>
@@ -11278,7 +13516,7 @@
               <a:buNone/>
             </a:pPr>
             <a:r>
-              <a:rPr lang="en-US" sz="1400" b="1" dirty="0">
+              <a:rPr lang="en-US" sz="1500" b="1" dirty="0">
                 <a:solidFill>
                   <a:srgbClr val="1E2761"/>
                 </a:solidFill>
@@ -11292,14 +13530,14 @@
               <a:buNone/>
             </a:pPr>
             <a:r>
-              <a:rPr lang="en-US" sz="1400" dirty="0">
+              <a:rPr lang="en-US" sz="1500" dirty="0">
                 <a:solidFill>
                   <a:srgbClr val="1A1A1A"/>
                 </a:solidFill>
               </a:rPr>
               <a:t>nous recevons des fichiers déposés dans HDFS et nous rendons un entrepôt interrogeable en SQL.</a:t>
             </a:r>
-            <a:endParaRPr lang="en-US" sz="1400" dirty="0"/>
+            <a:endParaRPr lang="en-US" sz="1500" dirty="0"/>
           </a:p>
           <a:p>
             <a:pPr indent="0" marL="0">
@@ -11308,7 +13546,7 @@
               </a:lnSpc>
               <a:buNone/>
             </a:pPr>
-            <a:endParaRPr lang="en-US" sz="1400" dirty="0"/>
+            <a:endParaRPr lang="en-US" sz="1500" dirty="0"/>
           </a:p>
           <a:p>
             <a:pPr indent="0" marL="0">
@@ -11318,14 +13556,14 @@
               <a:buNone/>
             </a:pPr>
             <a:r>
-              <a:rPr lang="en-US" sz="1400" i="1" dirty="0">
-                <a:solidFill>
-                  <a:srgbClr val="52514E"/>
+              <a:rPr lang="en-US" sz="1500" i="1" dirty="0">
+                <a:solidFill>
+                  <a:srgbClr val="353430"/>
                 </a:solidFill>
               </a:rPr>
               <a:t>La règle du projet : chaque groupe doit vérifier les livrables du précédent. Il est interdit de reconstruire silencieusement une sortie manquante.</a:t>
             </a:r>
-            <a:endParaRPr lang="en-US" sz="1400" dirty="0"/>
+            <a:endParaRPr lang="en-US" sz="1500" dirty="0"/>
           </a:p>
         </p:txBody>
       </p:sp>
@@ -11357,9 +13595,9 @@
           <a:bodyPr/>
           <a:lstStyle>
             <a:lvl1pPr>
-              <a:defRPr sz="1000">
-                <a:solidFill>
-                  <a:srgbClr val="52514E"/>
+              <a:defRPr sz="1200">
+                <a:solidFill>
+                  <a:srgbClr val="353430"/>
                 </a:solidFill>
               </a:defRPr>
             </a:lvl1pPr>
@@ -11379,6 +13617,545 @@
   <p:clrMapOvr>
     <a:masterClrMapping/>
   </p:clrMapOvr>
+  <p:transition spd="med" advClick="1">
+    <p:fade/>
+  </p:transition>
+</p:sld>
+</file>
+
+<file path=ppt/slides/slide20.xml><?xml version="1.0" encoding="utf-8"?>
+<p:sld xmlns:a="http://schemas.openxmlformats.org/drawingml/2006/main" xmlns:r="http://schemas.openxmlformats.org/officeDocument/2006/relationships" xmlns:p="http://schemas.openxmlformats.org/presentationml/2006/main">
+  <p:cSld name="Slide 19">
+    <p:spTree>
+      <p:nvGrpSpPr>
+        <p:cNvPr id="1" name=""/>
+        <p:cNvGrpSpPr/>
+        <p:nvPr/>
+      </p:nvGrpSpPr>
+      <p:grpSpPr>
+        <a:xfrm>
+          <a:off x="0" y="0"/>
+          <a:ext cx="0" cy="0"/>
+          <a:chOff x="0" y="0"/>
+          <a:chExt cx="0" cy="0"/>
+        </a:xfrm>
+      </p:grpSpPr>
+      <p:sp>
+        <p:nvSpPr>
+          <p:cNvPr id="2" name="section-label"/>
+          <p:cNvSpPr txBox="1"/>
+          <p:nvPr/>
+        </p:nvSpPr>
+        <p:spPr>
+          <a:xfrm>
+            <a:off x="594360" y="2560320"/>
+            <a:ext cx="6400800" cy="320040"/>
+          </a:xfrm>
+          <a:prstGeom prst="rect">
+            <a:avLst/>
+          </a:prstGeom>
+          <a:noFill/>
+          <a:ln/>
+        </p:spPr>
+        <p:txBody>
+          <a:bodyPr wrap="square" lIns="0" tIns="0" rIns="0" bIns="0" rtlCol="0" anchor="ctr"/>
+          <a:lstStyle/>
+          <a:p>
+            <a:pPr indent="0" marL="0">
+              <a:buNone/>
+            </a:pPr>
+            <a:r>
+              <a:rPr lang="fr-FR" sz="1500" b="1" dirty="0">
+                <a:solidFill>
+                  <a:srgbClr val="EB6834"/>
+                </a:solidFill>
+              </a:rPr>
+              <a:t>PARTIE 3 SUR 4</a:t>
+            </a:r>
+          </a:p>
+        </p:txBody>
+      </p:sp>
+      <p:sp>
+        <p:nvSpPr>
+          <p:cNvPr id="3" name="section-titre"/>
+          <p:cNvSpPr txBox="1"/>
+          <p:nvPr/>
+        </p:nvSpPr>
+        <p:spPr>
+          <a:xfrm>
+            <a:off x="594360" y="2971800"/>
+            <a:ext cx="10972800" cy="1005840"/>
+          </a:xfrm>
+          <a:prstGeom prst="rect">
+            <a:avLst/>
+          </a:prstGeom>
+          <a:noFill/>
+          <a:ln/>
+        </p:spPr>
+        <p:txBody>
+          <a:bodyPr wrap="square" lIns="0" tIns="0" rIns="0" bIns="0" rtlCol="0" anchor="ctr"/>
+          <a:lstStyle/>
+          <a:p>
+            <a:pPr indent="0" marL="0">
+              <a:buNone/>
+            </a:pPr>
+            <a:r>
+              <a:rPr lang="fr-FR" sz="4400" b="1" dirty="0">
+                <a:solidFill>
+                  <a:srgbClr val="FFFFFF"/>
+                </a:solidFill>
+                <a:latin typeface="+mj-lt"/>
+              </a:rPr>
+              <a:t>Les preuves</a:t>
+            </a:r>
+          </a:p>
+        </p:txBody>
+      </p:sp>
+      <p:sp>
+        <p:nvSpPr>
+          <p:cNvPr id="4" name="section-soustitre"/>
+          <p:cNvSpPr txBox="1"/>
+          <p:nvPr/>
+        </p:nvSpPr>
+        <p:spPr>
+          <a:xfrm>
+            <a:off x="594360" y="4114800"/>
+            <a:ext cx="9144000" cy="548640"/>
+          </a:xfrm>
+          <a:prstGeom prst="rect">
+            <a:avLst/>
+          </a:prstGeom>
+          <a:noFill/>
+          <a:ln/>
+        </p:spPr>
+        <p:txBody>
+          <a:bodyPr wrap="square" lIns="0" tIns="0" rIns="0" bIns="0" rtlCol="0" anchor="ctr"/>
+          <a:lstStyle/>
+          <a:p>
+            <a:pPr indent="0" marL="0">
+              <a:buNone/>
+            </a:pPr>
+            <a:r>
+              <a:rPr lang="fr-FR" sz="1600" b="0" dirty="0">
+                <a:solidFill>
+                  <a:srgbClr val="CADCFC"/>
+                </a:solidFill>
+              </a:rPr>
+              <a:t>Ce que nous avons mesuré — et ce que ces mesures ne permettent pas de conclure</a:t>
+            </a:r>
+          </a:p>
+        </p:txBody>
+      </p:sp>
+    </p:spTree>
+  </p:cSld>
+  <p:clrMapOvr>
+    <a:masterClrMapping/>
+  </p:clrMapOvr>
+  <p:transition spd="med" advClick="1">
+    <p:fade/>
+  </p:transition>
+</p:sld>
+</file>
+
+<file path=ppt/slides/slide21.xml><?xml version="1.0" encoding="utf-8"?>
+<p:sld xmlns:a="http://schemas.openxmlformats.org/drawingml/2006/main" xmlns:r="http://schemas.openxmlformats.org/officeDocument/2006/relationships" xmlns:p="http://schemas.openxmlformats.org/presentationml/2006/main">
+  <p:cSld name="Slide 19">
+    <p:spTree>
+      <p:nvGrpSpPr>
+        <p:cNvPr id="1" name=""/>
+        <p:cNvGrpSpPr/>
+        <p:nvPr/>
+      </p:nvGrpSpPr>
+      <p:grpSpPr>
+        <a:xfrm>
+          <a:off x="0" y="0"/>
+          <a:ext cx="0" cy="0"/>
+          <a:chOff x="0" y="0"/>
+          <a:chExt cx="0" cy="0"/>
+        </a:xfrm>
+      </p:grpSpPr>
+      <p:sp>
+        <p:nvSpPr>
+          <p:cNvPr id="2" name="section-label"/>
+          <p:cNvSpPr txBox="1"/>
+          <p:nvPr/>
+        </p:nvSpPr>
+        <p:spPr>
+          <a:xfrm>
+            <a:off x="594360" y="2560320"/>
+            <a:ext cx="6400800" cy="320040"/>
+          </a:xfrm>
+          <a:prstGeom prst="rect">
+            <a:avLst/>
+          </a:prstGeom>
+          <a:noFill/>
+          <a:ln/>
+        </p:spPr>
+        <p:txBody>
+          <a:bodyPr wrap="square" lIns="0" tIns="0" rIns="0" bIns="0" rtlCol="0" anchor="ctr"/>
+          <a:lstStyle/>
+          <a:p>
+            <a:pPr indent="0" marL="0">
+              <a:buNone/>
+            </a:pPr>
+            <a:r>
+              <a:rPr lang="fr-FR" sz="1500" b="1" dirty="0">
+                <a:solidFill>
+                  <a:srgbClr val="EB6834"/>
+                </a:solidFill>
+              </a:rPr>
+              <a:t>PARTIE 1 SUR 4</a:t>
+            </a:r>
+          </a:p>
+        </p:txBody>
+      </p:sp>
+      <p:sp>
+        <p:nvSpPr>
+          <p:cNvPr id="3" name="section-titre"/>
+          <p:cNvSpPr txBox="1"/>
+          <p:nvPr/>
+        </p:nvSpPr>
+        <p:spPr>
+          <a:xfrm>
+            <a:off x="594360" y="2971800"/>
+            <a:ext cx="10972800" cy="1005840"/>
+          </a:xfrm>
+          <a:prstGeom prst="rect">
+            <a:avLst/>
+          </a:prstGeom>
+          <a:noFill/>
+          <a:ln/>
+        </p:spPr>
+        <p:txBody>
+          <a:bodyPr wrap="square" lIns="0" tIns="0" rIns="0" bIns="0" rtlCol="0" anchor="ctr"/>
+          <a:lstStyle/>
+          <a:p>
+            <a:pPr indent="0" marL="0">
+              <a:buNone/>
+            </a:pPr>
+            <a:r>
+              <a:rPr lang="fr-FR" sz="4400" b="1" dirty="0">
+                <a:solidFill>
+                  <a:srgbClr val="FFFFFF"/>
+                </a:solidFill>
+                <a:latin typeface="+mj-lt"/>
+              </a:rPr>
+              <a:t>Mise en place</a:t>
+            </a:r>
+          </a:p>
+        </p:txBody>
+      </p:sp>
+      <p:sp>
+        <p:nvSpPr>
+          <p:cNvPr id="4" name="section-soustitre"/>
+          <p:cNvSpPr txBox="1"/>
+          <p:nvPr/>
+        </p:nvSpPr>
+        <p:spPr>
+          <a:xfrm>
+            <a:off x="594360" y="4114800"/>
+            <a:ext cx="9144000" cy="548640"/>
+          </a:xfrm>
+          <a:prstGeom prst="rect">
+            <a:avLst/>
+          </a:prstGeom>
+          <a:noFill/>
+          <a:ln/>
+        </p:spPr>
+        <p:txBody>
+          <a:bodyPr wrap="square" lIns="0" tIns="0" rIns="0" bIns="0" rtlCol="0" anchor="ctr"/>
+          <a:lstStyle/>
+          <a:p>
+            <a:pPr indent="0" marL="0">
+              <a:buNone/>
+            </a:pPr>
+            <a:r>
+              <a:rPr lang="fr-FR" sz="1600" b="0" dirty="0">
+                <a:solidFill>
+                  <a:srgbClr val="CADCFC"/>
+                </a:solidFill>
+              </a:rPr>
+              <a:t>Le jeu de données, le cluster, le Data Lake — et ce que Hive n'est pas</a:t>
+            </a:r>
+          </a:p>
+        </p:txBody>
+      </p:sp>
+    </p:spTree>
+  </p:cSld>
+  <p:clrMapOvr>
+    <a:masterClrMapping/>
+  </p:clrMapOvr>
+  <p:transition spd="med" advClick="1">
+    <p:fade/>
+  </p:transition>
+</p:sld>
+</file>
+
+<file path=ppt/slides/slide22.xml><?xml version="1.0" encoding="utf-8"?>
+<p:sld xmlns:a="http://schemas.openxmlformats.org/drawingml/2006/main" xmlns:r="http://schemas.openxmlformats.org/officeDocument/2006/relationships" xmlns:p="http://schemas.openxmlformats.org/presentationml/2006/main">
+  <p:cSld name="Slide 19">
+    <p:spTree>
+      <p:nvGrpSpPr>
+        <p:cNvPr id="1" name=""/>
+        <p:cNvGrpSpPr/>
+        <p:nvPr/>
+      </p:nvGrpSpPr>
+      <p:grpSpPr>
+        <a:xfrm>
+          <a:off x="0" y="0"/>
+          <a:ext cx="0" cy="0"/>
+          <a:chOff x="0" y="0"/>
+          <a:chExt cx="0" cy="0"/>
+        </a:xfrm>
+      </p:grpSpPr>
+      <p:sp>
+        <p:nvSpPr>
+          <p:cNvPr id="2" name="section-label"/>
+          <p:cNvSpPr txBox="1"/>
+          <p:nvPr/>
+        </p:nvSpPr>
+        <p:spPr>
+          <a:xfrm>
+            <a:off x="594360" y="2560320"/>
+            <a:ext cx="6400800" cy="320040"/>
+          </a:xfrm>
+          <a:prstGeom prst="rect">
+            <a:avLst/>
+          </a:prstGeom>
+          <a:noFill/>
+          <a:ln/>
+        </p:spPr>
+        <p:txBody>
+          <a:bodyPr wrap="square" lIns="0" tIns="0" rIns="0" bIns="0" rtlCol="0" anchor="ctr"/>
+          <a:lstStyle/>
+          <a:p>
+            <a:pPr indent="0" marL="0">
+              <a:buNone/>
+            </a:pPr>
+            <a:r>
+              <a:rPr lang="fr-FR" sz="1500" b="1" dirty="0">
+                <a:solidFill>
+                  <a:srgbClr val="EB6834"/>
+                </a:solidFill>
+              </a:rPr>
+              <a:t>PARTIE 2 SUR 4</a:t>
+            </a:r>
+          </a:p>
+        </p:txBody>
+      </p:sp>
+      <p:sp>
+        <p:nvSpPr>
+          <p:cNvPr id="3" name="section-titre"/>
+          <p:cNvSpPr txBox="1"/>
+          <p:nvPr/>
+        </p:nvSpPr>
+        <p:spPr>
+          <a:xfrm>
+            <a:off x="594360" y="2971800"/>
+            <a:ext cx="10972800" cy="1005840"/>
+          </a:xfrm>
+          <a:prstGeom prst="rect">
+            <a:avLst/>
+          </a:prstGeom>
+          <a:noFill/>
+          <a:ln/>
+        </p:spPr>
+        <p:txBody>
+          <a:bodyPr wrap="square" lIns="0" tIns="0" rIns="0" bIns="0" rtlCol="0" anchor="ctr"/>
+          <a:lstStyle/>
+          <a:p>
+            <a:pPr indent="0" marL="0">
+              <a:buNone/>
+            </a:pPr>
+            <a:r>
+              <a:rPr lang="fr-FR" sz="4400" b="1" dirty="0">
+                <a:solidFill>
+                  <a:srgbClr val="FFFFFF"/>
+                </a:solidFill>
+                <a:latin typeface="+mj-lt"/>
+              </a:rPr>
+              <a:t>Le travail</a:t>
+            </a:r>
+          </a:p>
+        </p:txBody>
+      </p:sp>
+      <p:sp>
+        <p:nvSpPr>
+          <p:cNvPr id="4" name="section-soustitre"/>
+          <p:cNvSpPr txBox="1"/>
+          <p:nvPr/>
+        </p:nvSpPr>
+        <p:spPr>
+          <a:xfrm>
+            <a:off x="594360" y="4114800"/>
+            <a:ext cx="9144000" cy="548640"/>
+          </a:xfrm>
+          <a:prstGeom prst="rect">
+            <a:avLst/>
+          </a:prstGeom>
+          <a:noFill/>
+          <a:ln/>
+        </p:spPr>
+        <p:txBody>
+          <a:bodyPr wrap="square" lIns="0" tIns="0" rIns="0" bIns="0" rtlCol="0" anchor="ctr"/>
+          <a:lstStyle/>
+          <a:p>
+            <a:pPr indent="0" marL="0">
+              <a:buNone/>
+            </a:pPr>
+            <a:r>
+              <a:rPr lang="fr-FR" sz="1600" b="0" dirty="0">
+                <a:solidFill>
+                  <a:srgbClr val="CADCFC"/>
+                </a:solidFill>
+              </a:rPr>
+              <a:t>Décrire les fichiers à Hive, contrôler, partitionner, convertir en ORC</a:t>
+            </a:r>
+          </a:p>
+        </p:txBody>
+      </p:sp>
+    </p:spTree>
+  </p:cSld>
+  <p:clrMapOvr>
+    <a:masterClrMapping/>
+  </p:clrMapOvr>
+  <p:transition spd="med" advClick="1">
+    <p:fade/>
+  </p:transition>
+</p:sld>
+</file>
+
+<file path=ppt/slides/slide23.xml><?xml version="1.0" encoding="utf-8"?>
+<p:sld xmlns:a="http://schemas.openxmlformats.org/drawingml/2006/main" xmlns:r="http://schemas.openxmlformats.org/officeDocument/2006/relationships" xmlns:p="http://schemas.openxmlformats.org/presentationml/2006/main">
+  <p:cSld name="Slide 19">
+    <p:spTree>
+      <p:nvGrpSpPr>
+        <p:cNvPr id="1" name=""/>
+        <p:cNvGrpSpPr/>
+        <p:nvPr/>
+      </p:nvGrpSpPr>
+      <p:grpSpPr>
+        <a:xfrm>
+          <a:off x="0" y="0"/>
+          <a:ext cx="0" cy="0"/>
+          <a:chOff x="0" y="0"/>
+          <a:chExt cx="0" cy="0"/>
+        </a:xfrm>
+      </p:grpSpPr>
+      <p:sp>
+        <p:nvSpPr>
+          <p:cNvPr id="2" name="section-label"/>
+          <p:cNvSpPr txBox="1"/>
+          <p:nvPr/>
+        </p:nvSpPr>
+        <p:spPr>
+          <a:xfrm>
+            <a:off x="594360" y="2560320"/>
+            <a:ext cx="6400800" cy="320040"/>
+          </a:xfrm>
+          <a:prstGeom prst="rect">
+            <a:avLst/>
+          </a:prstGeom>
+          <a:noFill/>
+          <a:ln/>
+        </p:spPr>
+        <p:txBody>
+          <a:bodyPr wrap="square" lIns="0" tIns="0" rIns="0" bIns="0" rtlCol="0" anchor="ctr"/>
+          <a:lstStyle/>
+          <a:p>
+            <a:pPr indent="0" marL="0">
+              <a:buNone/>
+            </a:pPr>
+            <a:r>
+              <a:rPr lang="fr-FR" sz="1500" b="1" dirty="0">
+                <a:solidFill>
+                  <a:srgbClr val="EB6834"/>
+                </a:solidFill>
+              </a:rPr>
+              <a:t>PARTIE 4 SUR 4</a:t>
+            </a:r>
+          </a:p>
+        </p:txBody>
+      </p:sp>
+      <p:sp>
+        <p:nvSpPr>
+          <p:cNvPr id="3" name="section-titre"/>
+          <p:cNvSpPr txBox="1"/>
+          <p:nvPr/>
+        </p:nvSpPr>
+        <p:spPr>
+          <a:xfrm>
+            <a:off x="594360" y="2971800"/>
+            <a:ext cx="10972800" cy="1005840"/>
+          </a:xfrm>
+          <a:prstGeom prst="rect">
+            <a:avLst/>
+          </a:prstGeom>
+          <a:noFill/>
+          <a:ln/>
+        </p:spPr>
+        <p:txBody>
+          <a:bodyPr wrap="square" lIns="0" tIns="0" rIns="0" bIns="0" rtlCol="0" anchor="ctr"/>
+          <a:lstStyle/>
+          <a:p>
+            <a:pPr indent="0" marL="0">
+              <a:buNone/>
+            </a:pPr>
+            <a:r>
+              <a:rPr lang="fr-FR" sz="4400" b="1" dirty="0">
+                <a:solidFill>
+                  <a:srgbClr val="FFFFFF"/>
+                </a:solidFill>
+                <a:latin typeface="+mj-lt"/>
+              </a:rPr>
+              <a:t>Clôture</a:t>
+            </a:r>
+          </a:p>
+        </p:txBody>
+      </p:sp>
+      <p:sp>
+        <p:nvSpPr>
+          <p:cNvPr id="4" name="section-soustitre"/>
+          <p:cNvSpPr txBox="1"/>
+          <p:nvPr/>
+        </p:nvSpPr>
+        <p:spPr>
+          <a:xfrm>
+            <a:off x="594360" y="4114800"/>
+            <a:ext cx="9144000" cy="548640"/>
+          </a:xfrm>
+          <a:prstGeom prst="rect">
+            <a:avLst/>
+          </a:prstGeom>
+          <a:noFill/>
+          <a:ln/>
+        </p:spPr>
+        <p:txBody>
+          <a:bodyPr wrap="square" lIns="0" tIns="0" rIns="0" bIns="0" rtlCol="0" anchor="ctr"/>
+          <a:lstStyle/>
+          <a:p>
+            <a:pPr indent="0" marL="0">
+              <a:buNone/>
+            </a:pPr>
+            <a:r>
+              <a:rPr lang="fr-FR" sz="1600" b="0" dirty="0">
+                <a:solidFill>
+                  <a:srgbClr val="CADCFC"/>
+                </a:solidFill>
+              </a:rPr>
+              <a:t>Les contrôles croisés, ce que reçoit le Groupe 7, et nos limites</a:t>
+            </a:r>
+          </a:p>
+        </p:txBody>
+      </p:sp>
+    </p:spTree>
+  </p:cSld>
+  <p:clrMapOvr>
+    <a:masterClrMapping/>
+  </p:clrMapOvr>
+  <p:transition spd="med" advClick="1">
+    <p:fade/>
+  </p:transition>
 </p:sld>
 </file>
 
@@ -11434,7 +14211,7 @@
                 <a:ea typeface="Cambria" pitchFamily="34" charset="-122"/>
                 <a:cs typeface="Cambria" pitchFamily="34" charset="-120"/>
               </a:rPr>
-              <a:t>Ce que nous devions recevoir, et ce que nous avons reçu</a:t>
+              <a:t>Le livrable du Groupe 5, reçu et vérifié</a:t>
             </a:r>
             <a:endParaRPr lang="en-US" sz="2800" dirty="0"/>
           </a:p>
@@ -11484,11 +14261,11 @@
             </a:avLst>
           </a:prstGeom>
           <a:solidFill>
-            <a:srgbClr val="52514E"/>
+            <a:srgbClr val="353430"/>
           </a:solidFill>
           <a:ln w="12700">
             <a:solidFill>
-              <a:srgbClr val="52514E"/>
+              <a:srgbClr val="353430"/>
             </a:solidFill>
             <a:prstDash val="solid"/>
           </a:ln>
@@ -11519,14 +14296,14 @@
               <a:buNone/>
             </a:pPr>
             <a:r>
-              <a:rPr lang="en-US" sz="1500" b="1" dirty="0">
+              <a:rPr lang="en-US" sz="1600" b="1" dirty="0">
                 <a:solidFill>
                   <a:srgbClr val="1E2761"/>
                 </a:solidFill>
               </a:rPr>
-              <a:t>Attendu des groupes 1 à 5</a:t>
-            </a:r>
-            <a:endParaRPr lang="en-US" sz="1500" dirty="0"/>
+              <a:t>Reçu du Groupe 5</a:t>
+            </a:r>
+            <a:endParaRPr lang="en-US" sz="1600" dirty="0"/>
           </a:p>
         </p:txBody>
       </p:sp>
@@ -11559,14 +14336,14 @@
               <a:buChar char="•"/>
             </a:pPr>
             <a:r>
-              <a:rPr lang="en-US" sz="1300" dirty="0">
+              <a:rPr lang="en-US" sz="1400" dirty="0">
                 <a:solidFill>
                   <a:srgbClr val="1A1A1A"/>
                 </a:solidFill>
               </a:rPr>
-              <a:t>L'arborescence /datalake</a:t>
-            </a:r>
-            <a:endParaRPr lang="en-US" sz="1300" dirty="0"/>
+              <a:t>Les références MapReduce des Groupes 3 et 4</a:t>
+            </a:r>
+            <a:endParaRPr lang="en-US" sz="1400" dirty="0"/>
           </a:p>
           <a:p>
             <a:pPr marL="342900" indent="-342900">
@@ -11577,14 +14354,14 @@
               <a:buChar char="•"/>
             </a:pPr>
             <a:r>
-              <a:rPr lang="en-US" sz="1300" dirty="0">
+              <a:rPr lang="en-US" sz="1400" dirty="0">
                 <a:solidFill>
                   <a:srgbClr val="1A1A1A"/>
                 </a:solidFill>
               </a:rPr>
-              <a:t>Les résultats de référence MapReduce</a:t>
-            </a:r>
-            <a:endParaRPr lang="en-US" sz="1300" dirty="0"/>
+              <a:t>Exécutées sous YARN sur les trois volumes</a:t>
+            </a:r>
+            <a:endParaRPr lang="en-US" sz="1400" dirty="0"/>
           </a:p>
           <a:p>
             <a:pPr marL="342900" indent="-342900">
@@ -11595,14 +14372,14 @@
               <a:buChar char="•"/>
             </a:pPr>
             <a:r>
-              <a:rPr lang="en-US" sz="1300" dirty="0">
+              <a:rPr lang="en-US" sz="1400" dirty="0">
                 <a:solidFill>
                   <a:srgbClr val="1A1A1A"/>
                 </a:solidFill>
               </a:rPr>
-              <a:t>Les sorties HDFS du Groupe 4</a:t>
-            </a:r>
-            <a:endParaRPr lang="en-US" sz="1300" dirty="0"/>
+              <a:t>Les empreintes MD5 des jeux de données</a:t>
+            </a:r>
+            <a:endParaRPr lang="en-US" sz="1400" dirty="0"/>
           </a:p>
           <a:p>
             <a:pPr marL="342900" indent="-342900">
@@ -11613,14 +14390,14 @@
               <a:buChar char="•"/>
             </a:pPr>
             <a:r>
-              <a:rPr lang="en-US" sz="1300" dirty="0">
+              <a:rPr lang="en-US" sz="1400" dirty="0">
                 <a:solidFill>
                   <a:srgbClr val="1A1A1A"/>
                 </a:solidFill>
               </a:rPr>
-              <a:t>Le benchmark YARN</a:t>
-            </a:r>
-            <a:endParaRPr lang="en-US" sz="1300" dirty="0"/>
+              <a:t>Le benchmark de ressources YARN</a:t>
+            </a:r>
+            <a:endParaRPr lang="en-US" sz="1400" dirty="0"/>
           </a:p>
         </p:txBody>
       </p:sp>
@@ -11703,14 +14480,14 @@
               <a:buNone/>
             </a:pPr>
             <a:r>
-              <a:rPr lang="en-US" sz="1500" b="1" dirty="0">
+              <a:rPr lang="en-US" sz="1600" b="1" dirty="0">
                 <a:solidFill>
                   <a:srgbClr val="1E2761"/>
                 </a:solidFill>
               </a:rPr>
-              <a:t>Effectivement reçu</a:t>
-            </a:r>
-            <a:endParaRPr lang="en-US" sz="1500" dirty="0"/>
+              <a:t>Ce que nous en avons fait</a:t>
+            </a:r>
+            <a:endParaRPr lang="en-US" sz="1600" dirty="0"/>
           </a:p>
         </p:txBody>
       </p:sp>
@@ -11743,14 +14520,14 @@
               <a:buChar char="•"/>
             </a:pPr>
             <a:r>
-              <a:rPr lang="en-US" sz="1300" dirty="0">
+              <a:rPr lang="en-US" sz="1400" dirty="0">
                 <a:solidFill>
                   <a:srgbClr val="1A1A1A"/>
                 </a:solidFill>
               </a:rPr>
-              <a:t>Aucun livrable.</a:t>
-            </a:r>
-            <a:endParaRPr lang="en-US" sz="1300" dirty="0"/>
+              <a:t>Vérifié, pas repris.</a:t>
+            </a:r>
+            <a:endParaRPr lang="en-US" sz="1400" dirty="0"/>
           </a:p>
           <a:p>
             <a:pPr marL="342900" indent="-342900">
@@ -11761,14 +14538,14 @@
               <a:buChar char="•"/>
             </a:pPr>
             <a:r>
-              <a:rPr lang="en-US" sz="1300" dirty="0">
+              <a:rPr lang="en-US" sz="1400" dirty="0">
                 <a:solidFill>
                   <a:srgbClr val="1A1A1A"/>
                 </a:solidFill>
               </a:rPr>
-              <a:t>Le Groupe 4 n'avait pas encore présenté.</a:t>
-            </a:r>
-            <a:endParaRPr lang="en-US" sz="1300" dirty="0"/>
+              <a:t>Un script compare leurs sorties aux nôtres : python/comparer_groupe5.py</a:t>
+            </a:r>
+            <a:endParaRPr lang="en-US" sz="1400" dirty="0"/>
           </a:p>
         </p:txBody>
       </p:sp>
@@ -11851,14 +14628,14 @@
               <a:buNone/>
             </a:pPr>
             <a:r>
-              <a:rPr lang="en-US" sz="1500" b="1" dirty="0">
+              <a:rPr lang="en-US" sz="1600" b="1" dirty="0">
                 <a:solidFill>
                   <a:srgbClr val="1E2761"/>
                 </a:solidFill>
               </a:rPr>
-              <a:t>Notre réponse</a:t>
-            </a:r>
-            <a:endParaRPr lang="en-US" sz="1500" dirty="0"/>
+              <a:t>Le résultat</a:t>
+            </a:r>
+            <a:endParaRPr lang="en-US" sz="1600" dirty="0"/>
           </a:p>
         </p:txBody>
       </p:sp>
@@ -11891,14 +14668,14 @@
               <a:buChar char="•"/>
             </a:pPr>
             <a:r>
-              <a:rPr lang="en-US" sz="1300" dirty="0">
+              <a:rPr lang="en-US" sz="1400" dirty="0">
                 <a:solidFill>
                   <a:srgbClr val="1A1A1A"/>
                 </a:solidFill>
               </a:rPr>
-              <a:t>Arborescence recréée à l'identique</a:t>
-            </a:r>
-            <a:endParaRPr lang="en-US" sz="1300" dirty="0"/>
+              <a:t>15 comparaisons sur small, medium et big</a:t>
+            </a:r>
+            <a:endParaRPr lang="en-US" sz="1400" dirty="0"/>
           </a:p>
           <a:p>
             <a:pPr marL="342900" indent="-342900">
@@ -11909,14 +14686,14 @@
               <a:buChar char="•"/>
             </a:pPr>
             <a:r>
-              <a:rPr lang="en-US" sz="1300" dirty="0">
+              <a:rPr lang="en-US" sz="1400" dirty="0">
                 <a:solidFill>
                   <a:srgbClr val="1A1A1A"/>
                 </a:solidFill>
               </a:rPr>
-              <a:t>Références réimplémentées en Hadoop Streaming réel</a:t>
-            </a:r>
-            <a:endParaRPr lang="en-US" sz="1300" dirty="0"/>
+              <a:t>Écart maximal : 0</a:t>
+            </a:r>
+            <a:endParaRPr lang="en-US" sz="1400" dirty="0"/>
           </a:p>
           <a:p>
             <a:pPr marL="342900" indent="-342900">
@@ -11927,14 +14704,14 @@
               <a:buChar char="•"/>
             </a:pPr>
             <a:r>
-              <a:rPr lang="en-US" sz="1300" dirty="0">
+              <a:rPr lang="en-US" sz="1400" dirty="0">
                 <a:solidFill>
                   <a:srgbClr val="1A1A1A"/>
                 </a:solidFill>
               </a:rPr>
-              <a:t>Jeu big généré (graine 303)</a:t>
-            </a:r>
-            <a:endParaRPr lang="en-US" sz="1300" dirty="0"/>
+              <a:t>MD5 des trois jeux : identiques bit à bit</a:t>
+            </a:r>
+            <a:endParaRPr lang="en-US" sz="1400" dirty="0"/>
           </a:p>
           <a:p>
             <a:pPr marL="342900" indent="-342900">
@@ -11945,14 +14722,14 @@
               <a:buChar char="•"/>
             </a:pPr>
             <a:r>
-              <a:rPr lang="en-US" sz="1300" dirty="0">
+              <a:rPr lang="en-US" sz="1400" dirty="0">
                 <a:solidFill>
                   <a:srgbClr val="1A1A1A"/>
                 </a:solidFill>
               </a:rPr>
-              <a:t>Le tout documenté, non silencieux</a:t>
-            </a:r>
-            <a:endParaRPr lang="en-US" sz="1300" dirty="0"/>
+              <a:t>Deux chaînes techniques, les mêmes nombres</a:t>
+            </a:r>
+            <a:endParaRPr lang="en-US" sz="1400" dirty="0"/>
           </a:p>
         </p:txBody>
       </p:sp>
@@ -11981,14 +14758,14 @@
               <a:buNone/>
             </a:pPr>
             <a:r>
-              <a:rPr lang="en-US" sz="1300" i="1" dirty="0">
-                <a:solidFill>
-                  <a:srgbClr val="52514E"/>
-                </a:solidFill>
-              </a:rPr>
-              <a:t>Cette reconstruction valide la logique analytique de Hive, pas la chaîne Hadoop du Groupe 4. Nous le disons plutôt que de le masquer.</a:t>
-            </a:r>
-            <a:endParaRPr lang="en-US" sz="1300" dirty="0"/>
+              <a:rPr lang="en-US" sz="1400" i="1" dirty="0">
+                <a:solidFill>
+                  <a:srgbClr val="353430"/>
+                </a:solidFill>
+              </a:rPr>
+              <a:t>Le Groupe 5 n'a pas encore présenté : son travail n'est pas validé. Nos chiffres concordent avec les siens — c'est une vérification croisée, pas un label.</a:t>
+            </a:r>
+            <a:endParaRPr lang="en-US" sz="1400" dirty="0"/>
           </a:p>
         </p:txBody>
       </p:sp>
@@ -12020,9 +14797,9 @@
           <a:bodyPr/>
           <a:lstStyle>
             <a:lvl1pPr>
-              <a:defRPr sz="1000">
-                <a:solidFill>
-                  <a:srgbClr val="52514E"/>
+              <a:defRPr sz="1200">
+                <a:solidFill>
+                  <a:srgbClr val="353430"/>
                 </a:solidFill>
               </a:defRPr>
             </a:lvl1pPr>
@@ -12042,6 +14819,9 @@
   <p:clrMapOvr>
     <a:masterClrMapping/>
   </p:clrMapOvr>
+  <p:transition spd="med" advClick="1">
+    <p:fade/>
+  </p:transition>
 </p:sld>
 </file>
 
@@ -12128,14 +14908,14 @@
               <a:buNone/>
             </a:pPr>
             <a:r>
-              <a:rPr lang="en-US" sz="1400" dirty="0">
-                <a:solidFill>
-                  <a:srgbClr val="52514E"/>
+              <a:rPr lang="en-US" sz="1500" dirty="0">
+                <a:solidFill>
+                  <a:srgbClr val="353430"/>
                 </a:solidFill>
               </a:rPr>
               <a:t>Des transactions commerciales dans huit villes du Togo, sur deux ans, en trois volumes.</a:t>
             </a:r>
-            <a:endParaRPr lang="en-US" sz="1400" dirty="0"/>
+            <a:endParaRPr lang="en-US" sz="1500" dirty="0"/>
           </a:p>
         </p:txBody>
       </p:sp>
@@ -12191,14 +14971,14 @@
               <a:buNone/>
             </a:pPr>
             <a:r>
-              <a:rPr lang="en-US" sz="1300" b="1" dirty="0">
+              <a:rPr lang="en-US" sz="1400" b="1" dirty="0">
                 <a:solidFill>
                   <a:srgbClr val="2A78D6"/>
                 </a:solidFill>
               </a:rPr>
               <a:t>small</a:t>
             </a:r>
-            <a:endParaRPr lang="en-US" sz="1300" dirty="0"/>
+            <a:endParaRPr lang="en-US" sz="1400" dirty="0"/>
           </a:p>
         </p:txBody>
       </p:sp>
@@ -12263,14 +15043,14 @@
               <a:buNone/>
             </a:pPr>
             <a:r>
-              <a:rPr lang="en-US" sz="1150" dirty="0">
-                <a:solidFill>
-                  <a:srgbClr val="52514E"/>
+              <a:rPr lang="en-US" sz="1250" dirty="0">
+                <a:solidFill>
+                  <a:srgbClr val="353430"/>
                 </a:solidFill>
               </a:rPr>
               <a:t>1,3 Mo · tests rapides</a:t>
             </a:r>
-            <a:endParaRPr lang="en-US" sz="1150" dirty="0"/>
+            <a:endParaRPr lang="en-US" sz="1250" dirty="0"/>
           </a:p>
         </p:txBody>
       </p:sp>
@@ -12291,7 +15071,7 @@
             </a:avLst>
           </a:prstGeom>
           <a:solidFill>
-            <a:srgbClr val="F2F5FC"/>
+            <a:srgbClr val="FFFFFF"/>
           </a:solidFill>
           <a:ln w="12700">
             <a:solidFill>
@@ -12326,14 +15106,14 @@
               <a:buNone/>
             </a:pPr>
             <a:r>
-              <a:rPr lang="en-US" sz="1300" b="1" dirty="0">
+              <a:rPr lang="en-US" sz="1400" b="1" dirty="0">
                 <a:solidFill>
                   <a:srgbClr val="2A78D6"/>
                 </a:solidFill>
               </a:rPr>
               <a:t>medium</a:t>
             </a:r>
-            <a:endParaRPr lang="en-US" sz="1300" dirty="0"/>
+            <a:endParaRPr lang="en-US" sz="1400" dirty="0"/>
           </a:p>
         </p:txBody>
       </p:sp>
@@ -12398,14 +15178,14 @@
               <a:buNone/>
             </a:pPr>
             <a:r>
-              <a:rPr lang="en-US" sz="1150" dirty="0">
-                <a:solidFill>
-                  <a:srgbClr val="52514E"/>
+              <a:rPr lang="en-US" sz="1250" dirty="0">
+                <a:solidFill>
+                  <a:srgbClr val="353430"/>
                 </a:solidFill>
               </a:rPr>
               <a:t>62,9 Mo · développement et validation</a:t>
             </a:r>
-            <a:endParaRPr lang="en-US" sz="1150" dirty="0"/>
+            <a:endParaRPr lang="en-US" sz="1250" dirty="0"/>
           </a:p>
         </p:txBody>
       </p:sp>
@@ -12461,14 +15241,14 @@
               <a:buNone/>
             </a:pPr>
             <a:r>
-              <a:rPr lang="en-US" sz="1300" b="1" dirty="0">
+              <a:rPr lang="en-US" sz="1400" b="1" dirty="0">
                 <a:solidFill>
                   <a:srgbClr val="2A78D6"/>
                 </a:solidFill>
               </a:rPr>
               <a:t>big</a:t>
             </a:r>
-            <a:endParaRPr lang="en-US" sz="1300" dirty="0"/>
+            <a:endParaRPr lang="en-US" sz="1400" dirty="0"/>
           </a:p>
         </p:txBody>
       </p:sp>
@@ -12533,14 +15313,14 @@
               <a:buNone/>
             </a:pPr>
             <a:r>
-              <a:rPr lang="en-US" sz="1150" dirty="0">
-                <a:solidFill>
-                  <a:srgbClr val="52514E"/>
+              <a:rPr lang="en-US" sz="1250" dirty="0">
+                <a:solidFill>
+                  <a:srgbClr val="353430"/>
                 </a:solidFill>
               </a:rPr>
               <a:t>138,5 Mo · expérimentation Big Data</a:t>
             </a:r>
-            <a:endParaRPr lang="en-US" sz="1150" dirty="0"/>
+            <a:endParaRPr lang="en-US" sz="1250" dirty="0"/>
           </a:p>
         </p:txBody>
       </p:sp>
@@ -12561,11 +15341,11 @@
             </a:avLst>
           </a:prstGeom>
           <a:solidFill>
-            <a:srgbClr val="F2F5FC"/>
+            <a:srgbClr val="FFFFFF"/>
           </a:solidFill>
           <a:ln w="12700">
             <a:solidFill>
-              <a:srgbClr val="F2F5FC"/>
+              <a:srgbClr val="FFFFFF"/>
             </a:solidFill>
             <a:prstDash val="solid"/>
           </a:ln>
@@ -12599,7 +15379,7 @@
               <a:buNone/>
             </a:pPr>
             <a:r>
-              <a:rPr lang="en-US" sz="1300" b="1" dirty="0">
+              <a:rPr lang="en-US" sz="1400" b="1" dirty="0">
                 <a:solidFill>
                   <a:srgbClr val="1E2761"/>
                 </a:solidFill>
@@ -12613,14 +15393,14 @@
               <a:buNone/>
             </a:pPr>
             <a:r>
-              <a:rPr lang="en-US" sz="1300" dirty="0">
+              <a:rPr lang="en-US" sz="1400" dirty="0">
                 <a:solidFill>
                   <a:srgbClr val="1A1A1A"/>
                 </a:solidFill>
               </a:rPr>
               <a:t> : identifiant, horodatage, client, ville, magasin, catégorie, produit, quantité, prix unitaire, remise, mode de paiement, âge et type de client, stocks, promotion, jour, livraison, montant.</a:t>
             </a:r>
-            <a:endParaRPr lang="en-US" sz="1300" dirty="0"/>
+            <a:endParaRPr lang="en-US" sz="1400" dirty="0"/>
           </a:p>
           <a:p>
             <a:pPr indent="0" marL="0">
@@ -12629,7 +15409,7 @@
               </a:lnSpc>
               <a:buNone/>
             </a:pPr>
-            <a:endParaRPr lang="en-US" sz="1300" dirty="0"/>
+            <a:endParaRPr lang="en-US" sz="1400" dirty="0"/>
           </a:p>
           <a:p>
             <a:pPr indent="0" marL="0">
@@ -12639,7 +15419,7 @@
               <a:buNone/>
             </a:pPr>
             <a:r>
-              <a:rPr lang="en-US" sz="1300" b="1" dirty="0">
+              <a:rPr lang="en-US" sz="1400" b="1" dirty="0">
                 <a:solidFill>
                   <a:srgbClr val="2A78D6"/>
                 </a:solidFill>
@@ -12656,14 +15436,14 @@
               <a:buNone/>
             </a:pPr>
             <a:r>
-              <a:rPr lang="en-US" sz="1300" i="1" dirty="0">
-                <a:solidFill>
-                  <a:srgbClr val="52514E"/>
+              <a:rPr lang="en-US" sz="1400" i="1" dirty="0">
+                <a:solidFill>
+                  <a:srgbClr val="353430"/>
                 </a:solidFill>
               </a:rPr>
               <a:t>  — relation que nous vérifions au lieu de la supposer.</a:t>
             </a:r>
-            <a:endParaRPr lang="en-US" sz="1300" dirty="0"/>
+            <a:endParaRPr lang="en-US" sz="1400" dirty="0"/>
           </a:p>
         </p:txBody>
       </p:sp>
@@ -12695,9 +15475,9 @@
           <a:bodyPr/>
           <a:lstStyle>
             <a:lvl1pPr>
-              <a:defRPr sz="1000">
-                <a:solidFill>
-                  <a:srgbClr val="52514E"/>
+              <a:defRPr sz="1200">
+                <a:solidFill>
+                  <a:srgbClr val="353430"/>
                 </a:solidFill>
               </a:defRPr>
             </a:lvl1pPr>
@@ -12717,6 +15497,9 @@
   <p:clrMapOvr>
     <a:masterClrMapping/>
   </p:clrMapOvr>
+  <p:transition spd="med" advClick="1">
+    <p:fade/>
+  </p:transition>
 </p:sld>
 </file>
 
@@ -12780,820 +15563,661 @@
       </p:sp>
       <p:sp>
         <p:nvSpPr>
-          <p:cNvPr id="3" name="carte-66"/>
+          <p:cNvPr id="30" name="box-30"/>
           <p:cNvSpPr/>
           <p:nvPr/>
         </p:nvSpPr>
         <p:spPr>
           <a:xfrm>
-            <a:off x="594360" y="1371600"/>
-            <a:ext cx="6803136" cy="548640"/>
+            <a:off x="594360" y="1700000"/>
+            <a:ext cx="2300000" cy="900000"/>
           </a:xfrm>
           <a:prstGeom prst="roundRect">
-            <a:avLst>
-              <a:gd name="adj" fmla="val 16667"/>
-            </a:avLst>
+            <a:avLst/>
           </a:prstGeom>
           <a:solidFill>
             <a:srgbClr val="FFFFFF"/>
           </a:solidFill>
           <a:ln w="12700">
             <a:solidFill>
-              <a:srgbClr val="E2E5EA"/>
+              <a:srgbClr val="1E2761"/>
             </a:solidFill>
-            <a:prstDash val="solid"/>
           </a:ln>
         </p:spPr>
-      </p:sp>
-      <p:sp>
-        <p:nvSpPr>
-          <p:cNvPr id="4" name="pt-67"/>
+        <p:txBody>
+          <a:bodyPr lIns="45720" rIns="45720" anchor="ctr"/>
+          <a:lstStyle/>
+          <a:p>
+            <a:pPr algn="ctr">
+              <a:buNone/>
+            </a:pPr>
+            <a:r>
+              <a:rPr lang="fr-FR" sz="1500" b="1" dirty="0">
+                <a:solidFill>
+                  <a:srgbClr val="353430"/>
+                </a:solidFill>
+              </a:rPr>
+              <a:t>beeline / PyHive</a:t>
+            </a:r>
+          </a:p>
+        </p:txBody>
+      </p:sp>
+      <p:sp>
+        <p:nvSpPr>
+          <p:cNvPr id="31" name="leg-31"/>
+          <p:cNvSpPr txBox="1"/>
+          <p:nvPr/>
+        </p:nvSpPr>
+        <p:spPr>
+          <a:xfrm>
+            <a:off x="594360" y="2700000"/>
+            <a:ext cx="2300000" cy="420000"/>
+          </a:xfrm>
+          <a:prstGeom prst="rect">
+            <a:avLst/>
+          </a:prstGeom>
+          <a:noFill/>
+          <a:ln/>
+        </p:spPr>
+        <p:txBody>
+          <a:bodyPr wrap="square" lIns="0" tIns="0" rIns="0" bIns="0" anchor="t"/>
+          <a:lstStyle/>
+          <a:p>
+            <a:pPr indent="0" marL="0" algn="ctr">
+              <a:buNone/>
+            </a:pPr>
+            <a:r>
+              <a:rPr lang="fr-FR" sz="1200" b="0" dirty="0">
+                <a:solidFill>
+                  <a:srgbClr val="353430"/>
+                </a:solidFill>
+              </a:rPr>
+              <a:t>le client, sur votre poste</a:t>
+            </a:r>
+          </a:p>
+        </p:txBody>
+      </p:sp>
+      <p:sp>
+        <p:nvSpPr>
+          <p:cNvPr id="32" name="fl-32"/>
           <p:cNvSpPr/>
           <p:nvPr/>
         </p:nvSpPr>
         <p:spPr>
           <a:xfrm>
-            <a:off x="777240" y="1554480"/>
-            <a:ext cx="182880" cy="182880"/>
-          </a:xfrm>
-          <a:prstGeom prst="ellipse">
+            <a:off x="3004360" y="2030000"/>
+            <a:ext cx="380000" cy="240000"/>
+          </a:xfrm>
+          <a:prstGeom prst="rightArrow">
+            <a:avLst/>
+          </a:prstGeom>
+          <a:solidFill>
+            <a:srgbClr val="CADCFC"/>
+          </a:solidFill>
+          <a:ln/>
+        </p:spPr>
+        <p:txBody>
+          <a:bodyPr lIns="45720" rIns="45720" anchor="ctr"/>
+          <a:lstStyle/>
+          <a:p/>
+        </p:txBody>
+      </p:sp>
+      <p:sp>
+        <p:nvSpPr>
+          <p:cNvPr id="33" name="box-33"/>
+          <p:cNvSpPr/>
+          <p:nvPr/>
+        </p:nvSpPr>
+        <p:spPr>
+          <a:xfrm>
+            <a:off x="3394360" y="1700000"/>
+            <a:ext cx="2300000" cy="900000"/>
+          </a:xfrm>
+          <a:prstGeom prst="roundRect">
             <a:avLst/>
           </a:prstGeom>
           <a:solidFill>
             <a:srgbClr val="2A78D6"/>
           </a:solidFill>
-          <a:ln w="12700">
-            <a:solidFill>
-              <a:srgbClr val="2A78D6"/>
-            </a:solidFill>
-            <a:prstDash val="solid"/>
-          </a:ln>
-        </p:spPr>
-      </p:sp>
-      <p:sp>
-        <p:nvSpPr>
-          <p:cNvPr id="5" name="sn-68"/>
-          <p:cNvSpPr txBox="1"/>
-          <p:nvPr/>
-        </p:nvSpPr>
-        <p:spPr>
-          <a:xfrm>
-            <a:off x="1051560" y="1463040"/>
-            <a:ext cx="2286000" cy="365760"/>
-          </a:xfrm>
-          <a:prstGeom prst="rect">
-            <a:avLst/>
-          </a:prstGeom>
-          <a:noFill/>
-          <a:ln/>
-        </p:spPr>
-        <p:txBody>
-          <a:bodyPr wrap="square" lIns="0" tIns="0" rIns="0" bIns="0" rtlCol="0" anchor="ctr"/>
-          <a:lstStyle/>
-          <a:p>
-            <a:pPr indent="0" marL="0">
-              <a:buNone/>
-            </a:pPr>
-            <a:r>
-              <a:rPr lang="en-US" sz="1300" b="1" dirty="0">
+          <a:ln/>
+        </p:spPr>
+        <p:txBody>
+          <a:bodyPr lIns="45720" rIns="45720" anchor="ctr"/>
+          <a:lstStyle/>
+          <a:p>
+            <a:pPr algn="ctr">
+              <a:buNone/>
+            </a:pPr>
+            <a:r>
+              <a:rPr lang="fr-FR" sz="1500" b="1" dirty="0">
+                <a:solidFill>
+                  <a:srgbClr val="FFFFFF"/>
+                </a:solidFill>
+              </a:rPr>
+              <a:t>hive-server</a:t>
+            </a:r>
+          </a:p>
+        </p:txBody>
+      </p:sp>
+      <p:sp>
+        <p:nvSpPr>
+          <p:cNvPr id="34" name="leg-34"/>
+          <p:cNvSpPr txBox="1"/>
+          <p:nvPr/>
+        </p:nvSpPr>
+        <p:spPr>
+          <a:xfrm>
+            <a:off x="3394360" y="2700000"/>
+            <a:ext cx="2300000" cy="420000"/>
+          </a:xfrm>
+          <a:prstGeom prst="rect">
+            <a:avLst/>
+          </a:prstGeom>
+          <a:noFill/>
+          <a:ln/>
+        </p:spPr>
+        <p:txBody>
+          <a:bodyPr wrap="square" lIns="0" tIns="0" rIns="0" bIns="0" anchor="t"/>
+          <a:lstStyle/>
+          <a:p>
+            <a:pPr indent="0" marL="0" algn="ctr">
+              <a:buNone/>
+            </a:pPr>
+            <a:r>
+              <a:rPr lang="fr-FR" sz="1200" b="0" dirty="0">
+                <a:solidFill>
+                  <a:srgbClr val="353430"/>
+                </a:solidFill>
+              </a:rPr>
+              <a:t>HiveServer2 : traduit le SQL en jobs</a:t>
+            </a:r>
+          </a:p>
+        </p:txBody>
+      </p:sp>
+      <p:sp>
+        <p:nvSpPr>
+          <p:cNvPr id="35" name="fl-35"/>
+          <p:cNvSpPr/>
+          <p:nvPr/>
+        </p:nvSpPr>
+        <p:spPr>
+          <a:xfrm>
+            <a:off x="5804360" y="2030000"/>
+            <a:ext cx="380000" cy="240000"/>
+          </a:xfrm>
+          <a:prstGeom prst="rightArrow">
+            <a:avLst/>
+          </a:prstGeom>
+          <a:solidFill>
+            <a:srgbClr val="CADCFC"/>
+          </a:solidFill>
+          <a:ln/>
+        </p:spPr>
+        <p:txBody>
+          <a:bodyPr lIns="45720" rIns="45720" anchor="ctr"/>
+          <a:lstStyle/>
+          <a:p/>
+        </p:txBody>
+      </p:sp>
+      <p:sp>
+        <p:nvSpPr>
+          <p:cNvPr id="36" name="box-36"/>
+          <p:cNvSpPr/>
+          <p:nvPr/>
+        </p:nvSpPr>
+        <p:spPr>
+          <a:xfrm>
+            <a:off x="6194360" y="1700000"/>
+            <a:ext cx="2300000" cy="900000"/>
+          </a:xfrm>
+          <a:prstGeom prst="roundRect">
+            <a:avLst/>
+          </a:prstGeom>
+          <a:solidFill>
+            <a:srgbClr val="1E2761"/>
+          </a:solidFill>
+          <a:ln/>
+        </p:spPr>
+        <p:txBody>
+          <a:bodyPr lIns="45720" rIns="45720" anchor="ctr"/>
+          <a:lstStyle/>
+          <a:p>
+            <a:pPr algn="ctr">
+              <a:buNone/>
+            </a:pPr>
+            <a:r>
+              <a:rPr lang="fr-FR" sz="1500" b="1" dirty="0">
+                <a:solidFill>
+                  <a:srgbClr val="FFFFFF"/>
+                </a:solidFill>
+              </a:rPr>
+              <a:t>namenode</a:t>
+            </a:r>
+          </a:p>
+        </p:txBody>
+      </p:sp>
+      <p:sp>
+        <p:nvSpPr>
+          <p:cNvPr id="37" name="leg-37"/>
+          <p:cNvSpPr txBox="1"/>
+          <p:nvPr/>
+        </p:nvSpPr>
+        <p:spPr>
+          <a:xfrm>
+            <a:off x="6194360" y="2700000"/>
+            <a:ext cx="2300000" cy="420000"/>
+          </a:xfrm>
+          <a:prstGeom prst="rect">
+            <a:avLst/>
+          </a:prstGeom>
+          <a:noFill/>
+          <a:ln/>
+        </p:spPr>
+        <p:txBody>
+          <a:bodyPr wrap="square" lIns="0" tIns="0" rIns="0" bIns="0" anchor="t"/>
+          <a:lstStyle/>
+          <a:p>
+            <a:pPr indent="0" marL="0" algn="ctr">
+              <a:buNone/>
+            </a:pPr>
+            <a:r>
+              <a:rPr lang="fr-FR" sz="1200" b="0" dirty="0">
+                <a:solidFill>
+                  <a:srgbClr val="353430"/>
+                </a:solidFill>
+              </a:rPr>
+              <a:t>l'annuaire : quel bloc, où</a:t>
+            </a:r>
+          </a:p>
+        </p:txBody>
+      </p:sp>
+      <p:sp>
+        <p:nvSpPr>
+          <p:cNvPr id="38" name="fl-38"/>
+          <p:cNvSpPr/>
+          <p:nvPr/>
+        </p:nvSpPr>
+        <p:spPr>
+          <a:xfrm>
+            <a:off x="8604360" y="2030000"/>
+            <a:ext cx="380000" cy="240000"/>
+          </a:xfrm>
+          <a:prstGeom prst="rightArrow">
+            <a:avLst/>
+          </a:prstGeom>
+          <a:solidFill>
+            <a:srgbClr val="CADCFC"/>
+          </a:solidFill>
+          <a:ln/>
+        </p:spPr>
+        <p:txBody>
+          <a:bodyPr lIns="45720" rIns="45720" anchor="ctr"/>
+          <a:lstStyle/>
+          <a:p/>
+        </p:txBody>
+      </p:sp>
+      <p:sp>
+        <p:nvSpPr>
+          <p:cNvPr id="39" name="box-39"/>
+          <p:cNvSpPr/>
+          <p:nvPr/>
+        </p:nvSpPr>
+        <p:spPr>
+          <a:xfrm>
+            <a:off x="8994360" y="1700000"/>
+            <a:ext cx="2300000" cy="900000"/>
+          </a:xfrm>
+          <a:prstGeom prst="roundRect">
+            <a:avLst/>
+          </a:prstGeom>
+          <a:solidFill>
+            <a:srgbClr val="1E2761"/>
+          </a:solidFill>
+          <a:ln/>
+        </p:spPr>
+        <p:txBody>
+          <a:bodyPr lIns="45720" rIns="45720" anchor="ctr"/>
+          <a:lstStyle/>
+          <a:p>
+            <a:pPr algn="ctr">
+              <a:buNone/>
+            </a:pPr>
+            <a:r>
+              <a:rPr lang="fr-FR" sz="1500" b="1" dirty="0">
+                <a:solidFill>
+                  <a:srgbClr val="FFFFFF"/>
+                </a:solidFill>
+              </a:rPr>
+              <a:t>datanode</a:t>
+            </a:r>
+          </a:p>
+        </p:txBody>
+      </p:sp>
+      <p:sp>
+        <p:nvSpPr>
+          <p:cNvPr id="40" name="leg-40"/>
+          <p:cNvSpPr txBox="1"/>
+          <p:nvPr/>
+        </p:nvSpPr>
+        <p:spPr>
+          <a:xfrm>
+            <a:off x="8994360" y="2700000"/>
+            <a:ext cx="2300000" cy="420000"/>
+          </a:xfrm>
+          <a:prstGeom prst="rect">
+            <a:avLst/>
+          </a:prstGeom>
+          <a:noFill/>
+          <a:ln/>
+        </p:spPr>
+        <p:txBody>
+          <a:bodyPr wrap="square" lIns="0" tIns="0" rIns="0" bIns="0" anchor="t"/>
+          <a:lstStyle/>
+          <a:p>
+            <a:pPr indent="0" marL="0" algn="ctr">
+              <a:buNone/>
+            </a:pPr>
+            <a:r>
+              <a:rPr lang="fr-FR" sz="1200" b="0" dirty="0">
+                <a:solidFill>
+                  <a:srgbClr val="353430"/>
+                </a:solidFill>
+              </a:rPr>
+              <a:t>les blocs, sur le disque</a:t>
+            </a:r>
+          </a:p>
+        </p:txBody>
+      </p:sp>
+      <p:sp>
+        <p:nvSpPr>
+          <p:cNvPr id="41" name="port"/>
+          <p:cNvSpPr txBox="1"/>
+          <p:nvPr/>
+        </p:nvSpPr>
+        <p:spPr>
+          <a:xfrm>
+            <a:off x="2644360" y="1360000"/>
+            <a:ext cx="1100000" cy="300000"/>
+          </a:xfrm>
+          <a:prstGeom prst="rect">
+            <a:avLst/>
+          </a:prstGeom>
+          <a:noFill/>
+          <a:ln/>
+        </p:spPr>
+        <p:txBody>
+          <a:bodyPr wrap="square" lIns="0" tIns="0" rIns="0" bIns="0" anchor="ctr"/>
+          <a:lstStyle/>
+          <a:p>
+            <a:pPr indent="0" marL="0" algn="ctr">
+              <a:buNone/>
+            </a:pPr>
+            <a:r>
+              <a:rPr lang="fr-FR" sz="1100" b="0" dirty="0">
+                <a:solidFill>
+                  <a:srgbClr val="353430"/>
+                </a:solidFill>
+              </a:rPr>
+              <a:t>port 10000</a:t>
+            </a:r>
+          </a:p>
+        </p:txBody>
+      </p:sp>
+      <p:sp>
+        <p:nvSpPr>
+          <p:cNvPr id="42" name="fl-bas"/>
+          <p:cNvSpPr/>
+          <p:nvPr/>
+        </p:nvSpPr>
+        <p:spPr>
+          <a:xfrm>
+            <a:off x="4424360" y="3160000"/>
+            <a:ext cx="240000" cy="380000"/>
+          </a:xfrm>
+          <a:prstGeom prst="downArrow">
+            <a:avLst/>
+          </a:prstGeom>
+          <a:solidFill>
+            <a:srgbClr val="CADCFC"/>
+          </a:solidFill>
+          <a:ln/>
+        </p:spPr>
+        <p:txBody>
+          <a:bodyPr lIns="45720" rIns="45720" anchor="ctr"/>
+          <a:lstStyle/>
+          <a:p/>
+        </p:txBody>
+      </p:sp>
+      <p:sp>
+        <p:nvSpPr>
+          <p:cNvPr id="43" name="box-43"/>
+          <p:cNvSpPr/>
+          <p:nvPr/>
+        </p:nvSpPr>
+        <p:spPr>
+          <a:xfrm>
+            <a:off x="3394360" y="3580000"/>
+            <a:ext cx="2300000" cy="900000"/>
+          </a:xfrm>
+          <a:prstGeom prst="roundRect">
+            <a:avLst/>
+          </a:prstGeom>
+          <a:solidFill>
+            <a:srgbClr val="CADCFC"/>
+          </a:solidFill>
+          <a:ln/>
+        </p:spPr>
+        <p:txBody>
+          <a:bodyPr lIns="45720" rIns="45720" anchor="ctr"/>
+          <a:lstStyle/>
+          <a:p>
+            <a:pPr algn="ctr">
+              <a:buNone/>
+            </a:pPr>
+            <a:r>
+              <a:rPr lang="fr-FR" sz="1500" b="1" dirty="0">
                 <a:solidFill>
                   <a:srgbClr val="1E2761"/>
                 </a:solidFill>
-                <a:latin typeface="Courier New" pitchFamily="34" charset="0"/>
-                <a:ea typeface="Courier New" pitchFamily="34" charset="-122"/>
-                <a:cs typeface="Courier New" pitchFamily="34" charset="-120"/>
-              </a:rPr>
-              <a:t>namenode</a:t>
-            </a:r>
-            <a:endParaRPr lang="en-US" sz="1300" dirty="0"/>
-          </a:p>
-        </p:txBody>
-      </p:sp>
-      <p:sp>
-        <p:nvSpPr>
-          <p:cNvPr id="6" name="sd-69"/>
-          <p:cNvSpPr txBox="1"/>
-          <p:nvPr/>
-        </p:nvSpPr>
-        <p:spPr>
-          <a:xfrm>
-            <a:off x="3337560" y="1463040"/>
-            <a:ext cx="3877056" cy="365760"/>
-          </a:xfrm>
-          <a:prstGeom prst="rect">
-            <a:avLst/>
-          </a:prstGeom>
-          <a:noFill/>
-          <a:ln/>
-        </p:spPr>
-        <p:txBody>
-          <a:bodyPr wrap="square" lIns="0" tIns="0" rIns="0" bIns="0" rtlCol="0" anchor="ctr"/>
-          <a:lstStyle/>
-          <a:p>
-            <a:pPr indent="0" marL="0">
-              <a:buNone/>
-            </a:pPr>
-            <a:r>
-              <a:rPr lang="en-US" sz="1200" dirty="0">
-                <a:solidFill>
-                  <a:srgbClr val="52514E"/>
-                </a:solidFill>
-              </a:rPr>
-              <a:t>l'annuaire HDFS : quel bloc, sur quelle machine</a:t>
-            </a:r>
-            <a:endParaRPr lang="en-US" sz="1200" dirty="0"/>
-          </a:p>
-        </p:txBody>
-      </p:sp>
-      <p:sp>
-        <p:nvSpPr>
-          <p:cNvPr id="7" name="carte-70"/>
+              </a:rPr>
+              <a:t>hive-metastore</a:t>
+            </a:r>
+          </a:p>
+        </p:txBody>
+      </p:sp>
+      <p:sp>
+        <p:nvSpPr>
+          <p:cNvPr id="44" name="leg-44"/>
+          <p:cNvSpPr txBox="1"/>
+          <p:nvPr/>
+        </p:nvSpPr>
+        <p:spPr>
+          <a:xfrm>
+            <a:off x="3394360" y="4580000"/>
+            <a:ext cx="2300000" cy="420000"/>
+          </a:xfrm>
+          <a:prstGeom prst="rect">
+            <a:avLst/>
+          </a:prstGeom>
+          <a:noFill/>
+          <a:ln/>
+        </p:spPr>
+        <p:txBody>
+          <a:bodyPr wrap="square" lIns="0" tIns="0" rIns="0" bIns="0" anchor="t"/>
+          <a:lstStyle/>
+          <a:p>
+            <a:pPr indent="0" marL="0" algn="ctr">
+              <a:buNone/>
+            </a:pPr>
+            <a:r>
+              <a:rPr lang="fr-FR" sz="1200" b="0" dirty="0">
+                <a:solidFill>
+                  <a:srgbClr val="353430"/>
+                </a:solidFill>
+              </a:rPr>
+              <a:t>le dictionnaire : tables, colonnes, partitions</a:t>
+            </a:r>
+          </a:p>
+        </p:txBody>
+      </p:sp>
+      <p:sp>
+        <p:nvSpPr>
+          <p:cNvPr id="45" name="fl-45"/>
           <p:cNvSpPr/>
           <p:nvPr/>
         </p:nvSpPr>
         <p:spPr>
           <a:xfrm>
-            <a:off x="594360" y="2029968"/>
-            <a:ext cx="6803136" cy="548640"/>
+            <a:off x="5804360" y="3910000"/>
+            <a:ext cx="380000" cy="240000"/>
+          </a:xfrm>
+          <a:prstGeom prst="rightArrow">
+            <a:avLst/>
+          </a:prstGeom>
+          <a:solidFill>
+            <a:srgbClr val="CADCFC"/>
+          </a:solidFill>
+          <a:ln/>
+        </p:spPr>
+        <p:txBody>
+          <a:bodyPr lIns="45720" rIns="45720" anchor="ctr"/>
+          <a:lstStyle/>
+          <a:p/>
+        </p:txBody>
+      </p:sp>
+      <p:sp>
+        <p:nvSpPr>
+          <p:cNvPr id="46" name="box-46"/>
+          <p:cNvSpPr/>
+          <p:nvPr/>
+        </p:nvSpPr>
+        <p:spPr>
+          <a:xfrm>
+            <a:off x="6194360" y="3580000"/>
+            <a:ext cx="2300000" cy="900000"/>
           </a:xfrm>
           <a:prstGeom prst="roundRect">
-            <a:avLst>
-              <a:gd name="adj" fmla="val 16667"/>
-            </a:avLst>
+            <a:avLst/>
           </a:prstGeom>
           <a:solidFill>
             <a:srgbClr val="FFFFFF"/>
           </a:solidFill>
           <a:ln w="12700">
             <a:solidFill>
-              <a:srgbClr val="E2E5EA"/>
+              <a:srgbClr val="353430"/>
             </a:solidFill>
-            <a:prstDash val="solid"/>
           </a:ln>
         </p:spPr>
-      </p:sp>
-      <p:sp>
-        <p:nvSpPr>
-          <p:cNvPr id="8" name="pt-71"/>
+        <p:txBody>
+          <a:bodyPr lIns="45720" rIns="45720" anchor="ctr"/>
+          <a:lstStyle/>
+          <a:p>
+            <a:pPr algn="ctr">
+              <a:buNone/>
+            </a:pPr>
+            <a:r>
+              <a:rPr lang="fr-FR" sz="1500" b="1" dirty="0">
+                <a:solidFill>
+                  <a:srgbClr val="1E2761"/>
+                </a:solidFill>
+              </a:rPr>
+              <a:t>postgresql</a:t>
+            </a:r>
+          </a:p>
+        </p:txBody>
+      </p:sp>
+      <p:sp>
+        <p:nvSpPr>
+          <p:cNvPr id="47" name="leg-47"/>
+          <p:cNvSpPr txBox="1"/>
+          <p:nvPr/>
+        </p:nvSpPr>
+        <p:spPr>
+          <a:xfrm>
+            <a:off x="6194360" y="4580000"/>
+            <a:ext cx="2300000" cy="420000"/>
+          </a:xfrm>
+          <a:prstGeom prst="rect">
+            <a:avLst/>
+          </a:prstGeom>
+          <a:noFill/>
+          <a:ln/>
+        </p:spPr>
+        <p:txBody>
+          <a:bodyPr wrap="square" lIns="0" tIns="0" rIns="0" bIns="0" anchor="t"/>
+          <a:lstStyle/>
+          <a:p>
+            <a:pPr indent="0" marL="0" algn="ctr">
+              <a:buNone/>
+            </a:pPr>
+            <a:r>
+              <a:rPr lang="fr-FR" sz="1200" b="0" dirty="0">
+                <a:solidFill>
+                  <a:srgbClr val="353430"/>
+                </a:solidFill>
+              </a:rPr>
+              <a:t>la base qui stocke ce dictionnaire</a:t>
+            </a:r>
+          </a:p>
+        </p:txBody>
+      </p:sp>
+      <p:sp>
+        <p:nvSpPr>
+          <p:cNvPr id="48" name="bande"/>
           <p:cNvSpPr/>
           <p:nvPr/>
         </p:nvSpPr>
         <p:spPr>
           <a:xfrm>
-            <a:off x="777240" y="2212848"/>
-            <a:ext cx="182880" cy="182880"/>
-          </a:xfrm>
-          <a:prstGeom prst="ellipse">
-            <a:avLst/>
-          </a:prstGeom>
-          <a:solidFill>
-            <a:srgbClr val="2A78D6"/>
-          </a:solidFill>
-          <a:ln w="12700">
-            <a:solidFill>
-              <a:srgbClr val="2A78D6"/>
-            </a:solidFill>
-            <a:prstDash val="solid"/>
-          </a:ln>
-        </p:spPr>
-      </p:sp>
-      <p:sp>
-        <p:nvSpPr>
-          <p:cNvPr id="9" name="sn-72"/>
-          <p:cNvSpPr txBox="1"/>
-          <p:nvPr/>
-        </p:nvSpPr>
-        <p:spPr>
-          <a:xfrm>
-            <a:off x="1051560" y="2121408"/>
-            <a:ext cx="2286000" cy="365760"/>
-          </a:xfrm>
-          <a:prstGeom prst="rect">
-            <a:avLst/>
-          </a:prstGeom>
-          <a:noFill/>
-          <a:ln/>
-        </p:spPr>
-        <p:txBody>
-          <a:bodyPr wrap="square" lIns="0" tIns="0" rIns="0" bIns="0" rtlCol="0" anchor="ctr"/>
-          <a:lstStyle/>
-          <a:p>
-            <a:pPr indent="0" marL="0">
-              <a:buNone/>
-            </a:pPr>
-            <a:r>
-              <a:rPr lang="en-US" sz="1300" b="1" dirty="0">
-                <a:solidFill>
-                  <a:srgbClr val="1E2761"/>
-                </a:solidFill>
-                <a:latin typeface="Courier New" pitchFamily="34" charset="0"/>
-                <a:ea typeface="Courier New" pitchFamily="34" charset="-122"/>
-                <a:cs typeface="Courier New" pitchFamily="34" charset="-120"/>
-              </a:rPr>
-              <a:t>datanode</a:t>
-            </a:r>
-            <a:endParaRPr lang="en-US" sz="1300" dirty="0"/>
-          </a:p>
-        </p:txBody>
-      </p:sp>
-      <p:sp>
-        <p:nvSpPr>
-          <p:cNvPr id="10" name="sd-73"/>
-          <p:cNvSpPr txBox="1"/>
-          <p:nvPr/>
-        </p:nvSpPr>
-        <p:spPr>
-          <a:xfrm>
-            <a:off x="3337560" y="2121408"/>
-            <a:ext cx="3877056" cy="365760"/>
-          </a:xfrm>
-          <a:prstGeom prst="rect">
-            <a:avLst/>
-          </a:prstGeom>
-          <a:noFill/>
-          <a:ln/>
-        </p:spPr>
-        <p:txBody>
-          <a:bodyPr wrap="square" lIns="0" tIns="0" rIns="0" bIns="0" rtlCol="0" anchor="ctr"/>
-          <a:lstStyle/>
-          <a:p>
-            <a:pPr indent="0" marL="0">
-              <a:buNone/>
-            </a:pPr>
-            <a:r>
-              <a:rPr lang="en-US" sz="1200" dirty="0">
-                <a:solidFill>
-                  <a:srgbClr val="52514E"/>
-                </a:solidFill>
-              </a:rPr>
-              <a:t>les blocs eux-mêmes, sur le disque</a:t>
-            </a:r>
-            <a:endParaRPr lang="en-US" sz="1200" dirty="0"/>
-          </a:p>
-        </p:txBody>
-      </p:sp>
-      <p:sp>
-        <p:nvSpPr>
-          <p:cNvPr id="11" name="carte-74"/>
-          <p:cNvSpPr/>
-          <p:nvPr/>
-        </p:nvSpPr>
-        <p:spPr>
-          <a:xfrm>
-            <a:off x="594360" y="2688336"/>
-            <a:ext cx="6803136" cy="548640"/>
+            <a:off x="594360" y="5120000"/>
+            <a:ext cx="11003280" cy="800000"/>
           </a:xfrm>
           <a:prstGeom prst="roundRect">
-            <a:avLst>
-              <a:gd name="adj" fmla="val 16667"/>
-            </a:avLst>
+            <a:avLst/>
           </a:prstGeom>
           <a:solidFill>
             <a:srgbClr val="FFFFFF"/>
           </a:solidFill>
-          <a:ln w="12700">
-            <a:solidFill>
-              <a:srgbClr val="E2E5EA"/>
-            </a:solidFill>
-            <a:prstDash val="solid"/>
-          </a:ln>
-        </p:spPr>
-      </p:sp>
-      <p:sp>
-        <p:nvSpPr>
-          <p:cNvPr id="12" name="pt-75"/>
-          <p:cNvSpPr/>
-          <p:nvPr/>
-        </p:nvSpPr>
-        <p:spPr>
-          <a:xfrm>
-            <a:off x="777240" y="2871216"/>
-            <a:ext cx="182880" cy="182880"/>
-          </a:xfrm>
-          <a:prstGeom prst="ellipse">
-            <a:avLst/>
-          </a:prstGeom>
-          <a:solidFill>
-            <a:srgbClr val="1BAF7A"/>
-          </a:solidFill>
-          <a:ln w="12700">
-            <a:solidFill>
-              <a:srgbClr val="1BAF7A"/>
-            </a:solidFill>
-            <a:prstDash val="solid"/>
-          </a:ln>
-        </p:spPr>
-      </p:sp>
-      <p:sp>
-        <p:nvSpPr>
-          <p:cNvPr id="13" name="sn-76"/>
-          <p:cNvSpPr txBox="1"/>
-          <p:nvPr/>
-        </p:nvSpPr>
-        <p:spPr>
-          <a:xfrm>
-            <a:off x="1051560" y="2779776"/>
-            <a:ext cx="2286000" cy="365760"/>
-          </a:xfrm>
-          <a:prstGeom prst="rect">
-            <a:avLst/>
-          </a:prstGeom>
-          <a:noFill/>
-          <a:ln/>
-        </p:spPr>
-        <p:txBody>
-          <a:bodyPr wrap="square" lIns="0" tIns="0" rIns="0" bIns="0" rtlCol="0" anchor="ctr"/>
-          <a:lstStyle/>
-          <a:p>
-            <a:pPr indent="0" marL="0">
-              <a:buNone/>
-            </a:pPr>
-            <a:r>
-              <a:rPr lang="en-US" sz="1300" b="1" dirty="0">
-                <a:solidFill>
-                  <a:srgbClr val="1E2761"/>
-                </a:solidFill>
-                <a:latin typeface="Courier New" pitchFamily="34" charset="0"/>
-                <a:ea typeface="Courier New" pitchFamily="34" charset="-122"/>
-                <a:cs typeface="Courier New" pitchFamily="34" charset="-120"/>
-              </a:rPr>
-              <a:t>hive-server</a:t>
-            </a:r>
-            <a:endParaRPr lang="en-US" sz="1300" dirty="0"/>
-          </a:p>
-        </p:txBody>
-      </p:sp>
-      <p:sp>
-        <p:nvSpPr>
-          <p:cNvPr id="14" name="sd-77"/>
-          <p:cNvSpPr txBox="1"/>
-          <p:nvPr/>
-        </p:nvSpPr>
-        <p:spPr>
-          <a:xfrm>
-            <a:off x="3337560" y="2779776"/>
-            <a:ext cx="3877056" cy="365760"/>
-          </a:xfrm>
-          <a:prstGeom prst="rect">
-            <a:avLst/>
-          </a:prstGeom>
-          <a:noFill/>
-          <a:ln/>
-        </p:spPr>
-        <p:txBody>
-          <a:bodyPr wrap="square" lIns="0" tIns="0" rIns="0" bIns="0" rtlCol="0" anchor="ctr"/>
-          <a:lstStyle/>
-          <a:p>
-            <a:pPr indent="0" marL="0">
-              <a:buNone/>
-            </a:pPr>
-            <a:r>
-              <a:rPr lang="en-US" sz="1200" dirty="0">
-                <a:solidFill>
-                  <a:srgbClr val="52514E"/>
-                </a:solidFill>
-              </a:rPr>
-              <a:t>HiveServer2 — reçoit les requêtes SQL, port 10000</a:t>
-            </a:r>
-            <a:endParaRPr lang="en-US" sz="1200" dirty="0"/>
-          </a:p>
-        </p:txBody>
-      </p:sp>
-      <p:sp>
-        <p:nvSpPr>
-          <p:cNvPr id="15" name="carte-78"/>
-          <p:cNvSpPr/>
-          <p:nvPr/>
-        </p:nvSpPr>
-        <p:spPr>
-          <a:xfrm>
-            <a:off x="594360" y="3346704"/>
-            <a:ext cx="6803136" cy="548640"/>
-          </a:xfrm>
-          <a:prstGeom prst="roundRect">
-            <a:avLst>
-              <a:gd name="adj" fmla="val 16667"/>
-            </a:avLst>
-          </a:prstGeom>
-          <a:solidFill>
-            <a:srgbClr val="FFFFFF"/>
-          </a:solidFill>
-          <a:ln w="12700">
-            <a:solidFill>
-              <a:srgbClr val="E2E5EA"/>
-            </a:solidFill>
-            <a:prstDash val="solid"/>
-          </a:ln>
-        </p:spPr>
-      </p:sp>
-      <p:sp>
-        <p:nvSpPr>
-          <p:cNvPr id="16" name="pt-79"/>
-          <p:cNvSpPr/>
-          <p:nvPr/>
-        </p:nvSpPr>
-        <p:spPr>
-          <a:xfrm>
-            <a:off x="777240" y="3529584"/>
-            <a:ext cx="182880" cy="182880"/>
-          </a:xfrm>
-          <a:prstGeom prst="ellipse">
-            <a:avLst/>
-          </a:prstGeom>
-          <a:solidFill>
-            <a:srgbClr val="1BAF7A"/>
-          </a:solidFill>
-          <a:ln w="12700">
-            <a:solidFill>
-              <a:srgbClr val="1BAF7A"/>
-            </a:solidFill>
-            <a:prstDash val="solid"/>
-          </a:ln>
-        </p:spPr>
-      </p:sp>
-      <p:sp>
-        <p:nvSpPr>
-          <p:cNvPr id="17" name="sn-80"/>
-          <p:cNvSpPr txBox="1"/>
-          <p:nvPr/>
-        </p:nvSpPr>
-        <p:spPr>
-          <a:xfrm>
-            <a:off x="1051560" y="3438144"/>
-            <a:ext cx="2286000" cy="365760"/>
-          </a:xfrm>
-          <a:prstGeom prst="rect">
-            <a:avLst/>
-          </a:prstGeom>
-          <a:noFill/>
-          <a:ln/>
-        </p:spPr>
-        <p:txBody>
-          <a:bodyPr wrap="square" lIns="0" tIns="0" rIns="0" bIns="0" rtlCol="0" anchor="ctr"/>
-          <a:lstStyle/>
-          <a:p>
-            <a:pPr indent="0" marL="0">
-              <a:buNone/>
-            </a:pPr>
-            <a:r>
-              <a:rPr lang="en-US" sz="1300" b="1" dirty="0">
-                <a:solidFill>
-                  <a:srgbClr val="1E2761"/>
-                </a:solidFill>
-                <a:latin typeface="Courier New" pitchFamily="34" charset="0"/>
-                <a:ea typeface="Courier New" pitchFamily="34" charset="-122"/>
-                <a:cs typeface="Courier New" pitchFamily="34" charset="-120"/>
-              </a:rPr>
-              <a:t>hive-metastore</a:t>
-            </a:r>
-            <a:endParaRPr lang="en-US" sz="1300" dirty="0"/>
-          </a:p>
-        </p:txBody>
-      </p:sp>
-      <p:sp>
-        <p:nvSpPr>
-          <p:cNvPr id="18" name="sd-81"/>
-          <p:cNvSpPr txBox="1"/>
-          <p:nvPr/>
-        </p:nvSpPr>
-        <p:spPr>
-          <a:xfrm>
-            <a:off x="3337560" y="3438144"/>
-            <a:ext cx="3877056" cy="365760"/>
-          </a:xfrm>
-          <a:prstGeom prst="rect">
-            <a:avLst/>
-          </a:prstGeom>
-          <a:noFill/>
-          <a:ln/>
-        </p:spPr>
-        <p:txBody>
-          <a:bodyPr wrap="square" lIns="0" tIns="0" rIns="0" bIns="0" rtlCol="0" anchor="ctr"/>
-          <a:lstStyle/>
-          <a:p>
-            <a:pPr indent="0" marL="0">
-              <a:buNone/>
-            </a:pPr>
-            <a:r>
-              <a:rPr lang="en-US" sz="1200" dirty="0">
-                <a:solidFill>
-                  <a:srgbClr val="52514E"/>
-                </a:solidFill>
-              </a:rPr>
-              <a:t>le dictionnaire : tables, colonnes, partitions</a:t>
-            </a:r>
-            <a:endParaRPr lang="en-US" sz="1200" dirty="0"/>
-          </a:p>
-        </p:txBody>
-      </p:sp>
-      <p:sp>
-        <p:nvSpPr>
-          <p:cNvPr id="19" name="carte-82"/>
-          <p:cNvSpPr/>
-          <p:nvPr/>
-        </p:nvSpPr>
-        <p:spPr>
-          <a:xfrm>
-            <a:off x="594360" y="4005072"/>
-            <a:ext cx="6803136" cy="548640"/>
-          </a:xfrm>
-          <a:prstGeom prst="roundRect">
-            <a:avLst>
-              <a:gd name="adj" fmla="val 16667"/>
-            </a:avLst>
-          </a:prstGeom>
-          <a:solidFill>
-            <a:srgbClr val="FFFFFF"/>
-          </a:solidFill>
-          <a:ln w="12700">
-            <a:solidFill>
-              <a:srgbClr val="E2E5EA"/>
-            </a:solidFill>
-            <a:prstDash val="solid"/>
-          </a:ln>
-        </p:spPr>
-      </p:sp>
-      <p:sp>
-        <p:nvSpPr>
-          <p:cNvPr id="20" name="pt-83"/>
-          <p:cNvSpPr/>
-          <p:nvPr/>
-        </p:nvSpPr>
-        <p:spPr>
-          <a:xfrm>
-            <a:off x="777240" y="4187952"/>
-            <a:ext cx="182880" cy="182880"/>
-          </a:xfrm>
-          <a:prstGeom prst="ellipse">
-            <a:avLst/>
-          </a:prstGeom>
-          <a:solidFill>
-            <a:srgbClr val="1BAF7A"/>
-          </a:solidFill>
-          <a:ln w="12700">
-            <a:solidFill>
-              <a:srgbClr val="1BAF7A"/>
-            </a:solidFill>
-            <a:prstDash val="solid"/>
-          </a:ln>
-        </p:spPr>
-      </p:sp>
-      <p:sp>
-        <p:nvSpPr>
-          <p:cNvPr id="21" name="sn-84"/>
-          <p:cNvSpPr txBox="1"/>
-          <p:nvPr/>
-        </p:nvSpPr>
-        <p:spPr>
-          <a:xfrm>
-            <a:off x="1051560" y="4096512"/>
-            <a:ext cx="2286000" cy="365760"/>
-          </a:xfrm>
-          <a:prstGeom prst="rect">
-            <a:avLst/>
-          </a:prstGeom>
-          <a:noFill/>
-          <a:ln/>
-        </p:spPr>
-        <p:txBody>
-          <a:bodyPr wrap="square" lIns="0" tIns="0" rIns="0" bIns="0" rtlCol="0" anchor="ctr"/>
-          <a:lstStyle/>
-          <a:p>
-            <a:pPr indent="0" marL="0">
-              <a:buNone/>
-            </a:pPr>
-            <a:r>
-              <a:rPr lang="en-US" sz="1300" b="1" dirty="0">
-                <a:solidFill>
-                  <a:srgbClr val="1E2761"/>
-                </a:solidFill>
-                <a:latin typeface="Courier New" pitchFamily="34" charset="0"/>
-                <a:ea typeface="Courier New" pitchFamily="34" charset="-122"/>
-                <a:cs typeface="Courier New" pitchFamily="34" charset="-120"/>
-              </a:rPr>
-              <a:t>hive-metastore-postgresql</a:t>
-            </a:r>
-            <a:endParaRPr lang="en-US" sz="1300" dirty="0"/>
-          </a:p>
-        </p:txBody>
-      </p:sp>
-      <p:sp>
-        <p:nvSpPr>
-          <p:cNvPr id="22" name="sd-85"/>
-          <p:cNvSpPr txBox="1"/>
-          <p:nvPr/>
-        </p:nvSpPr>
-        <p:spPr>
-          <a:xfrm>
-            <a:off x="3337560" y="4096512"/>
-            <a:ext cx="3877056" cy="365760"/>
-          </a:xfrm>
-          <a:prstGeom prst="rect">
-            <a:avLst/>
-          </a:prstGeom>
-          <a:noFill/>
-          <a:ln/>
-        </p:spPr>
-        <p:txBody>
-          <a:bodyPr wrap="square" lIns="0" tIns="0" rIns="0" bIns="0" rtlCol="0" anchor="ctr"/>
-          <a:lstStyle/>
-          <a:p>
-            <a:pPr indent="0" marL="0">
-              <a:buNone/>
-            </a:pPr>
-            <a:r>
-              <a:rPr lang="en-US" sz="1200" dirty="0">
-                <a:solidFill>
-                  <a:srgbClr val="52514E"/>
-                </a:solidFill>
-              </a:rPr>
-              <a:t>la base qui stocke ce dictionnaire</a:t>
-            </a:r>
-            <a:endParaRPr lang="en-US" sz="1200" dirty="0"/>
-          </a:p>
-        </p:txBody>
-      </p:sp>
-      <p:sp>
-        <p:nvSpPr>
-          <p:cNvPr id="23" name="carte-86"/>
-          <p:cNvSpPr/>
-          <p:nvPr/>
-        </p:nvSpPr>
-        <p:spPr>
-          <a:xfrm>
-            <a:off x="7726680" y="1371600"/>
-            <a:ext cx="3840480" cy="3017520"/>
-          </a:xfrm>
-          <a:prstGeom prst="roundRect">
-            <a:avLst>
-              <a:gd name="adj" fmla="val 3030"/>
-            </a:avLst>
-          </a:prstGeom>
-          <a:solidFill>
-            <a:srgbClr val="F2F5FC"/>
-          </a:solidFill>
-          <a:ln w="12700">
-            <a:solidFill>
-              <a:srgbClr val="F2F5FC"/>
-            </a:solidFill>
-            <a:prstDash val="solid"/>
-          </a:ln>
-        </p:spPr>
-      </p:sp>
-      <p:sp>
-        <p:nvSpPr>
-          <p:cNvPr id="24" name="Text 22"/>
-          <p:cNvSpPr txBox="1"/>
-          <p:nvPr/>
-        </p:nvSpPr>
-        <p:spPr>
-          <a:xfrm>
-            <a:off x="8001000" y="1554480"/>
-            <a:ext cx="3291840" cy="365760"/>
-          </a:xfrm>
-          <a:prstGeom prst="rect">
-            <a:avLst/>
-          </a:prstGeom>
-          <a:noFill/>
-          <a:ln/>
-        </p:spPr>
-        <p:txBody>
-          <a:bodyPr wrap="square" lIns="0" tIns="0" rIns="0" bIns="0" rtlCol="0" anchor="ctr"/>
-          <a:lstStyle/>
-          <a:p>
-            <a:pPr indent="0" marL="0">
-              <a:buNone/>
-            </a:pPr>
-            <a:r>
-              <a:rPr lang="en-US" sz="1500" b="1" dirty="0">
-                <a:solidFill>
-                  <a:srgbClr val="1E2761"/>
-                </a:solidFill>
-              </a:rPr>
-              <a:t>Pourquoi Docker</a:t>
-            </a:r>
-            <a:endParaRPr lang="en-US" sz="1500" dirty="0"/>
-          </a:p>
-        </p:txBody>
-      </p:sp>
-      <p:sp>
-        <p:nvSpPr>
-          <p:cNvPr id="25" name="Text 23"/>
-          <p:cNvSpPr txBox="1"/>
-          <p:nvPr/>
-        </p:nvSpPr>
-        <p:spPr>
-          <a:xfrm>
-            <a:off x="8001000" y="1965960"/>
-            <a:ext cx="3291840" cy="1463040"/>
-          </a:xfrm>
-          <a:prstGeom prst="rect">
-            <a:avLst/>
-          </a:prstGeom>
-          <a:noFill/>
-          <a:ln/>
-        </p:spPr>
-        <p:txBody>
-          <a:bodyPr wrap="square" lIns="0" tIns="0" rIns="0" bIns="0" rtlCol="0" anchor="t"/>
-          <a:lstStyle/>
-          <a:p>
-            <a:pPr indent="0" marL="0">
-              <a:lnSpc>
-                <a:spcPct val="115000"/>
-              </a:lnSpc>
-              <a:buNone/>
-            </a:pPr>
-            <a:r>
-              <a:rPr lang="en-US" sz="1300" dirty="0">
+          <a:ln/>
+        </p:spPr>
+        <p:txBody>
+          <a:bodyPr lIns="45720" rIns="45720" anchor="ctr"/>
+          <a:lstStyle/>
+          <a:p/>
+        </p:txBody>
+      </p:sp>
+      <p:sp>
+        <p:nvSpPr>
+          <p:cNvPr id="49" name="bande-txt"/>
+          <p:cNvSpPr txBox="1"/>
+          <p:nvPr/>
+        </p:nvSpPr>
+        <p:spPr>
+          <a:xfrm>
+            <a:off x="868680" y="5230000"/>
+            <a:ext cx="10454640" cy="580000"/>
+          </a:xfrm>
+          <a:prstGeom prst="rect">
+            <a:avLst/>
+          </a:prstGeom>
+          <a:noFill/>
+          <a:ln/>
+        </p:spPr>
+        <p:txBody>
+          <a:bodyPr wrap="square" lIns="0" tIns="0" rIns="0" bIns="0" anchor="ctr"/>
+          <a:lstStyle/>
+          <a:p>
+            <a:pPr indent="0" marL="0" algn="l">
+              <a:buNone/>
+            </a:pPr>
+            <a:r>
+              <a:rPr lang="fr-FR" sz="1350" b="0" dirty="0">
                 <a:solidFill>
                   <a:srgbClr val="1A1A1A"/>
                 </a:solidFill>
               </a:rPr>
-              <a:t>Installer Hadoop et Hive à la main sous Windows demande Java, des variables d'environnement et SSH.</a:t>
-            </a:r>
-            <a:endParaRPr lang="en-US" sz="1300" dirty="0"/>
-          </a:p>
-          <a:p>
-            <a:pPr indent="0" marL="0">
-              <a:lnSpc>
-                <a:spcPct val="115000"/>
-              </a:lnSpc>
-              <a:buNone/>
-            </a:pPr>
-            <a:endParaRPr lang="en-US" sz="1300" dirty="0"/>
-          </a:p>
-          <a:p>
-            <a:pPr indent="0" marL="0">
-              <a:lnSpc>
-                <a:spcPct val="115000"/>
-              </a:lnSpc>
-              <a:buNone/>
-            </a:pPr>
-            <a:r>
-              <a:rPr lang="en-US" sz="1300" b="1" dirty="0">
-                <a:solidFill>
-                  <a:srgbClr val="1E2761"/>
-                </a:solidFill>
-              </a:rPr>
-              <a:t>Surtout : le même environnement pour tout le groupe.</a:t>
-            </a:r>
-            <a:endParaRPr lang="en-US" sz="1300" dirty="0"/>
-          </a:p>
-        </p:txBody>
-      </p:sp>
-      <p:sp>
-        <p:nvSpPr>
-          <p:cNvPr id="26" name="Text 24"/>
-          <p:cNvSpPr txBox="1"/>
-          <p:nvPr/>
-        </p:nvSpPr>
-        <p:spPr>
-          <a:xfrm>
-            <a:off x="8001000" y="3520440"/>
-            <a:ext cx="3291840" cy="777240"/>
-          </a:xfrm>
-          <a:prstGeom prst="rect">
-            <a:avLst/>
-          </a:prstGeom>
-          <a:noFill/>
-          <a:ln/>
-        </p:spPr>
-        <p:txBody>
-          <a:bodyPr wrap="square" lIns="0" tIns="0" rIns="0" bIns="0" rtlCol="0" anchor="t"/>
-          <a:lstStyle/>
-          <a:p>
-            <a:pPr indent="0" marL="0">
-              <a:lnSpc>
-                <a:spcPct val="110000"/>
-              </a:lnSpc>
-              <a:buNone/>
-            </a:pPr>
-            <a:r>
-              <a:rPr lang="en-US" sz="1150" b="1" dirty="0">
-                <a:solidFill>
-                  <a:srgbClr val="EB6834"/>
-                </a:solidFill>
-              </a:rPr>
-              <a:t>HiveServer2 est en mode NOSASL</a:t>
-            </a:r>
-            <a:endParaRPr lang="en-US" sz="1150" dirty="0"/>
-          </a:p>
-          <a:p>
-            <a:pPr indent="0" marL="0">
-              <a:lnSpc>
-                <a:spcPct val="110000"/>
-              </a:lnSpc>
-              <a:buNone/>
-            </a:pPr>
-            <a:r>
-              <a:rPr lang="en-US" sz="1150" dirty="0">
-                <a:solidFill>
-                  <a:srgbClr val="52514E"/>
-                </a:solidFill>
-              </a:rPr>
-              <a:t>Le module Python sasl exige un compilateur C++ sous Windows. Acceptable en TP, inacceptable en production.</a:t>
-            </a:r>
-            <a:endParaRPr lang="en-US" sz="1150" dirty="0"/>
+              <a:t>Cinq conteneurs Docker sur une seule machine : le même environnement pour tout le groupe. Un seul DataNode, donc réplication à 1 — nous démontrons le fonctionnement, pas la tolérance aux pannes.</a:t>
+            </a:r>
           </a:p>
         </p:txBody>
       </p:sp>
@@ -13625,9 +16249,9 @@
           <a:bodyPr/>
           <a:lstStyle>
             <a:lvl1pPr>
-              <a:defRPr sz="1000">
-                <a:solidFill>
-                  <a:srgbClr val="52514E"/>
+              <a:defRPr sz="1200">
+                <a:solidFill>
+                  <a:srgbClr val="353430"/>
                 </a:solidFill>
               </a:defRPr>
             </a:lvl1pPr>
@@ -13647,6 +16271,9 @@
   <p:clrMapOvr>
     <a:masterClrMapping/>
   </p:clrMapOvr>
+  <p:transition spd="med" advClick="1">
+    <p:fade/>
+  </p:transition>
 </p:sld>
 </file>
 
@@ -13752,11 +16379,11 @@
             </a:avLst>
           </a:prstGeom>
           <a:solidFill>
-            <a:srgbClr val="52514E"/>
+            <a:srgbClr val="353430"/>
           </a:solidFill>
           <a:ln w="12700">
             <a:solidFill>
-              <a:srgbClr val="52514E"/>
+              <a:srgbClr val="353430"/>
             </a:solidFill>
             <a:prstDash val="solid"/>
           </a:ln>
@@ -13787,14 +16414,14 @@
               <a:buNone/>
             </a:pPr>
             <a:r>
-              <a:rPr lang="en-US" sz="1400" b="1" dirty="0">
+              <a:rPr lang="en-US" sz="1500" b="1" dirty="0">
                 <a:solidFill>
                   <a:srgbClr val="FFFFFF"/>
                 </a:solidFill>
               </a:rPr>
               <a:t>raw</a:t>
             </a:r>
-            <a:endParaRPr lang="en-US" sz="1400" dirty="0"/>
+            <a:endParaRPr lang="en-US" sz="1500" dirty="0"/>
           </a:p>
         </p:txBody>
       </p:sp>
@@ -13823,7 +16450,7 @@
               <a:buNone/>
             </a:pPr>
             <a:r>
-              <a:rPr lang="en-US" sz="1200" dirty="0">
+              <a:rPr lang="en-US" sz="1350" dirty="0">
                 <a:solidFill>
                   <a:srgbClr val="1E2761"/>
                 </a:solidFill>
@@ -13833,7 +16460,7 @@
               </a:rPr>
               <a:t>/datalake/raw/transactions/</a:t>
             </a:r>
-            <a:endParaRPr lang="en-US" sz="1200" dirty="0"/>
+            <a:endParaRPr lang="en-US" sz="1350" dirty="0"/>
           </a:p>
         </p:txBody>
       </p:sp>
@@ -13862,14 +16489,14 @@
               <a:buNone/>
             </a:pPr>
             <a:r>
-              <a:rPr lang="en-US" sz="1250" dirty="0">
-                <a:solidFill>
-                  <a:srgbClr val="52514E"/>
+              <a:rPr lang="en-US" sz="1400" dirty="0">
+                <a:solidFill>
+                  <a:srgbClr val="353430"/>
                 </a:solidFill>
               </a:rPr>
               <a:t>Les données sources, jamais modifiées. Référence commune aux huit groupes.</a:t>
             </a:r>
-            <a:endParaRPr lang="en-US" sz="1250" dirty="0"/>
+            <a:endParaRPr lang="en-US" sz="1400" dirty="0"/>
           </a:p>
         </p:txBody>
       </p:sp>
@@ -13952,14 +16579,14 @@
               <a:buNone/>
             </a:pPr>
             <a:r>
-              <a:rPr lang="en-US" sz="1400" b="1" dirty="0">
+              <a:rPr lang="en-US" sz="1500" b="1" dirty="0">
                 <a:solidFill>
                   <a:srgbClr val="FFFFFF"/>
                 </a:solidFill>
               </a:rPr>
               <a:t>processed</a:t>
             </a:r>
-            <a:endParaRPr lang="en-US" sz="1400" dirty="0"/>
+            <a:endParaRPr lang="en-US" sz="1500" dirty="0"/>
           </a:p>
         </p:txBody>
       </p:sp>
@@ -13988,7 +16615,7 @@
               <a:buNone/>
             </a:pPr>
             <a:r>
-              <a:rPr lang="en-US" sz="1200" dirty="0">
+              <a:rPr lang="en-US" sz="1350" dirty="0">
                 <a:solidFill>
                   <a:srgbClr val="1E2761"/>
                 </a:solidFill>
@@ -13998,7 +16625,7 @@
               </a:rPr>
               <a:t>/datalake/processed/</a:t>
             </a:r>
-            <a:endParaRPr lang="en-US" sz="1200" dirty="0"/>
+            <a:endParaRPr lang="en-US" sz="1350" dirty="0"/>
           </a:p>
         </p:txBody>
       </p:sp>
@@ -14027,14 +16654,14 @@
               <a:buNone/>
             </a:pPr>
             <a:r>
-              <a:rPr lang="en-US" sz="1250" dirty="0">
-                <a:solidFill>
-                  <a:srgbClr val="52514E"/>
+              <a:rPr lang="en-US" sz="1400" dirty="0">
+                <a:solidFill>
+                  <a:srgbClr val="353430"/>
                 </a:solidFill>
               </a:rPr>
               <a:t>Les données retravaillées : notre table ORC partitionnée.</a:t>
             </a:r>
-            <a:endParaRPr lang="en-US" sz="1250" dirty="0"/>
+            <a:endParaRPr lang="en-US" sz="1400" dirty="0"/>
           </a:p>
         </p:txBody>
       </p:sp>
@@ -14117,14 +16744,14 @@
               <a:buNone/>
             </a:pPr>
             <a:r>
-              <a:rPr lang="en-US" sz="1400" b="1" dirty="0">
+              <a:rPr lang="en-US" sz="1500" b="1" dirty="0">
                 <a:solidFill>
                   <a:srgbClr val="FFFFFF"/>
                 </a:solidFill>
               </a:rPr>
               <a:t>results</a:t>
             </a:r>
-            <a:endParaRPr lang="en-US" sz="1400" dirty="0"/>
+            <a:endParaRPr lang="en-US" sz="1500" dirty="0"/>
           </a:p>
         </p:txBody>
       </p:sp>
@@ -14153,7 +16780,7 @@
               <a:buNone/>
             </a:pPr>
             <a:r>
-              <a:rPr lang="en-US" sz="1200" dirty="0">
+              <a:rPr lang="en-US" sz="1350" dirty="0">
                 <a:solidFill>
                   <a:srgbClr val="1E2761"/>
                 </a:solidFill>
@@ -14163,7 +16790,7 @@
               </a:rPr>
               <a:t>/datalake/results/hive/</a:t>
             </a:r>
-            <a:endParaRPr lang="en-US" sz="1200" dirty="0"/>
+            <a:endParaRPr lang="en-US" sz="1350" dirty="0"/>
           </a:p>
         </p:txBody>
       </p:sp>
@@ -14192,14 +16819,14 @@
               <a:buNone/>
             </a:pPr>
             <a:r>
-              <a:rPr lang="en-US" sz="1250" dirty="0">
-                <a:solidFill>
-                  <a:srgbClr val="52514E"/>
+              <a:rPr lang="en-US" sz="1400" dirty="0">
+                <a:solidFill>
+                  <a:srgbClr val="353430"/>
                 </a:solidFill>
               </a:rPr>
               <a:t>Les livrables destinés au groupe suivant. Douze résultats y sont déposés.</a:t>
             </a:r>
-            <a:endParaRPr lang="en-US" sz="1250" dirty="0"/>
+            <a:endParaRPr lang="en-US" sz="1400" dirty="0"/>
           </a:p>
         </p:txBody>
       </p:sp>
@@ -14228,14 +16855,14 @@
               <a:buNone/>
             </a:pPr>
             <a:r>
-              <a:rPr lang="en-US" sz="1300" i="1" dirty="0">
-                <a:solidFill>
-                  <a:srgbClr val="52514E"/>
-                </a:solidFill>
-              </a:rPr>
-              <a:t>Cette arborescence est celle imposée au Groupe 2. Nous l'avons recréée faute de livraison, en respectant sa structure à la lettre.</a:t>
-            </a:r>
-            <a:endParaRPr lang="en-US" sz="1300" dirty="0"/>
+              <a:rPr lang="en-US" sz="1400" i="1" dirty="0">
+                <a:solidFill>
+                  <a:srgbClr val="353430"/>
+                </a:solidFill>
+              </a:rPr>
+              <a:t>Cette arborescence est celle imposée au Groupe 2. Nous l'avons recréée faute de livraison — le livrable du Groupe 5 emploie exactement les mêmes chemins, ce qui confirme la structure.</a:t>
+            </a:r>
+            <a:endParaRPr lang="en-US" sz="1400" dirty="0"/>
           </a:p>
         </p:txBody>
       </p:sp>
@@ -14267,9 +16894,9 @@
           <a:bodyPr/>
           <a:lstStyle>
             <a:lvl1pPr>
-              <a:defRPr sz="1000">
-                <a:solidFill>
-                  <a:srgbClr val="52514E"/>
+              <a:defRPr sz="1200">
+                <a:solidFill>
+                  <a:srgbClr val="353430"/>
                 </a:solidFill>
               </a:defRPr>
             </a:lvl1pPr>
@@ -14289,6 +16916,9 @@
   <p:clrMapOvr>
     <a:masterClrMapping/>
   </p:clrMapOvr>
+  <p:transition spd="med" advClick="1">
+    <p:fade/>
+  </p:transition>
 </p:sld>
 </file>
 
@@ -14386,7 +17016,7 @@
                       <a:pPr indent="0" marL="0">
                         <a:buNone/>
                       </a:pPr>
-                      <a:endParaRPr lang="en-US" sz="1300" dirty="0"/>
+                      <a:endParaRPr lang="en-US" sz="1400" dirty="0"/>
                     </a:p>
                   </a:txBody>
                   <a:tcPr marL="91440" marR="91440" marT="45720" marB="45720" anchor="ctr">
@@ -14440,14 +17070,14 @@
                         <a:buNone/>
                       </a:pPr>
                       <a:r>
-                        <a:rPr lang="en-US" sz="1300" b="1" dirty="0">
+                        <a:rPr lang="en-US" sz="1400" b="1" dirty="0">
                           <a:solidFill>
                             <a:srgbClr val="FFFFFF"/>
                           </a:solidFill>
                         </a:rPr>
                         <a:t>Base relationnelle</a:t>
                       </a:r>
-                      <a:endParaRPr lang="en-US" sz="1300" dirty="0"/>
+                      <a:endParaRPr lang="en-US" sz="1400" dirty="0"/>
                     </a:p>
                   </a:txBody>
                   <a:tcPr marL="91440" marR="91440" marT="45720" marB="45720" anchor="ctr">
@@ -14501,14 +17131,14 @@
                         <a:buNone/>
                       </a:pPr>
                       <a:r>
-                        <a:rPr lang="en-US" sz="1300" b="1" dirty="0">
+                        <a:rPr lang="en-US" sz="1400" b="1" dirty="0">
                           <a:solidFill>
                             <a:srgbClr val="FFFFFF"/>
                           </a:solidFill>
                         </a:rPr>
                         <a:t>Hive</a:t>
                       </a:r>
-                      <a:endParaRPr lang="en-US" sz="1300" dirty="0"/>
+                      <a:endParaRPr lang="en-US" sz="1400" dirty="0"/>
                     </a:p>
                   </a:txBody>
                   <a:tcPr marL="91440" marR="91440" marT="45720" marB="45720" anchor="ctr">
@@ -14564,14 +17194,14 @@
                         <a:buNone/>
                       </a:pPr>
                       <a:r>
-                        <a:rPr lang="en-US" sz="1300" b="1" dirty="0">
+                        <a:rPr lang="en-US" sz="1400" b="1" dirty="0">
                           <a:solidFill>
                             <a:srgbClr val="1A1A1A"/>
                           </a:solidFill>
                         </a:rPr>
                         <a:t>Les données vivent</a:t>
                       </a:r>
-                      <a:endParaRPr lang="en-US" sz="1300" dirty="0"/>
+                      <a:endParaRPr lang="en-US" sz="1400" dirty="0"/>
                     </a:p>
                   </a:txBody>
                   <a:tcPr marL="91440" marR="91440" marT="45720" marB="45720" anchor="ctr">
@@ -14625,14 +17255,14 @@
                         <a:buNone/>
                       </a:pPr>
                       <a:r>
-                        <a:rPr lang="en-US" sz="1300" dirty="0">
+                        <a:rPr lang="en-US" sz="1400" dirty="0">
                           <a:solidFill>
                             <a:srgbClr val="1A1A1A"/>
                           </a:solidFill>
                         </a:rPr>
                         <a:t>dans la base</a:t>
                       </a:r>
-                      <a:endParaRPr lang="en-US" sz="1300" dirty="0"/>
+                      <a:endParaRPr lang="en-US" sz="1400" dirty="0"/>
                     </a:p>
                   </a:txBody>
                   <a:tcPr marL="91440" marR="91440" marT="45720" marB="45720" anchor="ctr">
@@ -14686,14 +17316,14 @@
                         <a:buNone/>
                       </a:pPr>
                       <a:r>
-                        <a:rPr lang="en-US" sz="1300" dirty="0">
+                        <a:rPr lang="en-US" sz="1400" dirty="0">
                           <a:solidFill>
                             <a:srgbClr val="1E2761"/>
                           </a:solidFill>
                         </a:rPr>
                         <a:t>dans HDFS, fichiers ordinaires</a:t>
                       </a:r>
-                      <a:endParaRPr lang="en-US" sz="1300" dirty="0"/>
+                      <a:endParaRPr lang="en-US" sz="1400" dirty="0"/>
                     </a:p>
                   </a:txBody>
                   <a:tcPr marL="91440" marR="91440" marT="45720" marB="45720" anchor="ctr">
@@ -14734,7 +17364,7 @@
                       <a:tailEnd type="none" w="med" len="med"/>
                     </a:lnB>
                     <a:solidFill>
-                      <a:srgbClr val="F2F5FC"/>
+                      <a:srgbClr val="FFFFFF"/>
                     </a:solidFill>
                   </a:tcPr>
                 </a:tc>
@@ -14749,14 +17379,14 @@
                         <a:buNone/>
                       </a:pPr>
                       <a:r>
-                        <a:rPr lang="en-US" sz="1300" b="1" dirty="0">
+                        <a:rPr lang="en-US" sz="1400" b="1" dirty="0">
                           <a:solidFill>
                             <a:srgbClr val="1A1A1A"/>
                           </a:solidFill>
                         </a:rPr>
                         <a:t>Le schéma s'applique</a:t>
                       </a:r>
-                      <a:endParaRPr lang="en-US" sz="1300" dirty="0"/>
+                      <a:endParaRPr lang="en-US" sz="1400" dirty="0"/>
                     </a:p>
                   </a:txBody>
                   <a:tcPr marL="91440" marR="91440" marT="45720" marB="45720" anchor="ctr">
@@ -14810,14 +17440,14 @@
                         <a:buNone/>
                       </a:pPr>
                       <a:r>
-                        <a:rPr lang="en-US" sz="1300" dirty="0">
+                        <a:rPr lang="en-US" sz="1400" dirty="0">
                           <a:solidFill>
                             <a:srgbClr val="1A1A1A"/>
                           </a:solidFill>
                         </a:rPr>
                         <a:t>à l'écriture</a:t>
                       </a:r>
-                      <a:endParaRPr lang="en-US" sz="1300" dirty="0"/>
+                      <a:endParaRPr lang="en-US" sz="1400" dirty="0"/>
                     </a:p>
                   </a:txBody>
                   <a:tcPr marL="91440" marR="91440" marT="45720" marB="45720" anchor="ctr">
@@ -14871,14 +17501,14 @@
                         <a:buNone/>
                       </a:pPr>
                       <a:r>
-                        <a:rPr lang="en-US" sz="1300" dirty="0">
+                        <a:rPr lang="en-US" sz="1400" dirty="0">
                           <a:solidFill>
                             <a:srgbClr val="1E2761"/>
                           </a:solidFill>
                         </a:rPr>
                         <a:t>à la lecture (schema on read)</a:t>
                       </a:r>
-                      <a:endParaRPr lang="en-US" sz="1300" dirty="0"/>
+                      <a:endParaRPr lang="en-US" sz="1400" dirty="0"/>
                     </a:p>
                   </a:txBody>
                   <a:tcPr marL="91440" marR="91440" marT="45720" marB="45720" anchor="ctr">
@@ -14919,7 +17549,7 @@
                       <a:tailEnd type="none" w="med" len="med"/>
                     </a:lnB>
                     <a:solidFill>
-                      <a:srgbClr val="F2F5FC"/>
+                      <a:srgbClr val="FFFFFF"/>
                     </a:solidFill>
                   </a:tcPr>
                 </a:tc>
@@ -14934,14 +17564,14 @@
                         <a:buNone/>
                       </a:pPr>
                       <a:r>
-                        <a:rPr lang="en-US" sz="1300" b="1" dirty="0">
+                        <a:rPr lang="en-US" sz="1400" b="1" dirty="0">
                           <a:solidFill>
                             <a:srgbClr val="1A1A1A"/>
                           </a:solidFill>
                         </a:rPr>
                         <a:t>Modifier une ligne</a:t>
                       </a:r>
-                      <a:endParaRPr lang="en-US" sz="1300" dirty="0"/>
+                      <a:endParaRPr lang="en-US" sz="1400" dirty="0"/>
                     </a:p>
                   </a:txBody>
                   <a:tcPr marL="91440" marR="91440" marT="45720" marB="45720" anchor="ctr">
@@ -14995,14 +17625,14 @@
                         <a:buNone/>
                       </a:pPr>
                       <a:r>
-                        <a:rPr lang="en-US" sz="1300" dirty="0">
+                        <a:rPr lang="en-US" sz="1400" dirty="0">
                           <a:solidFill>
                             <a:srgbClr val="1A1A1A"/>
                           </a:solidFill>
                         </a:rPr>
                         <a:t>UPDATE, DELETE naturels</a:t>
                       </a:r>
-                      <a:endParaRPr lang="en-US" sz="1300" dirty="0"/>
+                      <a:endParaRPr lang="en-US" sz="1400" dirty="0"/>
                     </a:p>
                   </a:txBody>
                   <a:tcPr marL="91440" marR="91440" marT="45720" marB="45720" anchor="ctr">
@@ -15056,14 +17686,14 @@
                         <a:buNone/>
                       </a:pPr>
                       <a:r>
-                        <a:rPr lang="en-US" sz="1300" dirty="0">
+                        <a:rPr lang="en-US" sz="1400" dirty="0">
                           <a:solidFill>
                             <a:srgbClr val="1E2761"/>
                           </a:solidFill>
                         </a:rPr>
                         <a:t>très limité, à éviter</a:t>
                       </a:r>
-                      <a:endParaRPr lang="en-US" sz="1300" dirty="0"/>
+                      <a:endParaRPr lang="en-US" sz="1400" dirty="0"/>
                     </a:p>
                   </a:txBody>
                   <a:tcPr marL="91440" marR="91440" marT="45720" marB="45720" anchor="ctr">
@@ -15104,7 +17734,7 @@
                       <a:tailEnd type="none" w="med" len="med"/>
                     </a:lnB>
                     <a:solidFill>
-                      <a:srgbClr val="F2F5FC"/>
+                      <a:srgbClr val="FFFFFF"/>
                     </a:solidFill>
                   </a:tcPr>
                 </a:tc>
@@ -15119,14 +17749,14 @@
                         <a:buNone/>
                       </a:pPr>
                       <a:r>
-                        <a:rPr lang="en-US" sz="1300" b="1" dirty="0">
+                        <a:rPr lang="en-US" sz="1400" b="1" dirty="0">
                           <a:solidFill>
                             <a:srgbClr val="1A1A1A"/>
                           </a:solidFill>
                         </a:rPr>
                         <a:t>Temps de réponse</a:t>
                       </a:r>
-                      <a:endParaRPr lang="en-US" sz="1300" dirty="0"/>
+                      <a:endParaRPr lang="en-US" sz="1400" dirty="0"/>
                     </a:p>
                   </a:txBody>
                   <a:tcPr marL="91440" marR="91440" marT="45720" marB="45720" anchor="ctr">
@@ -15180,14 +17810,14 @@
                         <a:buNone/>
                       </a:pPr>
                       <a:r>
-                        <a:rPr lang="en-US" sz="1300" dirty="0">
+                        <a:rPr lang="en-US" sz="1400" dirty="0">
                           <a:solidFill>
                             <a:srgbClr val="1A1A1A"/>
                           </a:solidFill>
                         </a:rPr>
                         <a:t>millisecondes</a:t>
                       </a:r>
-                      <a:endParaRPr lang="en-US" sz="1300" dirty="0"/>
+                      <a:endParaRPr lang="en-US" sz="1400" dirty="0"/>
                     </a:p>
                   </a:txBody>
                   <a:tcPr marL="91440" marR="91440" marT="45720" marB="45720" anchor="ctr">
@@ -15241,14 +17871,14 @@
                         <a:buNone/>
                       </a:pPr>
                       <a:r>
-                        <a:rPr lang="en-US" sz="1300" dirty="0">
+                        <a:rPr lang="en-US" sz="1400" dirty="0">
                           <a:solidFill>
                             <a:srgbClr val="1E2761"/>
                           </a:solidFill>
                         </a:rPr>
                         <a:t>secondes à minutes</a:t>
                       </a:r>
-                      <a:endParaRPr lang="en-US" sz="1300" dirty="0"/>
+                      <a:endParaRPr lang="en-US" sz="1400" dirty="0"/>
                     </a:p>
                   </a:txBody>
                   <a:tcPr marL="91440" marR="91440" marT="45720" marB="45720" anchor="ctr">
@@ -15289,7 +17919,7 @@
                       <a:tailEnd type="none" w="med" len="med"/>
                     </a:lnB>
                     <a:solidFill>
-                      <a:srgbClr val="F2F5FC"/>
+                      <a:srgbClr val="FFFFFF"/>
                     </a:solidFill>
                   </a:tcPr>
                 </a:tc>
@@ -15304,14 +17934,14 @@
                         <a:buNone/>
                       </a:pPr>
                       <a:r>
-                        <a:rPr lang="en-US" sz="1300" b="1" dirty="0">
+                        <a:rPr lang="en-US" sz="1400" b="1" dirty="0">
                           <a:solidFill>
                             <a:srgbClr val="1A1A1A"/>
                           </a:solidFill>
                         </a:rPr>
                         <a:t>Usage</a:t>
                       </a:r>
-                      <a:endParaRPr lang="en-US" sz="1300" dirty="0"/>
+                      <a:endParaRPr lang="en-US" sz="1400" dirty="0"/>
                     </a:p>
                   </a:txBody>
                   <a:tcPr marL="91440" marR="91440" marT="45720" marB="45720" anchor="ctr">
@@ -15365,14 +17995,14 @@
                         <a:buNone/>
                       </a:pPr>
                       <a:r>
-                        <a:rPr lang="en-US" sz="1300" dirty="0">
+                        <a:rPr lang="en-US" sz="1400" dirty="0">
                           <a:solidFill>
                             <a:srgbClr val="1A1A1A"/>
                           </a:solidFill>
                         </a:rPr>
                         <a:t>transactions du quotidien</a:t>
                       </a:r>
-                      <a:endParaRPr lang="en-US" sz="1300" dirty="0"/>
+                      <a:endParaRPr lang="en-US" sz="1400" dirty="0"/>
                     </a:p>
                   </a:txBody>
                   <a:tcPr marL="91440" marR="91440" marT="45720" marB="45720" anchor="ctr">
@@ -15426,14 +18056,14 @@
                         <a:buNone/>
                       </a:pPr>
                       <a:r>
-                        <a:rPr lang="en-US" sz="1300" dirty="0">
+                        <a:rPr lang="en-US" sz="1400" dirty="0">
                           <a:solidFill>
                             <a:srgbClr val="1E2761"/>
                           </a:solidFill>
                         </a:rPr>
                         <a:t>analyse de gros volumes</a:t>
                       </a:r>
-                      <a:endParaRPr lang="en-US" sz="1300" dirty="0"/>
+                      <a:endParaRPr lang="en-US" sz="1400" dirty="0"/>
                     </a:p>
                   </a:txBody>
                   <a:tcPr marL="91440" marR="91440" marT="45720" marB="45720" anchor="ctr">
@@ -15474,7 +18104,7 @@
                       <a:tailEnd type="none" w="med" len="med"/>
                     </a:lnB>
                     <a:solidFill>
-                      <a:srgbClr val="F2F5FC"/>
+                      <a:srgbClr val="FFFFFF"/>
                     </a:solidFill>
                   </a:tcPr>
                 </a:tc>
@@ -15500,11 +18130,11 @@
             </a:avLst>
           </a:prstGeom>
           <a:solidFill>
-            <a:srgbClr val="F2F5FC"/>
+            <a:srgbClr val="FFFFFF"/>
           </a:solidFill>
           <a:ln w="12700">
             <a:solidFill>
-              <a:srgbClr val="F2F5FC"/>
+              <a:srgbClr val="FFFFFF"/>
             </a:solidFill>
             <a:prstDash val="solid"/>
           </a:ln>
@@ -15538,7 +18168,7 @@
               <a:buNone/>
             </a:pPr>
             <a:r>
-              <a:rPr lang="en-US" sz="1350" b="1" dirty="0">
+              <a:rPr lang="en-US" sz="1450" b="1" dirty="0">
                 <a:solidFill>
                   <a:srgbClr val="1E2761"/>
                 </a:solidFill>
@@ -15552,14 +18182,14 @@
               <a:buNone/>
             </a:pPr>
             <a:r>
-              <a:rPr lang="en-US" sz="1350" dirty="0">
+              <a:rPr lang="en-US" sz="1450" dirty="0">
                 <a:solidFill>
                   <a:srgbClr val="1A1A1A"/>
                 </a:solidFill>
               </a:rPr>
               <a:t>on écrit du SQL, Hive le traduit en jobs MapReduce. Plus besoin d'un mapper.py et d'un reducer.py par question.</a:t>
             </a:r>
-            <a:endParaRPr lang="en-US" sz="1350" dirty="0"/>
+            <a:endParaRPr lang="en-US" sz="1450" dirty="0"/>
           </a:p>
           <a:p>
             <a:pPr indent="0" marL="0">
@@ -15569,7 +18199,7 @@
               <a:buNone/>
             </a:pPr>
             <a:r>
-              <a:rPr lang="en-US" sz="1350" b="1" dirty="0">
+              <a:rPr lang="en-US" sz="1450" b="1" dirty="0">
                 <a:solidFill>
                   <a:srgbClr val="EB6834"/>
                 </a:solidFill>
@@ -15583,14 +18213,14 @@
               <a:buNone/>
             </a:pPr>
             <a:r>
-              <a:rPr lang="en-US" sz="1350" dirty="0">
+              <a:rPr lang="en-US" sz="1450" dirty="0">
                 <a:solidFill>
                   <a:srgbClr val="1A1A1A"/>
                 </a:solidFill>
               </a:rPr>
               <a:t>chaque requête lance un job. Compter en secondes, jamais en millisecondes.</a:t>
             </a:r>
-            <a:endParaRPr lang="en-US" sz="1350" dirty="0"/>
+            <a:endParaRPr lang="en-US" sz="1450" dirty="0"/>
           </a:p>
         </p:txBody>
       </p:sp>
@@ -15622,9 +18252,9 @@
           <a:bodyPr/>
           <a:lstStyle>
             <a:lvl1pPr>
-              <a:defRPr sz="1000">
-                <a:solidFill>
-                  <a:srgbClr val="52514E"/>
+              <a:defRPr sz="1200">
+                <a:solidFill>
+                  <a:srgbClr val="353430"/>
                 </a:solidFill>
               </a:defRPr>
             </a:lvl1pPr>
@@ -15644,6 +18274,9 @@
   <p:clrMapOvr>
     <a:masterClrMapping/>
   </p:clrMapOvr>
+  <p:transition spd="med" advClick="1">
+    <p:fade/>
+  </p:transition>
 </p:sld>
 </file>
 
@@ -15757,7 +18390,7 @@
               <a:buNone/>
             </a:pPr>
             <a:r>
-              <a:rPr lang="en-US" sz="1200" dirty="0">
+              <a:rPr lang="en-US" sz="1350" dirty="0">
                 <a:solidFill>
                   <a:srgbClr val="1A1A1A"/>
                 </a:solidFill>
@@ -15767,14 +18400,14 @@
               </a:rPr>
               <a:t>CREATE EXTERNAL TABLE transactions (</a:t>
             </a:r>
-            <a:endParaRPr lang="en-US" sz="1200" dirty="0"/>
+            <a:endParaRPr lang="en-US" sz="1350" dirty="0"/>
           </a:p>
           <a:p>
             <a:pPr algn="l" indent="0" marL="0">
               <a:buNone/>
             </a:pPr>
             <a:r>
-              <a:rPr lang="en-US" sz="1200" dirty="0">
+              <a:rPr lang="en-US" sz="1350" dirty="0">
                 <a:solidFill>
                   <a:srgbClr val="1A1A1A"/>
                 </a:solidFill>
@@ -15784,14 +18417,14 @@
               </a:rPr>
               <a:t>    transaction_id STRING,</a:t>
             </a:r>
-            <a:endParaRPr lang="en-US" sz="1200" dirty="0"/>
+            <a:endParaRPr lang="en-US" sz="1350" dirty="0"/>
           </a:p>
           <a:p>
             <a:pPr algn="l" indent="0" marL="0">
               <a:buNone/>
             </a:pPr>
             <a:r>
-              <a:rPr lang="en-US" sz="1200" dirty="0">
+              <a:rPr lang="en-US" sz="1350" dirty="0">
                 <a:solidFill>
                   <a:srgbClr val="1A1A1A"/>
                 </a:solidFill>
@@ -15801,14 +18434,14 @@
               </a:rPr>
               <a:t>    datetime       STRING,</a:t>
             </a:r>
-            <a:endParaRPr lang="en-US" sz="1200" dirty="0"/>
+            <a:endParaRPr lang="en-US" sz="1350" dirty="0"/>
           </a:p>
           <a:p>
             <a:pPr algn="l" indent="0" marL="0">
               <a:buNone/>
             </a:pPr>
             <a:r>
-              <a:rPr lang="en-US" sz="1200" dirty="0">
+              <a:rPr lang="en-US" sz="1350" dirty="0">
                 <a:solidFill>
                   <a:srgbClr val="1A1A1A"/>
                 </a:solidFill>
@@ -15818,14 +18451,14 @@
               </a:rPr>
               <a:t>    ...                    -- les 19 colonnes</a:t>
             </a:r>
-            <a:endParaRPr lang="en-US" sz="1200" dirty="0"/>
+            <a:endParaRPr lang="en-US" sz="1350" dirty="0"/>
           </a:p>
           <a:p>
             <a:pPr algn="l" indent="0" marL="0">
               <a:buNone/>
             </a:pPr>
             <a:r>
-              <a:rPr lang="en-US" sz="1200" dirty="0">
+              <a:rPr lang="en-US" sz="1350" dirty="0">
                 <a:solidFill>
                   <a:srgbClr val="1A1A1A"/>
                 </a:solidFill>
@@ -15835,14 +18468,14 @@
               </a:rPr>
               <a:t>    montant        DOUBLE</a:t>
             </a:r>
-            <a:endParaRPr lang="en-US" sz="1200" dirty="0"/>
+            <a:endParaRPr lang="en-US" sz="1350" dirty="0"/>
           </a:p>
           <a:p>
             <a:pPr algn="l" indent="0" marL="0">
               <a:buNone/>
             </a:pPr>
             <a:r>
-              <a:rPr lang="en-US" sz="1200" dirty="0">
+              <a:rPr lang="en-US" sz="1350" dirty="0">
                 <a:solidFill>
                   <a:srgbClr val="1A1A1A"/>
                 </a:solidFill>
@@ -15852,14 +18485,14 @@
               </a:rPr>
               <a:t>)</a:t>
             </a:r>
-            <a:endParaRPr lang="en-US" sz="1200" dirty="0"/>
+            <a:endParaRPr lang="en-US" sz="1350" dirty="0"/>
           </a:p>
           <a:p>
             <a:pPr algn="l" indent="0" marL="0">
               <a:buNone/>
             </a:pPr>
             <a:r>
-              <a:rPr lang="en-US" sz="1200" dirty="0">
+              <a:rPr lang="en-US" sz="1350" dirty="0">
                 <a:solidFill>
                   <a:srgbClr val="1A1A1A"/>
                 </a:solidFill>
@@ -15869,14 +18502,14 @@
               </a:rPr>
               <a:t>ROW FORMAT DELIMITED</a:t>
             </a:r>
-            <a:endParaRPr lang="en-US" sz="1200" dirty="0"/>
+            <a:endParaRPr lang="en-US" sz="1350" dirty="0"/>
           </a:p>
           <a:p>
             <a:pPr algn="l" indent="0" marL="0">
               <a:buNone/>
             </a:pPr>
             <a:r>
-              <a:rPr lang="en-US" sz="1200" dirty="0">
+              <a:rPr lang="en-US" sz="1350" dirty="0">
                 <a:solidFill>
                   <a:srgbClr val="1A1A1A"/>
                 </a:solidFill>
@@ -15886,14 +18519,14 @@
               </a:rPr>
               <a:t>  FIELDS TERMINATED BY ','</a:t>
             </a:r>
-            <a:endParaRPr lang="en-US" sz="1200" dirty="0"/>
+            <a:endParaRPr lang="en-US" sz="1350" dirty="0"/>
           </a:p>
           <a:p>
             <a:pPr algn="l" indent="0" marL="0">
               <a:buNone/>
             </a:pPr>
             <a:r>
-              <a:rPr lang="en-US" sz="1200" dirty="0">
+              <a:rPr lang="en-US" sz="1350" dirty="0">
                 <a:solidFill>
                   <a:srgbClr val="1A1A1A"/>
                 </a:solidFill>
@@ -15903,14 +18536,14 @@
               </a:rPr>
               <a:t>STORED AS TEXTFILE</a:t>
             </a:r>
-            <a:endParaRPr lang="en-US" sz="1200" dirty="0"/>
+            <a:endParaRPr lang="en-US" sz="1350" dirty="0"/>
           </a:p>
           <a:p>
             <a:pPr algn="l" indent="0" marL="0">
               <a:buNone/>
             </a:pPr>
             <a:r>
-              <a:rPr lang="en-US" sz="1200" dirty="0">
+              <a:rPr lang="en-US" sz="1350" dirty="0">
                 <a:solidFill>
                   <a:srgbClr val="1A1A1A"/>
                 </a:solidFill>
@@ -15920,14 +18553,14 @@
               </a:rPr>
               <a:t>LOCATION '/datalake/raw/transactions/medium'</a:t>
             </a:r>
-            <a:endParaRPr lang="en-US" sz="1200" dirty="0"/>
+            <a:endParaRPr lang="en-US" sz="1350" dirty="0"/>
           </a:p>
           <a:p>
             <a:pPr algn="l" indent="0" marL="0">
               <a:buNone/>
             </a:pPr>
             <a:r>
-              <a:rPr lang="en-US" sz="1200" dirty="0">
+              <a:rPr lang="en-US" sz="1350" dirty="0">
                 <a:solidFill>
                   <a:srgbClr val="1A1A1A"/>
                 </a:solidFill>
@@ -15937,7 +18570,7 @@
               </a:rPr>
               <a:t>TBLPROPERTIES ("skip.header.line.count"="1");</a:t>
             </a:r>
-            <a:endParaRPr lang="en-US" sz="1200" dirty="0"/>
+            <a:endParaRPr lang="en-US" sz="1350" dirty="0"/>
           </a:p>
         </p:txBody>
       </p:sp>
@@ -15966,7 +18599,7 @@
               <a:buNone/>
             </a:pPr>
             <a:r>
-              <a:rPr lang="en-US" sz="1350" b="1" dirty="0">
+              <a:rPr lang="en-US" sz="1450" b="1" dirty="0">
                 <a:solidFill>
                   <a:srgbClr val="2A78D6"/>
                 </a:solidFill>
@@ -15976,7 +18609,7 @@
               </a:rPr>
               <a:t>EXTERNAL</a:t>
             </a:r>
-            <a:endParaRPr lang="en-US" sz="1350" dirty="0"/>
+            <a:endParaRPr lang="en-US" sz="1450" dirty="0"/>
           </a:p>
         </p:txBody>
       </p:sp>
@@ -16008,14 +18641,14 @@
               <a:buNone/>
             </a:pPr>
             <a:r>
-              <a:rPr lang="en-US" sz="1250" dirty="0">
+              <a:rPr lang="en-US" sz="1400" dirty="0">
                 <a:solidFill>
                   <a:srgbClr val="1A1A1A"/>
                 </a:solidFill>
               </a:rPr>
               <a:t>Les fichiers n'appartiennent pas à Hive. Un DROP TABLE n'efface que la description, jamais les données du projet.</a:t>
             </a:r>
-            <a:endParaRPr lang="en-US" sz="1250" dirty="0"/>
+            <a:endParaRPr lang="en-US" sz="1400" dirty="0"/>
           </a:p>
         </p:txBody>
       </p:sp>
@@ -16044,7 +18677,7 @@
               <a:buNone/>
             </a:pPr>
             <a:r>
-              <a:rPr lang="en-US" sz="1350" b="1" dirty="0">
+              <a:rPr lang="en-US" sz="1450" b="1" dirty="0">
                 <a:solidFill>
                   <a:srgbClr val="2A78D6"/>
                 </a:solidFill>
@@ -16054,7 +18687,7 @@
               </a:rPr>
               <a:t>LOCATION</a:t>
             </a:r>
-            <a:endParaRPr lang="en-US" sz="1350" dirty="0"/>
+            <a:endParaRPr lang="en-US" sz="1450" dirty="0"/>
           </a:p>
         </p:txBody>
       </p:sp>
@@ -16086,14 +18719,14 @@
               <a:buNone/>
             </a:pPr>
             <a:r>
-              <a:rPr lang="en-US" sz="1250" dirty="0">
+              <a:rPr lang="en-US" sz="1400" dirty="0">
                 <a:solidFill>
                   <a:srgbClr val="1A1A1A"/>
                 </a:solidFill>
               </a:rPr>
               <a:t>Un dossier, pas un fichier. Tout fichier déposé dedans entre dans la table.</a:t>
             </a:r>
-            <a:endParaRPr lang="en-US" sz="1250" dirty="0"/>
+            <a:endParaRPr lang="en-US" sz="1400" dirty="0"/>
           </a:p>
         </p:txBody>
       </p:sp>
@@ -16122,7 +18755,7 @@
               <a:buNone/>
             </a:pPr>
             <a:r>
-              <a:rPr lang="en-US" sz="1350" b="1" dirty="0">
+              <a:rPr lang="en-US" sz="1450" b="1" dirty="0">
                 <a:solidFill>
                   <a:srgbClr val="EB6834"/>
                 </a:solidFill>
@@ -16132,7 +18765,7 @@
               </a:rPr>
               <a:t>skip.header</a:t>
             </a:r>
-            <a:endParaRPr lang="en-US" sz="1350" dirty="0"/>
+            <a:endParaRPr lang="en-US" sz="1450" dirty="0"/>
           </a:p>
         </p:txBody>
       </p:sp>
@@ -16164,14 +18797,14 @@
               <a:buNone/>
             </a:pPr>
             <a:r>
-              <a:rPr lang="en-US" sz="1250" dirty="0">
+              <a:rPr lang="en-US" sz="1400" dirty="0">
                 <a:solidFill>
                   <a:srgbClr val="1A1A1A"/>
                 </a:solidFill>
               </a:rPr>
               <a:t>Sans cela, la ligne de titres serait lue comme une transaction et fausserait tous les totaux.</a:t>
             </a:r>
-            <a:endParaRPr lang="en-US" sz="1250" dirty="0"/>
+            <a:endParaRPr lang="en-US" sz="1400" dirty="0"/>
           </a:p>
         </p:txBody>
       </p:sp>
@@ -16227,7 +18860,7 @@
               <a:buNone/>
             </a:pPr>
             <a:r>
-              <a:rPr lang="en-US" sz="1400" b="1" dirty="0">
+              <a:rPr lang="en-US" sz="1500" b="1" dirty="0">
                 <a:solidFill>
                   <a:srgbClr val="FFFFFF"/>
                 </a:solidFill>
@@ -16238,14 +18871,14 @@
               <a:buNone/>
             </a:pPr>
             <a:r>
-              <a:rPr lang="en-US" sz="1400" dirty="0">
+              <a:rPr lang="en-US" sz="1500" dirty="0">
                 <a:solidFill>
                   <a:srgbClr val="CADCFC"/>
                 </a:solidFill>
               </a:rPr>
               <a:t>Pas un octet déplacé. Hive écrit seulement une fiche descriptive dans son metastore.</a:t>
             </a:r>
-            <a:endParaRPr lang="en-US" sz="1400" dirty="0"/>
+            <a:endParaRPr lang="en-US" sz="1500" dirty="0"/>
           </a:p>
         </p:txBody>
       </p:sp>
@@ -16277,9 +18910,9 @@
           <a:bodyPr/>
           <a:lstStyle>
             <a:lvl1pPr>
-              <a:defRPr sz="1000">
-                <a:solidFill>
-                  <a:srgbClr val="52514E"/>
+              <a:defRPr sz="1200">
+                <a:solidFill>
+                  <a:srgbClr val="353430"/>
                 </a:solidFill>
               </a:defRPr>
             </a:lvl1pPr>
@@ -16299,6 +18932,9 @@
   <p:clrMapOvr>
     <a:masterClrMapping/>
   </p:clrMapOvr>
+  <p:transition spd="med" advClick="1">
+    <p:fade/>
+  </p:transition>
 </p:sld>
 </file>
 
@@ -16385,14 +19021,14 @@
               <a:buNone/>
             </a:pPr>
             <a:r>
-              <a:rPr lang="en-US" sz="1400" dirty="0">
-                <a:solidFill>
-                  <a:srgbClr val="52514E"/>
+              <a:rPr lang="en-US" sz="1500" dirty="0">
+                <a:solidFill>
+                  <a:srgbClr val="353430"/>
                 </a:solidFill>
               </a:rPr>
               <a:t>Sept contrôles exécutés dans Hive avant la première requête d'analyse.</a:t>
             </a:r>
-            <a:endParaRPr lang="en-US" sz="1400" dirty="0"/>
+            <a:endParaRPr lang="en-US" sz="1500" dirty="0"/>
           </a:p>
         </p:txBody>
       </p:sp>
@@ -16448,14 +19084,14 @@
               <a:buNone/>
             </a:pPr>
             <a:r>
-              <a:rPr lang="en-US" sz="1300" dirty="0">
+              <a:rPr lang="en-US" sz="1400" dirty="0">
                 <a:solidFill>
                   <a:srgbClr val="1A1A1A"/>
                 </a:solidFill>
               </a:rPr>
               <a:t>Lignes</a:t>
             </a:r>
-            <a:endParaRPr lang="en-US" sz="1300" dirty="0"/>
+            <a:endParaRPr lang="en-US" sz="1400" dirty="0"/>
           </a:p>
         </p:txBody>
       </p:sp>
@@ -16484,14 +19120,14 @@
               <a:buNone/>
             </a:pPr>
             <a:r>
-              <a:rPr lang="en-US" sz="1400" b="1" dirty="0">
+              <a:rPr lang="en-US" sz="1500" b="1" dirty="0">
                 <a:solidFill>
                   <a:srgbClr val="1E2761"/>
                 </a:solidFill>
               </a:rPr>
               <a:t>500 000</a:t>
             </a:r>
-            <a:endParaRPr lang="en-US" sz="1400" dirty="0"/>
+            <a:endParaRPr lang="en-US" sz="1500" dirty="0"/>
           </a:p>
         </p:txBody>
       </p:sp>
@@ -16520,14 +19156,14 @@
               <a:buNone/>
             </a:pPr>
             <a:r>
-              <a:rPr lang="en-US" sz="1500" b="1" dirty="0">
+              <a:rPr lang="en-US" sz="1600" b="1" dirty="0">
                 <a:solidFill>
                   <a:srgbClr val="1BAF7A"/>
                 </a:solidFill>
               </a:rPr>
               <a:t>✓</a:t>
             </a:r>
-            <a:endParaRPr lang="en-US" sz="1500" dirty="0"/>
+            <a:endParaRPr lang="en-US" sz="1600" dirty="0"/>
           </a:p>
         </p:txBody>
       </p:sp>
@@ -16583,14 +19219,14 @@
               <a:buNone/>
             </a:pPr>
             <a:r>
-              <a:rPr lang="en-US" sz="1300" dirty="0">
+              <a:rPr lang="en-US" sz="1400" dirty="0">
                 <a:solidFill>
                   <a:srgbClr val="1A1A1A"/>
                 </a:solidFill>
               </a:rPr>
               <a:t>Identifiants distincts</a:t>
             </a:r>
-            <a:endParaRPr lang="en-US" sz="1300" dirty="0"/>
+            <a:endParaRPr lang="en-US" sz="1400" dirty="0"/>
           </a:p>
         </p:txBody>
       </p:sp>
@@ -16619,14 +19255,14 @@
               <a:buNone/>
             </a:pPr>
             <a:r>
-              <a:rPr lang="en-US" sz="1400" b="1" dirty="0">
+              <a:rPr lang="en-US" sz="1500" b="1" dirty="0">
                 <a:solidFill>
                   <a:srgbClr val="1E2761"/>
                 </a:solidFill>
               </a:rPr>
               <a:t>500 000</a:t>
             </a:r>
-            <a:endParaRPr lang="en-US" sz="1400" dirty="0"/>
+            <a:endParaRPr lang="en-US" sz="1500" dirty="0"/>
           </a:p>
         </p:txBody>
       </p:sp>
@@ -16655,14 +19291,14 @@
               <a:buNone/>
             </a:pPr>
             <a:r>
-              <a:rPr lang="en-US" sz="1500" b="1" dirty="0">
+              <a:rPr lang="en-US" sz="1600" b="1" dirty="0">
                 <a:solidFill>
                   <a:srgbClr val="1BAF7A"/>
                 </a:solidFill>
               </a:rPr>
               <a:t>✓</a:t>
             </a:r>
-            <a:endParaRPr lang="en-US" sz="1500" dirty="0"/>
+            <a:endParaRPr lang="en-US" sz="1600" dirty="0"/>
           </a:p>
         </p:txBody>
       </p:sp>
@@ -16718,14 +19354,14 @@
               <a:buNone/>
             </a:pPr>
             <a:r>
-              <a:rPr lang="en-US" sz="1300" dirty="0">
+              <a:rPr lang="en-US" sz="1400" dirty="0">
                 <a:solidFill>
                   <a:srgbClr val="1A1A1A"/>
                 </a:solidFill>
               </a:rPr>
               <a:t>Champs numériques nuls</a:t>
             </a:r>
-            <a:endParaRPr lang="en-US" sz="1300" dirty="0"/>
+            <a:endParaRPr lang="en-US" sz="1400" dirty="0"/>
           </a:p>
         </p:txBody>
       </p:sp>
@@ -16754,14 +19390,14 @@
               <a:buNone/>
             </a:pPr>
             <a:r>
-              <a:rPr lang="en-US" sz="1400" b="1" dirty="0">
+              <a:rPr lang="en-US" sz="1500" b="1" dirty="0">
                 <a:solidFill>
                   <a:srgbClr val="1BAF7A"/>
                 </a:solidFill>
               </a:rPr>
               <a:t>0</a:t>
             </a:r>
-            <a:endParaRPr lang="en-US" sz="1400" dirty="0"/>
+            <a:endParaRPr lang="en-US" sz="1500" dirty="0"/>
           </a:p>
         </p:txBody>
       </p:sp>
@@ -16790,14 +19426,14 @@
               <a:buNone/>
             </a:pPr>
             <a:r>
-              <a:rPr lang="en-US" sz="1500" b="1" dirty="0">
+              <a:rPr lang="en-US" sz="1600" b="1" dirty="0">
                 <a:solidFill>
                   <a:srgbClr val="1BAF7A"/>
                 </a:solidFill>
               </a:rPr>
               <a:t>✓</a:t>
             </a:r>
-            <a:endParaRPr lang="en-US" sz="1500" dirty="0"/>
+            <a:endParaRPr lang="en-US" sz="1600" dirty="0"/>
           </a:p>
         </p:txBody>
       </p:sp>
@@ -16853,14 +19489,14 @@
               <a:buNone/>
             </a:pPr>
             <a:r>
-              <a:rPr lang="en-US" sz="1300" dirty="0">
+              <a:rPr lang="en-US" sz="1400" dirty="0">
                 <a:solidFill>
                   <a:srgbClr val="1A1A1A"/>
                 </a:solidFill>
               </a:rPr>
               <a:t>Montants incohérents</a:t>
             </a:r>
-            <a:endParaRPr lang="en-US" sz="1300" dirty="0"/>
+            <a:endParaRPr lang="en-US" sz="1400" dirty="0"/>
           </a:p>
         </p:txBody>
       </p:sp>
@@ -16889,14 +19525,14 @@
               <a:buNone/>
             </a:pPr>
             <a:r>
-              <a:rPr lang="en-US" sz="1400" b="1" dirty="0">
+              <a:rPr lang="en-US" sz="1500" b="1" dirty="0">
                 <a:solidFill>
                   <a:srgbClr val="1BAF7A"/>
                 </a:solidFill>
               </a:rPr>
               <a:t>0</a:t>
             </a:r>
-            <a:endParaRPr lang="en-US" sz="1400" dirty="0"/>
+            <a:endParaRPr lang="en-US" sz="1500" dirty="0"/>
           </a:p>
         </p:txBody>
       </p:sp>
@@ -16925,14 +19561,14 @@
               <a:buNone/>
             </a:pPr>
             <a:r>
-              <a:rPr lang="en-US" sz="1500" b="1" dirty="0">
+              <a:rPr lang="en-US" sz="1600" b="1" dirty="0">
                 <a:solidFill>
                   <a:srgbClr val="1BAF7A"/>
                 </a:solidFill>
               </a:rPr>
               <a:t>✓</a:t>
             </a:r>
-            <a:endParaRPr lang="en-US" sz="1500" dirty="0"/>
+            <a:endParaRPr lang="en-US" sz="1600" dirty="0"/>
           </a:p>
         </p:txBody>
       </p:sp>
@@ -16988,14 +19624,14 @@
               <a:buNone/>
             </a:pPr>
             <a:r>
-              <a:rPr lang="en-US" sz="1300" dirty="0">
+              <a:rPr lang="en-US" sz="1400" dirty="0">
                 <a:solidFill>
                   <a:srgbClr val="1A1A1A"/>
                 </a:solidFill>
               </a:rPr>
               <a:t>Remises hors bornes</a:t>
             </a:r>
-            <a:endParaRPr lang="en-US" sz="1300" dirty="0"/>
+            <a:endParaRPr lang="en-US" sz="1400" dirty="0"/>
           </a:p>
         </p:txBody>
       </p:sp>
@@ -17024,14 +19660,14 @@
               <a:buNone/>
             </a:pPr>
             <a:r>
-              <a:rPr lang="en-US" sz="1400" b="1" dirty="0">
+              <a:rPr lang="en-US" sz="1500" b="1" dirty="0">
                 <a:solidFill>
                   <a:srgbClr val="1BAF7A"/>
                 </a:solidFill>
               </a:rPr>
               <a:t>0</a:t>
             </a:r>
-            <a:endParaRPr lang="en-US" sz="1400" dirty="0"/>
+            <a:endParaRPr lang="en-US" sz="1500" dirty="0"/>
           </a:p>
         </p:txBody>
       </p:sp>
@@ -17060,14 +19696,14 @@
               <a:buNone/>
             </a:pPr>
             <a:r>
-              <a:rPr lang="en-US" sz="1500" b="1" dirty="0">
+              <a:rPr lang="en-US" sz="1600" b="1" dirty="0">
                 <a:solidFill>
                   <a:srgbClr val="1BAF7A"/>
                 </a:solidFill>
               </a:rPr>
               <a:t>✓</a:t>
             </a:r>
-            <a:endParaRPr lang="en-US" sz="1500" dirty="0"/>
+            <a:endParaRPr lang="en-US" sz="1600" dirty="0"/>
           </a:p>
         </p:txBody>
       </p:sp>
@@ -17123,14 +19759,14 @@
               <a:buNone/>
             </a:pPr>
             <a:r>
-              <a:rPr lang="en-US" sz="1300" dirty="0">
+              <a:rPr lang="en-US" sz="1400" dirty="0">
                 <a:solidFill>
                   <a:srgbClr val="1A1A1A"/>
                 </a:solidFill>
               </a:rPr>
               <a:t>Promotion nulle avec remise</a:t>
             </a:r>
-            <a:endParaRPr lang="en-US" sz="1300" dirty="0"/>
+            <a:endParaRPr lang="en-US" sz="1400" dirty="0"/>
           </a:p>
         </p:txBody>
       </p:sp>
@@ -17159,14 +19795,14 @@
               <a:buNone/>
             </a:pPr>
             <a:r>
-              <a:rPr lang="en-US" sz="1400" b="1" dirty="0">
+              <a:rPr lang="en-US" sz="1500" b="1" dirty="0">
                 <a:solidFill>
                   <a:srgbClr val="1BAF7A"/>
                 </a:solidFill>
               </a:rPr>
               <a:t>0</a:t>
             </a:r>
-            <a:endParaRPr lang="en-US" sz="1400" dirty="0"/>
+            <a:endParaRPr lang="en-US" sz="1500" dirty="0"/>
           </a:p>
         </p:txBody>
       </p:sp>
@@ -17195,14 +19831,14 @@
               <a:buNone/>
             </a:pPr>
             <a:r>
-              <a:rPr lang="en-US" sz="1500" b="1" dirty="0">
+              <a:rPr lang="en-US" sz="1600" b="1" dirty="0">
                 <a:solidFill>
                   <a:srgbClr val="1BAF7A"/>
                 </a:solidFill>
               </a:rPr>
               <a:t>✓</a:t>
             </a:r>
-            <a:endParaRPr lang="en-US" sz="1500" dirty="0"/>
+            <a:endParaRPr lang="en-US" sz="1600" dirty="0"/>
           </a:p>
         </p:txBody>
       </p:sp>
@@ -17258,14 +19894,14 @@
               <a:buNone/>
             </a:pPr>
             <a:r>
-              <a:rPr lang="en-US" sz="1300" dirty="0">
+              <a:rPr lang="en-US" sz="1400" dirty="0">
                 <a:solidFill>
                   <a:srgbClr val="1A1A1A"/>
                 </a:solidFill>
               </a:rPr>
               <a:t>Stocks incohérents</a:t>
             </a:r>
-            <a:endParaRPr lang="en-US" sz="1300" dirty="0"/>
+            <a:endParaRPr lang="en-US" sz="1400" dirty="0"/>
           </a:p>
         </p:txBody>
       </p:sp>
@@ -17294,14 +19930,14 @@
               <a:buNone/>
             </a:pPr>
             <a:r>
-              <a:rPr lang="en-US" sz="1400" b="1" dirty="0">
+              <a:rPr lang="en-US" sz="1500" b="1" dirty="0">
                 <a:solidFill>
                   <a:srgbClr val="1BAF7A"/>
                 </a:solidFill>
               </a:rPr>
               <a:t>0</a:t>
             </a:r>
-            <a:endParaRPr lang="en-US" sz="1400" dirty="0"/>
+            <a:endParaRPr lang="en-US" sz="1500" dirty="0"/>
           </a:p>
         </p:txBody>
       </p:sp>
@@ -17330,14 +19966,14 @@
               <a:buNone/>
             </a:pPr>
             <a:r>
-              <a:rPr lang="en-US" sz="1500" b="1" dirty="0">
+              <a:rPr lang="en-US" sz="1600" b="1" dirty="0">
                 <a:solidFill>
                   <a:srgbClr val="1BAF7A"/>
                 </a:solidFill>
               </a:rPr>
               <a:t>✓</a:t>
             </a:r>
-            <a:endParaRPr lang="en-US" sz="1500" dirty="0"/>
+            <a:endParaRPr lang="en-US" sz="1600" dirty="0"/>
           </a:p>
         </p:txBody>
       </p:sp>
@@ -17358,11 +19994,11 @@
             </a:avLst>
           </a:prstGeom>
           <a:solidFill>
-            <a:srgbClr val="F2F5FC"/>
+            <a:srgbClr val="FFFFFF"/>
           </a:solidFill>
           <a:ln w="12700">
             <a:solidFill>
-              <a:srgbClr val="F2F5FC"/>
+              <a:srgbClr val="FFFFFF"/>
             </a:solidFill>
             <a:prstDash val="solid"/>
           </a:ln>
@@ -17396,7 +20032,7 @@
               <a:buNone/>
             </a:pPr>
             <a:r>
-              <a:rPr lang="en-US" sz="1400" b="1" dirty="0">
+              <a:rPr lang="en-US" sz="1500" b="1" dirty="0">
                 <a:solidFill>
                   <a:srgbClr val="1E2761"/>
                 </a:solidFill>
@@ -17410,14 +20046,14 @@
               <a:buNone/>
             </a:pPr>
             <a:r>
-              <a:rPr lang="en-US" sz="1400" dirty="0">
+              <a:rPr lang="en-US" sz="1500" dirty="0">
                 <a:solidFill>
                   <a:srgbClr val="1A1A1A"/>
                 </a:solidFill>
               </a:rPr>
               <a:t>un chiffre faux calculé sur des données mal lues ressemble exactement à un chiffre juste. Rien dans le résultat ne signale le problème.</a:t>
             </a:r>
-            <a:endParaRPr lang="en-US" sz="1400" dirty="0"/>
+            <a:endParaRPr lang="en-US" sz="1500" dirty="0"/>
           </a:p>
         </p:txBody>
       </p:sp>
@@ -17449,9 +20085,9 @@
           <a:bodyPr/>
           <a:lstStyle>
             <a:lvl1pPr>
-              <a:defRPr sz="1000">
-                <a:solidFill>
-                  <a:srgbClr val="52514E"/>
+              <a:defRPr sz="1200">
+                <a:solidFill>
+                  <a:srgbClr val="353430"/>
                 </a:solidFill>
               </a:defRPr>
             </a:lvl1pPr>
@@ -17471,6 +20107,9 @@
   <p:clrMapOvr>
     <a:masterClrMapping/>
   </p:clrMapOvr>
+  <p:transition spd="med" advClick="1">
+    <p:fade/>
+  </p:transition>
 </p:sld>
 </file>
 
